--- a/presentations/.github Presentation/github folder in the project.pptx
+++ b/presentations/.github Presentation/github folder in the project.pptx
@@ -824,7 +824,7 @@
   <p:cSld>
     <p:spTree>
       <p:nvGrpSpPr>
-        <p:cNvPr id="119" name="Shape 119"/>
+        <p:cNvPr id="127" name="Shape 127"/>
         <p:cNvGrpSpPr/>
         <p:nvPr/>
       </p:nvGrpSpPr>
@@ -838,7 +838,7 @@
       </p:grpSpPr>
       <p:sp>
         <p:nvSpPr>
-          <p:cNvPr id="120" name="Google Shape;120;g3d573b5558c_0_165:notes"/>
+          <p:cNvPr id="128" name="Google Shape;128;g3d573b5558c_0_165:notes"/>
           <p:cNvSpPr/>
           <p:nvPr>
             <p:ph idx="2" type="sldImg"/>
@@ -873,7 +873,7 @@
       </p:sp>
       <p:sp>
         <p:nvSpPr>
-          <p:cNvPr id="121" name="Google Shape;121;g3d573b5558c_0_165:notes"/>
+          <p:cNvPr id="129" name="Google Shape;129;g3d573b5558c_0_165:notes"/>
           <p:cNvSpPr txBox="1"/>
           <p:nvPr>
             <p:ph idx="1" type="body"/>
@@ -923,7 +923,7 @@
   <p:cSld>
     <p:spTree>
       <p:nvGrpSpPr>
-        <p:cNvPr id="126" name="Shape 126"/>
+        <p:cNvPr id="135" name="Shape 135"/>
         <p:cNvGrpSpPr/>
         <p:nvPr/>
       </p:nvGrpSpPr>
@@ -937,7 +937,7 @@
       </p:grpSpPr>
       <p:sp>
         <p:nvSpPr>
-          <p:cNvPr id="127" name="Google Shape;127;g3d573b5558c_0_171:notes"/>
+          <p:cNvPr id="136" name="Google Shape;136;g3d573b5558c_0_171:notes"/>
           <p:cNvSpPr/>
           <p:nvPr>
             <p:ph idx="2" type="sldImg"/>
@@ -972,7 +972,7 @@
       </p:sp>
       <p:sp>
         <p:nvSpPr>
-          <p:cNvPr id="128" name="Google Shape;128;g3d573b5558c_0_171:notes"/>
+          <p:cNvPr id="137" name="Google Shape;137;g3d573b5558c_0_171:notes"/>
           <p:cNvSpPr txBox="1"/>
           <p:nvPr>
             <p:ph idx="1" type="body"/>
@@ -1022,7 +1022,7 @@
   <p:cSld>
     <p:spTree>
       <p:nvGrpSpPr>
-        <p:cNvPr id="132" name="Shape 132"/>
+        <p:cNvPr id="142" name="Shape 142"/>
         <p:cNvGrpSpPr/>
         <p:nvPr/>
       </p:nvGrpSpPr>
@@ -1036,7 +1036,7 @@
       </p:grpSpPr>
       <p:sp>
         <p:nvSpPr>
-          <p:cNvPr id="133" name="Google Shape;133;g3d573b5558c_0_177:notes"/>
+          <p:cNvPr id="143" name="Google Shape;143;g3d573b5558c_0_177:notes"/>
           <p:cNvSpPr/>
           <p:nvPr>
             <p:ph idx="2" type="sldImg"/>
@@ -1071,7 +1071,7 @@
       </p:sp>
       <p:sp>
         <p:nvSpPr>
-          <p:cNvPr id="134" name="Google Shape;134;g3d573b5558c_0_177:notes"/>
+          <p:cNvPr id="144" name="Google Shape;144;g3d573b5558c_0_177:notes"/>
           <p:cNvSpPr txBox="1"/>
           <p:nvPr>
             <p:ph idx="1" type="body"/>
@@ -1121,7 +1121,7 @@
   <p:cSld>
     <p:spTree>
       <p:nvGrpSpPr>
-        <p:cNvPr id="140" name="Shape 140"/>
+        <p:cNvPr id="151" name="Shape 151"/>
         <p:cNvGrpSpPr/>
         <p:nvPr/>
       </p:nvGrpSpPr>
@@ -1135,7 +1135,7 @@
       </p:grpSpPr>
       <p:sp>
         <p:nvSpPr>
-          <p:cNvPr id="141" name="Google Shape;141;g3d573b5558c_0_313:notes"/>
+          <p:cNvPr id="152" name="Google Shape;152;g3d573b5558c_0_313:notes"/>
           <p:cNvSpPr/>
           <p:nvPr>
             <p:ph idx="2" type="sldImg"/>
@@ -1170,7 +1170,7 @@
       </p:sp>
       <p:sp>
         <p:nvSpPr>
-          <p:cNvPr id="142" name="Google Shape;142;g3d573b5558c_0_313:notes"/>
+          <p:cNvPr id="153" name="Google Shape;153;g3d573b5558c_0_313:notes"/>
           <p:cNvSpPr txBox="1"/>
           <p:nvPr>
             <p:ph idx="1" type="body"/>
@@ -1220,7 +1220,7 @@
   <p:cSld>
     <p:spTree>
       <p:nvGrpSpPr>
-        <p:cNvPr id="148" name="Shape 148"/>
+        <p:cNvPr id="160" name="Shape 160"/>
         <p:cNvGrpSpPr/>
         <p:nvPr/>
       </p:nvGrpSpPr>
@@ -1234,7 +1234,7 @@
       </p:grpSpPr>
       <p:sp>
         <p:nvSpPr>
-          <p:cNvPr id="149" name="Google Shape;149;g3d573b5558c_0_320:notes"/>
+          <p:cNvPr id="161" name="Google Shape;161;g3d573b5558c_0_320:notes"/>
           <p:cNvSpPr/>
           <p:nvPr>
             <p:ph idx="2" type="sldImg"/>
@@ -1269,7 +1269,7 @@
       </p:sp>
       <p:sp>
         <p:nvSpPr>
-          <p:cNvPr id="150" name="Google Shape;150;g3d573b5558c_0_320:notes"/>
+          <p:cNvPr id="162" name="Google Shape;162;g3d573b5558c_0_320:notes"/>
           <p:cNvSpPr txBox="1"/>
           <p:nvPr>
             <p:ph idx="1" type="body"/>
@@ -1319,7 +1319,7 @@
   <p:cSld>
     <p:spTree>
       <p:nvGrpSpPr>
-        <p:cNvPr id="154" name="Shape 154"/>
+        <p:cNvPr id="167" name="Shape 167"/>
         <p:cNvGrpSpPr/>
         <p:nvPr/>
       </p:nvGrpSpPr>
@@ -1333,7 +1333,7 @@
       </p:grpSpPr>
       <p:sp>
         <p:nvSpPr>
-          <p:cNvPr id="155" name="Google Shape;155;g3d573b5558c_0_326:notes"/>
+          <p:cNvPr id="168" name="Google Shape;168;g3d573b5558c_0_326:notes"/>
           <p:cNvSpPr/>
           <p:nvPr>
             <p:ph idx="2" type="sldImg"/>
@@ -1368,7 +1368,7 @@
       </p:sp>
       <p:sp>
         <p:nvSpPr>
-          <p:cNvPr id="156" name="Google Shape;156;g3d573b5558c_0_326:notes"/>
+          <p:cNvPr id="169" name="Google Shape;169;g3d573b5558c_0_326:notes"/>
           <p:cNvSpPr txBox="1"/>
           <p:nvPr>
             <p:ph idx="1" type="body"/>
@@ -1418,7 +1418,7 @@
   <p:cSld>
     <p:spTree>
       <p:nvGrpSpPr>
-        <p:cNvPr id="162" name="Shape 162"/>
+        <p:cNvPr id="176" name="Shape 176"/>
         <p:cNvGrpSpPr/>
         <p:nvPr/>
       </p:nvGrpSpPr>
@@ -1432,7 +1432,7 @@
       </p:grpSpPr>
       <p:sp>
         <p:nvSpPr>
-          <p:cNvPr id="163" name="Google Shape;163;g3d573b5558c_0_340:notes"/>
+          <p:cNvPr id="177" name="Google Shape;177;g3d573b5558c_0_340:notes"/>
           <p:cNvSpPr/>
           <p:nvPr>
             <p:ph idx="2" type="sldImg"/>
@@ -1467,7 +1467,7 @@
       </p:sp>
       <p:sp>
         <p:nvSpPr>
-          <p:cNvPr id="164" name="Google Shape;164;g3d573b5558c_0_340:notes"/>
+          <p:cNvPr id="178" name="Google Shape;178;g3d573b5558c_0_340:notes"/>
           <p:cNvSpPr txBox="1"/>
           <p:nvPr>
             <p:ph idx="1" type="body"/>
@@ -1517,7 +1517,7 @@
   <p:cSld>
     <p:spTree>
       <p:nvGrpSpPr>
-        <p:cNvPr id="169" name="Shape 169"/>
+        <p:cNvPr id="184" name="Shape 184"/>
         <p:cNvGrpSpPr/>
         <p:nvPr/>
       </p:nvGrpSpPr>
@@ -1531,7 +1531,7 @@
       </p:grpSpPr>
       <p:sp>
         <p:nvSpPr>
-          <p:cNvPr id="170" name="Google Shape;170;g3d59729d16c_0_5:notes"/>
+          <p:cNvPr id="185" name="Google Shape;185;g3d59729d16c_0_5:notes"/>
           <p:cNvSpPr/>
           <p:nvPr>
             <p:ph idx="2" type="sldImg"/>
@@ -1566,7 +1566,7 @@
       </p:sp>
       <p:sp>
         <p:nvSpPr>
-          <p:cNvPr id="171" name="Google Shape;171;g3d59729d16c_0_5:notes"/>
+          <p:cNvPr id="186" name="Google Shape;186;g3d59729d16c_0_5:notes"/>
           <p:cNvSpPr txBox="1"/>
           <p:nvPr>
             <p:ph idx="1" type="body"/>
@@ -1616,7 +1616,7 @@
   <p:cSld>
     <p:spTree>
       <p:nvGrpSpPr>
-        <p:cNvPr id="177" name="Shape 177"/>
+        <p:cNvPr id="193" name="Shape 193"/>
         <p:cNvGrpSpPr/>
         <p:nvPr/>
       </p:nvGrpSpPr>
@@ -1630,7 +1630,7 @@
       </p:grpSpPr>
       <p:sp>
         <p:nvSpPr>
-          <p:cNvPr id="178" name="Google Shape;178;g3d59729d16c_0_14:notes"/>
+          <p:cNvPr id="194" name="Google Shape;194;g3d59729d16c_0_14:notes"/>
           <p:cNvSpPr/>
           <p:nvPr>
             <p:ph idx="2" type="sldImg"/>
@@ -1665,7 +1665,7 @@
       </p:sp>
       <p:sp>
         <p:nvSpPr>
-          <p:cNvPr id="179" name="Google Shape;179;g3d59729d16c_0_14:notes"/>
+          <p:cNvPr id="195" name="Google Shape;195;g3d59729d16c_0_14:notes"/>
           <p:cNvSpPr txBox="1"/>
           <p:nvPr>
             <p:ph idx="1" type="body"/>
@@ -1715,7 +1715,7 @@
   <p:cSld>
     <p:spTree>
       <p:nvGrpSpPr>
-        <p:cNvPr id="185" name="Shape 185"/>
+        <p:cNvPr id="202" name="Shape 202"/>
         <p:cNvGrpSpPr/>
         <p:nvPr/>
       </p:nvGrpSpPr>
@@ -1729,7 +1729,7 @@
       </p:grpSpPr>
       <p:sp>
         <p:nvSpPr>
-          <p:cNvPr id="186" name="Google Shape;186;g3d59729d16c_0_25:notes"/>
+          <p:cNvPr id="203" name="Google Shape;203;g3d59729d16c_0_25:notes"/>
           <p:cNvSpPr/>
           <p:nvPr>
             <p:ph idx="2" type="sldImg"/>
@@ -1764,7 +1764,7 @@
       </p:sp>
       <p:sp>
         <p:nvSpPr>
-          <p:cNvPr id="187" name="Google Shape;187;g3d59729d16c_0_25:notes"/>
+          <p:cNvPr id="204" name="Google Shape;204;g3d59729d16c_0_25:notes"/>
           <p:cNvSpPr txBox="1"/>
           <p:nvPr>
             <p:ph idx="1" type="body"/>
@@ -1913,7 +1913,7 @@
   <p:cSld>
     <p:spTree>
       <p:nvGrpSpPr>
-        <p:cNvPr id="192" name="Shape 192"/>
+        <p:cNvPr id="210" name="Shape 210"/>
         <p:cNvGrpSpPr/>
         <p:nvPr/>
       </p:nvGrpSpPr>
@@ -1927,7 +1927,7 @@
       </p:grpSpPr>
       <p:sp>
         <p:nvSpPr>
-          <p:cNvPr id="193" name="Google Shape;193;g3d59729d16c_0_35:notes"/>
+          <p:cNvPr id="211" name="Google Shape;211;g3d59729d16c_0_35:notes"/>
           <p:cNvSpPr/>
           <p:nvPr>
             <p:ph idx="2" type="sldImg"/>
@@ -1962,7 +1962,7 @@
       </p:sp>
       <p:sp>
         <p:nvSpPr>
-          <p:cNvPr id="194" name="Google Shape;194;g3d59729d16c_0_35:notes"/>
+          <p:cNvPr id="212" name="Google Shape;212;g3d59729d16c_0_35:notes"/>
           <p:cNvSpPr txBox="1"/>
           <p:nvPr>
             <p:ph idx="1" type="body"/>
@@ -2012,7 +2012,7 @@
   <p:cSld>
     <p:spTree>
       <p:nvGrpSpPr>
-        <p:cNvPr id="198" name="Shape 198"/>
+        <p:cNvPr id="217" name="Shape 217"/>
         <p:cNvGrpSpPr/>
         <p:nvPr/>
       </p:nvGrpSpPr>
@@ -2026,7 +2026,7 @@
       </p:grpSpPr>
       <p:sp>
         <p:nvSpPr>
-          <p:cNvPr id="199" name="Google Shape;199;g3d59729d16c_1_65:notes"/>
+          <p:cNvPr id="218" name="Google Shape;218;g3d59729d16c_1_65:notes"/>
           <p:cNvSpPr/>
           <p:nvPr>
             <p:ph idx="2" type="sldImg"/>
@@ -2061,7 +2061,7 @@
       </p:sp>
       <p:sp>
         <p:nvSpPr>
-          <p:cNvPr id="200" name="Google Shape;200;g3d59729d16c_1_65:notes"/>
+          <p:cNvPr id="219" name="Google Shape;219;g3d59729d16c_1_65:notes"/>
           <p:cNvSpPr txBox="1"/>
           <p:nvPr>
             <p:ph idx="1" type="body"/>
@@ -2111,7 +2111,7 @@
   <p:cSld>
     <p:spTree>
       <p:nvGrpSpPr>
-        <p:cNvPr id="70" name="Shape 70"/>
+        <p:cNvPr id="71" name="Shape 71"/>
         <p:cNvGrpSpPr/>
         <p:nvPr/>
       </p:nvGrpSpPr>
@@ -2125,7 +2125,7 @@
       </p:grpSpPr>
       <p:sp>
         <p:nvSpPr>
-          <p:cNvPr id="71" name="Google Shape;71;g3d573b5558c_0_110:notes"/>
+          <p:cNvPr id="72" name="Google Shape;72;g3d573b5558c_0_110:notes"/>
           <p:cNvSpPr/>
           <p:nvPr>
             <p:ph idx="2" type="sldImg"/>
@@ -2160,7 +2160,7 @@
       </p:sp>
       <p:sp>
         <p:nvSpPr>
-          <p:cNvPr id="72" name="Google Shape;72;g3d573b5558c_0_110:notes"/>
+          <p:cNvPr id="73" name="Google Shape;73;g3d573b5558c_0_110:notes"/>
           <p:cNvSpPr txBox="1"/>
           <p:nvPr>
             <p:ph idx="1" type="body"/>
@@ -2210,7 +2210,7 @@
   <p:cSld>
     <p:spTree>
       <p:nvGrpSpPr>
-        <p:cNvPr id="76" name="Shape 76"/>
+        <p:cNvPr id="78" name="Shape 78"/>
         <p:cNvGrpSpPr/>
         <p:nvPr/>
       </p:nvGrpSpPr>
@@ -2224,7 +2224,7 @@
       </p:grpSpPr>
       <p:sp>
         <p:nvSpPr>
-          <p:cNvPr id="77" name="Google Shape;77;g3d573b5558c_0_122:notes"/>
+          <p:cNvPr id="79" name="Google Shape;79;g3d573b5558c_0_122:notes"/>
           <p:cNvSpPr/>
           <p:nvPr>
             <p:ph idx="2" type="sldImg"/>
@@ -2259,7 +2259,7 @@
       </p:sp>
       <p:sp>
         <p:nvSpPr>
-          <p:cNvPr id="78" name="Google Shape;78;g3d573b5558c_0_122:notes"/>
+          <p:cNvPr id="80" name="Google Shape;80;g3d573b5558c_0_122:notes"/>
           <p:cNvSpPr txBox="1"/>
           <p:nvPr>
             <p:ph idx="1" type="body"/>
@@ -2309,7 +2309,7 @@
   <p:cSld>
     <p:spTree>
       <p:nvGrpSpPr>
-        <p:cNvPr id="84" name="Shape 84"/>
+        <p:cNvPr id="87" name="Shape 87"/>
         <p:cNvGrpSpPr/>
         <p:nvPr/>
       </p:nvGrpSpPr>
@@ -2323,7 +2323,7 @@
       </p:grpSpPr>
       <p:sp>
         <p:nvSpPr>
-          <p:cNvPr id="85" name="Google Shape;85;g3d573b5558c_0_126:notes"/>
+          <p:cNvPr id="88" name="Google Shape;88;g3d573b5558c_0_126:notes"/>
           <p:cNvSpPr/>
           <p:nvPr>
             <p:ph idx="2" type="sldImg"/>
@@ -2358,7 +2358,7 @@
       </p:sp>
       <p:sp>
         <p:nvSpPr>
-          <p:cNvPr id="86" name="Google Shape;86;g3d573b5558c_0_126:notes"/>
+          <p:cNvPr id="89" name="Google Shape;89;g3d573b5558c_0_126:notes"/>
           <p:cNvSpPr txBox="1"/>
           <p:nvPr>
             <p:ph idx="1" type="body"/>
@@ -2408,7 +2408,7 @@
   <p:cSld>
     <p:spTree>
       <p:nvGrpSpPr>
-        <p:cNvPr id="92" name="Shape 92"/>
+        <p:cNvPr id="96" name="Shape 96"/>
         <p:cNvGrpSpPr/>
         <p:nvPr/>
       </p:nvGrpSpPr>
@@ -2422,7 +2422,7 @@
       </p:grpSpPr>
       <p:sp>
         <p:nvSpPr>
-          <p:cNvPr id="93" name="Google Shape;93;g3d573b5558c_0_137:notes"/>
+          <p:cNvPr id="97" name="Google Shape;97;g3d573b5558c_0_137:notes"/>
           <p:cNvSpPr/>
           <p:nvPr>
             <p:ph idx="2" type="sldImg"/>
@@ -2457,7 +2457,7 @@
       </p:sp>
       <p:sp>
         <p:nvSpPr>
-          <p:cNvPr id="94" name="Google Shape;94;g3d573b5558c_0_137:notes"/>
+          <p:cNvPr id="98" name="Google Shape;98;g3d573b5558c_0_137:notes"/>
           <p:cNvSpPr txBox="1"/>
           <p:nvPr>
             <p:ph idx="1" type="body"/>
@@ -2507,7 +2507,7 @@
   <p:cSld>
     <p:spTree>
       <p:nvGrpSpPr>
-        <p:cNvPr id="98" name="Shape 98"/>
+        <p:cNvPr id="103" name="Shape 103"/>
         <p:cNvGrpSpPr/>
         <p:nvPr/>
       </p:nvGrpSpPr>
@@ -2521,7 +2521,7 @@
       </p:grpSpPr>
       <p:sp>
         <p:nvSpPr>
-          <p:cNvPr id="99" name="Google Shape;99;g3d573b5558c_0_144:notes"/>
+          <p:cNvPr id="104" name="Google Shape;104;g3d573b5558c_0_144:notes"/>
           <p:cNvSpPr/>
           <p:nvPr>
             <p:ph idx="2" type="sldImg"/>
@@ -2556,7 +2556,7 @@
       </p:sp>
       <p:sp>
         <p:nvSpPr>
-          <p:cNvPr id="100" name="Google Shape;100;g3d573b5558c_0_144:notes"/>
+          <p:cNvPr id="105" name="Google Shape;105;g3d573b5558c_0_144:notes"/>
           <p:cNvSpPr txBox="1"/>
           <p:nvPr>
             <p:ph idx="1" type="body"/>
@@ -2606,7 +2606,7 @@
   <p:cSld>
     <p:spTree>
       <p:nvGrpSpPr>
-        <p:cNvPr id="105" name="Shape 105"/>
+        <p:cNvPr id="111" name="Shape 111"/>
         <p:cNvGrpSpPr/>
         <p:nvPr/>
       </p:nvGrpSpPr>
@@ -2620,7 +2620,7 @@
       </p:grpSpPr>
       <p:sp>
         <p:nvSpPr>
-          <p:cNvPr id="106" name="Google Shape;106;g3d573b5558c_0_150:notes"/>
+          <p:cNvPr id="112" name="Google Shape;112;g3d573b5558c_0_150:notes"/>
           <p:cNvSpPr/>
           <p:nvPr>
             <p:ph idx="2" type="sldImg"/>
@@ -2655,7 +2655,7 @@
       </p:sp>
       <p:sp>
         <p:nvSpPr>
-          <p:cNvPr id="107" name="Google Shape;107;g3d573b5558c_0_150:notes"/>
+          <p:cNvPr id="113" name="Google Shape;113;g3d573b5558c_0_150:notes"/>
           <p:cNvSpPr txBox="1"/>
           <p:nvPr>
             <p:ph idx="1" type="body"/>
@@ -2705,7 +2705,7 @@
   <p:cSld>
     <p:spTree>
       <p:nvGrpSpPr>
-        <p:cNvPr id="112" name="Shape 112"/>
+        <p:cNvPr id="119" name="Shape 119"/>
         <p:cNvGrpSpPr/>
         <p:nvPr/>
       </p:nvGrpSpPr>
@@ -2719,7 +2719,7 @@
       </p:grpSpPr>
       <p:sp>
         <p:nvSpPr>
-          <p:cNvPr id="113" name="Google Shape;113;g3d573b5558c_0_158:notes"/>
+          <p:cNvPr id="120" name="Google Shape;120;g3d573b5558c_0_158:notes"/>
           <p:cNvSpPr/>
           <p:nvPr>
             <p:ph idx="2" type="sldImg"/>
@@ -2754,7 +2754,7 @@
       </p:sp>
       <p:sp>
         <p:nvSpPr>
-          <p:cNvPr id="114" name="Google Shape;114;g3d573b5558c_0_158:notes"/>
+          <p:cNvPr id="121" name="Google Shape;121;g3d573b5558c_0_158:notes"/>
           <p:cNvSpPr txBox="1"/>
           <p:nvPr>
             <p:ph idx="1" type="body"/>
@@ -7567,7 +7567,7 @@
     <p:sldLayoutId id="2147483657" r:id="rId10"/>
     <p:sldLayoutId id="2147483658" r:id="rId11"/>
   </p:sldLayoutIdLst>
-  <p:hf dt="0" ftr="0" hdr="0" sldNum="0"/>
+  <p:hf dt="0" ftr="0" hdr="0"/>
   <p:txStyles>
     <p:titleStyle>
       <a:defPPr lvl="0" marR="0" rtl="0" algn="l">
@@ -8374,7 +8374,7 @@
   <p:cSld>
     <p:spTree>
       <p:nvGrpSpPr>
-        <p:cNvPr id="122" name="Shape 122"/>
+        <p:cNvPr id="130" name="Shape 130"/>
         <p:cNvGrpSpPr/>
         <p:nvPr/>
       </p:nvGrpSpPr>
@@ -8388,7 +8388,7 @@
       </p:grpSpPr>
       <p:sp>
         <p:nvSpPr>
-          <p:cNvPr id="123" name="Google Shape;123;p22"/>
+          <p:cNvPr id="131" name="Google Shape;131;p22"/>
           <p:cNvSpPr txBox="1"/>
           <p:nvPr>
             <p:ph type="title"/>
@@ -8436,7 +8436,7 @@
       </p:sp>
       <p:sp>
         <p:nvSpPr>
-          <p:cNvPr id="124" name="Google Shape;124;p22"/>
+          <p:cNvPr id="132" name="Google Shape;132;p22"/>
           <p:cNvSpPr txBox="1"/>
           <p:nvPr>
             <p:ph idx="1" type="body"/>
@@ -8586,7 +8586,7 @@
       </p:sp>
       <p:pic>
         <p:nvPicPr>
-          <p:cNvPr id="125" name="Google Shape;125;p22"/>
+          <p:cNvPr id="133" name="Google Shape;133;p22"/>
           <p:cNvPicPr preferRelativeResize="0"/>
           <p:nvPr/>
         </p:nvPicPr>
@@ -8612,6 +8612,65 @@
           </a:ln>
         </p:spPr>
       </p:pic>
+      <p:sp>
+        <p:nvSpPr>
+          <p:cNvPr id="134" name="Google Shape;134;p22"/>
+          <p:cNvSpPr txBox="1"/>
+          <p:nvPr>
+            <p:ph idx="12" type="sldNum"/>
+          </p:nvPr>
+        </p:nvSpPr>
+        <p:spPr>
+          <a:xfrm>
+            <a:off x="8070669" y="4663225"/>
+            <a:ext cx="950400" cy="393600"/>
+          </a:xfrm>
+          <a:prstGeom prst="rect">
+            <a:avLst/>
+          </a:prstGeom>
+        </p:spPr>
+        <p:txBody>
+          <a:bodyPr anchorCtr="0" anchor="ctr" bIns="91425" lIns="91425" spcFirstLastPara="1" rIns="91425" wrap="square" tIns="91425">
+            <a:noAutofit/>
+          </a:bodyPr>
+          <a:lstStyle/>
+          <a:p>
+            <a:pPr indent="0" lvl="0" marL="0" rtl="0" algn="r">
+              <a:spcBef>
+                <a:spcPts val="0"/>
+              </a:spcBef>
+              <a:spcAft>
+                <a:spcPts val="0"/>
+              </a:spcAft>
+              <a:buNone/>
+            </a:pPr>
+            <a:r>
+              <a:rPr b="1" lang="uk" sz="2200">
+                <a:latin typeface="Oswald"/>
+                <a:ea typeface="Oswald"/>
+                <a:cs typeface="Oswald"/>
+                <a:sym typeface="Oswald"/>
+              </a:rPr>
+              <a:t># </a:t>
+            </a:r>
+            <a:fld id="{00000000-1234-1234-1234-123412341234}" type="slidenum">
+              <a:rPr b="1" lang="uk" sz="2200">
+                <a:latin typeface="Oswald"/>
+                <a:ea typeface="Oswald"/>
+                <a:cs typeface="Oswald"/>
+                <a:sym typeface="Oswald"/>
+              </a:rPr>
+              <a:t>‹#›</a:t>
+            </a:fld>
+            <a:endParaRPr b="1" sz="2200">
+              <a:latin typeface="Oswald"/>
+              <a:ea typeface="Oswald"/>
+              <a:cs typeface="Oswald"/>
+              <a:sym typeface="Oswald"/>
+            </a:endParaRPr>
+          </a:p>
+        </p:txBody>
+      </p:sp>
     </p:spTree>
   </p:cSld>
   <p:clrMapOvr>
@@ -8625,7 +8684,7 @@
   <p:cSld>
     <p:spTree>
       <p:nvGrpSpPr>
-        <p:cNvPr id="129" name="Shape 129"/>
+        <p:cNvPr id="138" name="Shape 138"/>
         <p:cNvGrpSpPr/>
         <p:nvPr/>
       </p:nvGrpSpPr>
@@ -8639,7 +8698,7 @@
       </p:grpSpPr>
       <p:sp>
         <p:nvSpPr>
-          <p:cNvPr id="130" name="Google Shape;130;p23"/>
+          <p:cNvPr id="139" name="Google Shape;139;p23"/>
           <p:cNvSpPr txBox="1"/>
           <p:nvPr>
             <p:ph type="title"/>
@@ -8679,7 +8738,7 @@
       </p:sp>
       <p:sp>
         <p:nvSpPr>
-          <p:cNvPr id="131" name="Google Shape;131;p23"/>
+          <p:cNvPr id="140" name="Google Shape;140;p23"/>
           <p:cNvSpPr txBox="1"/>
           <p:nvPr/>
         </p:nvSpPr>
@@ -8972,6 +9031,65 @@
           </a:p>
         </p:txBody>
       </p:sp>
+      <p:sp>
+        <p:nvSpPr>
+          <p:cNvPr id="141" name="Google Shape;141;p23"/>
+          <p:cNvSpPr txBox="1"/>
+          <p:nvPr>
+            <p:ph idx="12" type="sldNum"/>
+          </p:nvPr>
+        </p:nvSpPr>
+        <p:spPr>
+          <a:xfrm>
+            <a:off x="8316298" y="4663225"/>
+            <a:ext cx="705000" cy="393600"/>
+          </a:xfrm>
+          <a:prstGeom prst="rect">
+            <a:avLst/>
+          </a:prstGeom>
+        </p:spPr>
+        <p:txBody>
+          <a:bodyPr anchorCtr="0" anchor="ctr" bIns="91425" lIns="91425" spcFirstLastPara="1" rIns="91425" wrap="square" tIns="91425">
+            <a:noAutofit/>
+          </a:bodyPr>
+          <a:lstStyle/>
+          <a:p>
+            <a:pPr indent="0" lvl="0" marL="0" rtl="0" algn="r">
+              <a:spcBef>
+                <a:spcPts val="0"/>
+              </a:spcBef>
+              <a:spcAft>
+                <a:spcPts val="0"/>
+              </a:spcAft>
+              <a:buNone/>
+            </a:pPr>
+            <a:r>
+              <a:rPr b="1" i="1" lang="uk" sz="2200">
+                <a:latin typeface="Oswald"/>
+                <a:ea typeface="Oswald"/>
+                <a:cs typeface="Oswald"/>
+                <a:sym typeface="Oswald"/>
+              </a:rPr>
+              <a:t># </a:t>
+            </a:r>
+            <a:fld id="{00000000-1234-1234-1234-123412341234}" type="slidenum">
+              <a:rPr b="1" lang="uk" sz="2200">
+                <a:latin typeface="Oswald"/>
+                <a:ea typeface="Oswald"/>
+                <a:cs typeface="Oswald"/>
+                <a:sym typeface="Oswald"/>
+              </a:rPr>
+              <a:t>‹#›</a:t>
+            </a:fld>
+            <a:endParaRPr b="1" sz="2200">
+              <a:latin typeface="Oswald"/>
+              <a:ea typeface="Oswald"/>
+              <a:cs typeface="Oswald"/>
+              <a:sym typeface="Oswald"/>
+            </a:endParaRPr>
+          </a:p>
+        </p:txBody>
+      </p:sp>
     </p:spTree>
   </p:cSld>
   <p:clrMapOvr>
@@ -8985,7 +9103,7 @@
   <p:cSld>
     <p:spTree>
       <p:nvGrpSpPr>
-        <p:cNvPr id="135" name="Shape 135"/>
+        <p:cNvPr id="145" name="Shape 145"/>
         <p:cNvGrpSpPr/>
         <p:nvPr/>
       </p:nvGrpSpPr>
@@ -8999,7 +9117,7 @@
       </p:grpSpPr>
       <p:sp>
         <p:nvSpPr>
-          <p:cNvPr id="136" name="Google Shape;136;p24"/>
+          <p:cNvPr id="146" name="Google Shape;146;p24"/>
           <p:cNvSpPr txBox="1"/>
           <p:nvPr>
             <p:ph type="title"/>
@@ -9040,7 +9158,7 @@
       </p:sp>
       <p:sp>
         <p:nvSpPr>
-          <p:cNvPr id="137" name="Google Shape;137;p24"/>
+          <p:cNvPr id="147" name="Google Shape;147;p24"/>
           <p:cNvSpPr txBox="1"/>
           <p:nvPr/>
         </p:nvSpPr>
@@ -9369,7 +9487,7 @@
       </p:sp>
       <p:pic>
         <p:nvPicPr>
-          <p:cNvPr id="138" name="Google Shape;138;p24"/>
+          <p:cNvPr id="148" name="Google Shape;148;p24"/>
           <p:cNvPicPr preferRelativeResize="0"/>
           <p:nvPr/>
         </p:nvPicPr>
@@ -9397,7 +9515,7 @@
       </p:pic>
       <p:pic>
         <p:nvPicPr>
-          <p:cNvPr id="139" name="Google Shape;139;p24"/>
+          <p:cNvPr id="149" name="Google Shape;149;p24"/>
           <p:cNvPicPr preferRelativeResize="0"/>
           <p:nvPr/>
         </p:nvPicPr>
@@ -9423,6 +9541,65 @@
           </a:ln>
         </p:spPr>
       </p:pic>
+      <p:sp>
+        <p:nvSpPr>
+          <p:cNvPr id="150" name="Google Shape;150;p24"/>
+          <p:cNvSpPr txBox="1"/>
+          <p:nvPr>
+            <p:ph idx="12" type="sldNum"/>
+          </p:nvPr>
+        </p:nvSpPr>
+        <p:spPr>
+          <a:xfrm>
+            <a:off x="8280172" y="4663225"/>
+            <a:ext cx="741000" cy="393600"/>
+          </a:xfrm>
+          <a:prstGeom prst="rect">
+            <a:avLst/>
+          </a:prstGeom>
+        </p:spPr>
+        <p:txBody>
+          <a:bodyPr anchorCtr="0" anchor="ctr" bIns="91425" lIns="91425" spcFirstLastPara="1" rIns="91425" wrap="square" tIns="91425">
+            <a:noAutofit/>
+          </a:bodyPr>
+          <a:lstStyle/>
+          <a:p>
+            <a:pPr indent="0" lvl="0" marL="0" rtl="0" algn="r">
+              <a:spcBef>
+                <a:spcPts val="0"/>
+              </a:spcBef>
+              <a:spcAft>
+                <a:spcPts val="0"/>
+              </a:spcAft>
+              <a:buNone/>
+            </a:pPr>
+            <a:r>
+              <a:rPr b="1" i="1" lang="uk" sz="2200">
+                <a:latin typeface="Oswald"/>
+                <a:ea typeface="Oswald"/>
+                <a:cs typeface="Oswald"/>
+                <a:sym typeface="Oswald"/>
+              </a:rPr>
+              <a:t># </a:t>
+            </a:r>
+            <a:fld id="{00000000-1234-1234-1234-123412341234}" type="slidenum">
+              <a:rPr b="1" lang="uk" sz="2200">
+                <a:latin typeface="Oswald"/>
+                <a:ea typeface="Oswald"/>
+                <a:cs typeface="Oswald"/>
+                <a:sym typeface="Oswald"/>
+              </a:rPr>
+              <a:t>‹#›</a:t>
+            </a:fld>
+            <a:endParaRPr b="1" sz="2200">
+              <a:latin typeface="Oswald"/>
+              <a:ea typeface="Oswald"/>
+              <a:cs typeface="Oswald"/>
+              <a:sym typeface="Oswald"/>
+            </a:endParaRPr>
+          </a:p>
+        </p:txBody>
+      </p:sp>
     </p:spTree>
   </p:cSld>
   <p:clrMapOvr>
@@ -9436,7 +9613,7 @@
   <p:cSld>
     <p:spTree>
       <p:nvGrpSpPr>
-        <p:cNvPr id="143" name="Shape 143"/>
+        <p:cNvPr id="154" name="Shape 154"/>
         <p:cNvGrpSpPr/>
         <p:nvPr/>
       </p:nvGrpSpPr>
@@ -9450,7 +9627,7 @@
       </p:grpSpPr>
       <p:sp>
         <p:nvSpPr>
-          <p:cNvPr id="144" name="Google Shape;144;p25"/>
+          <p:cNvPr id="155" name="Google Shape;155;p25"/>
           <p:cNvSpPr txBox="1"/>
           <p:nvPr>
             <p:ph type="title"/>
@@ -9490,7 +9667,7 @@
       </p:sp>
       <p:sp>
         <p:nvSpPr>
-          <p:cNvPr id="145" name="Google Shape;145;p25"/>
+          <p:cNvPr id="156" name="Google Shape;156;p25"/>
           <p:cNvSpPr txBox="1"/>
           <p:nvPr/>
         </p:nvSpPr>
@@ -9629,7 +9806,7 @@
       </p:sp>
       <p:pic>
         <p:nvPicPr>
-          <p:cNvPr id="146" name="Google Shape;146;p25"/>
+          <p:cNvPr id="157" name="Google Shape;157;p25"/>
           <p:cNvPicPr preferRelativeResize="0"/>
           <p:nvPr/>
         </p:nvPicPr>
@@ -9656,7 +9833,7 @@
       </p:pic>
       <p:sp>
         <p:nvSpPr>
-          <p:cNvPr id="147" name="Google Shape;147;p25"/>
+          <p:cNvPr id="158" name="Google Shape;158;p25"/>
           <p:cNvSpPr txBox="1"/>
           <p:nvPr/>
         </p:nvSpPr>
@@ -9735,6 +9912,65 @@
           </a:p>
         </p:txBody>
       </p:sp>
+      <p:sp>
+        <p:nvSpPr>
+          <p:cNvPr id="159" name="Google Shape;159;p25"/>
+          <p:cNvSpPr txBox="1"/>
+          <p:nvPr>
+            <p:ph idx="12" type="sldNum"/>
+          </p:nvPr>
+        </p:nvSpPr>
+        <p:spPr>
+          <a:xfrm>
+            <a:off x="8330725" y="4663225"/>
+            <a:ext cx="690300" cy="393600"/>
+          </a:xfrm>
+          <a:prstGeom prst="rect">
+            <a:avLst/>
+          </a:prstGeom>
+        </p:spPr>
+        <p:txBody>
+          <a:bodyPr anchorCtr="0" anchor="ctr" bIns="91425" lIns="91425" spcFirstLastPara="1" rIns="91425" wrap="square" tIns="91425">
+            <a:noAutofit/>
+          </a:bodyPr>
+          <a:lstStyle/>
+          <a:p>
+            <a:pPr indent="0" lvl="0" marL="0" rtl="0" algn="r">
+              <a:spcBef>
+                <a:spcPts val="0"/>
+              </a:spcBef>
+              <a:spcAft>
+                <a:spcPts val="0"/>
+              </a:spcAft>
+              <a:buNone/>
+            </a:pPr>
+            <a:r>
+              <a:rPr b="1" i="1" lang="uk" sz="2200">
+                <a:latin typeface="Oswald"/>
+                <a:ea typeface="Oswald"/>
+                <a:cs typeface="Oswald"/>
+                <a:sym typeface="Oswald"/>
+              </a:rPr>
+              <a:t># </a:t>
+            </a:r>
+            <a:fld id="{00000000-1234-1234-1234-123412341234}" type="slidenum">
+              <a:rPr b="1" lang="uk" sz="2200">
+                <a:latin typeface="Oswald"/>
+                <a:ea typeface="Oswald"/>
+                <a:cs typeface="Oswald"/>
+                <a:sym typeface="Oswald"/>
+              </a:rPr>
+              <a:t>‹#›</a:t>
+            </a:fld>
+            <a:endParaRPr b="1" sz="2200">
+              <a:latin typeface="Oswald"/>
+              <a:ea typeface="Oswald"/>
+              <a:cs typeface="Oswald"/>
+              <a:sym typeface="Oswald"/>
+            </a:endParaRPr>
+          </a:p>
+        </p:txBody>
+      </p:sp>
     </p:spTree>
   </p:cSld>
   <p:clrMapOvr>
@@ -9748,7 +9984,7 @@
   <p:cSld>
     <p:spTree>
       <p:nvGrpSpPr>
-        <p:cNvPr id="151" name="Shape 151"/>
+        <p:cNvPr id="163" name="Shape 163"/>
         <p:cNvGrpSpPr/>
         <p:nvPr/>
       </p:nvGrpSpPr>
@@ -9762,7 +9998,7 @@
       </p:grpSpPr>
       <p:sp>
         <p:nvSpPr>
-          <p:cNvPr id="152" name="Google Shape;152;p26"/>
+          <p:cNvPr id="164" name="Google Shape;164;p26"/>
           <p:cNvSpPr txBox="1"/>
           <p:nvPr>
             <p:ph type="title"/>
@@ -9802,7 +10038,7 @@
       </p:sp>
       <p:sp>
         <p:nvSpPr>
-          <p:cNvPr id="153" name="Google Shape;153;p26"/>
+          <p:cNvPr id="165" name="Google Shape;165;p26"/>
           <p:cNvSpPr txBox="1"/>
           <p:nvPr/>
         </p:nvSpPr>
@@ -10232,6 +10468,65 @@
           </a:p>
         </p:txBody>
       </p:sp>
+      <p:sp>
+        <p:nvSpPr>
+          <p:cNvPr id="166" name="Google Shape;166;p26"/>
+          <p:cNvSpPr txBox="1"/>
+          <p:nvPr>
+            <p:ph idx="12" type="sldNum"/>
+          </p:nvPr>
+        </p:nvSpPr>
+        <p:spPr>
+          <a:xfrm>
+            <a:off x="8309073" y="4663225"/>
+            <a:ext cx="712200" cy="393600"/>
+          </a:xfrm>
+          <a:prstGeom prst="rect">
+            <a:avLst/>
+          </a:prstGeom>
+        </p:spPr>
+        <p:txBody>
+          <a:bodyPr anchorCtr="0" anchor="ctr" bIns="91425" lIns="91425" spcFirstLastPara="1" rIns="91425" wrap="square" tIns="91425">
+            <a:noAutofit/>
+          </a:bodyPr>
+          <a:lstStyle/>
+          <a:p>
+            <a:pPr indent="0" lvl="0" marL="0" rtl="0" algn="r">
+              <a:spcBef>
+                <a:spcPts val="0"/>
+              </a:spcBef>
+              <a:spcAft>
+                <a:spcPts val="0"/>
+              </a:spcAft>
+              <a:buNone/>
+            </a:pPr>
+            <a:r>
+              <a:rPr b="1" i="1" lang="uk" sz="2200">
+                <a:latin typeface="Oswald"/>
+                <a:ea typeface="Oswald"/>
+                <a:cs typeface="Oswald"/>
+                <a:sym typeface="Oswald"/>
+              </a:rPr>
+              <a:t># </a:t>
+            </a:r>
+            <a:fld id="{00000000-1234-1234-1234-123412341234}" type="slidenum">
+              <a:rPr b="1" lang="uk" sz="2200">
+                <a:latin typeface="Oswald"/>
+                <a:ea typeface="Oswald"/>
+                <a:cs typeface="Oswald"/>
+                <a:sym typeface="Oswald"/>
+              </a:rPr>
+              <a:t>‹#›</a:t>
+            </a:fld>
+            <a:endParaRPr b="1" sz="2200">
+              <a:latin typeface="Oswald"/>
+              <a:ea typeface="Oswald"/>
+              <a:cs typeface="Oswald"/>
+              <a:sym typeface="Oswald"/>
+            </a:endParaRPr>
+          </a:p>
+        </p:txBody>
+      </p:sp>
     </p:spTree>
   </p:cSld>
   <p:clrMapOvr>
@@ -10245,7 +10540,7 @@
   <p:cSld>
     <p:spTree>
       <p:nvGrpSpPr>
-        <p:cNvPr id="157" name="Shape 157"/>
+        <p:cNvPr id="170" name="Shape 170"/>
         <p:cNvGrpSpPr/>
         <p:nvPr/>
       </p:nvGrpSpPr>
@@ -10259,7 +10554,7 @@
       </p:grpSpPr>
       <p:pic>
         <p:nvPicPr>
-          <p:cNvPr id="158" name="Google Shape;158;p27"/>
+          <p:cNvPr id="171" name="Google Shape;171;p27"/>
           <p:cNvPicPr preferRelativeResize="0"/>
           <p:nvPr/>
         </p:nvPicPr>
@@ -10287,7 +10582,7 @@
       </p:pic>
       <p:pic>
         <p:nvPicPr>
-          <p:cNvPr id="159" name="Google Shape;159;p27"/>
+          <p:cNvPr id="172" name="Google Shape;172;p27"/>
           <p:cNvPicPr preferRelativeResize="0"/>
           <p:nvPr/>
         </p:nvPicPr>
@@ -10315,7 +10610,7 @@
       </p:pic>
       <p:sp>
         <p:nvSpPr>
-          <p:cNvPr id="160" name="Google Shape;160;p27"/>
+          <p:cNvPr id="173" name="Google Shape;173;p27"/>
           <p:cNvSpPr txBox="1"/>
           <p:nvPr/>
         </p:nvSpPr>
@@ -10364,7 +10659,7 @@
       </p:sp>
       <p:sp>
         <p:nvSpPr>
-          <p:cNvPr id="161" name="Google Shape;161;p27"/>
+          <p:cNvPr id="174" name="Google Shape;174;p27"/>
           <p:cNvSpPr txBox="1"/>
           <p:nvPr/>
         </p:nvSpPr>
@@ -10543,6 +10838,65 @@
           </a:p>
         </p:txBody>
       </p:sp>
+      <p:sp>
+        <p:nvSpPr>
+          <p:cNvPr id="175" name="Google Shape;175;p27"/>
+          <p:cNvSpPr txBox="1"/>
+          <p:nvPr>
+            <p:ph idx="12" type="sldNum"/>
+          </p:nvPr>
+        </p:nvSpPr>
+        <p:spPr>
+          <a:xfrm>
+            <a:off x="8337950" y="4663225"/>
+            <a:ext cx="683100" cy="393600"/>
+          </a:xfrm>
+          <a:prstGeom prst="rect">
+            <a:avLst/>
+          </a:prstGeom>
+        </p:spPr>
+        <p:txBody>
+          <a:bodyPr anchorCtr="0" anchor="ctr" bIns="91425" lIns="91425" spcFirstLastPara="1" rIns="91425" wrap="square" tIns="91425">
+            <a:noAutofit/>
+          </a:bodyPr>
+          <a:lstStyle/>
+          <a:p>
+            <a:pPr indent="0" lvl="0" marL="0" rtl="0" algn="ctr">
+              <a:spcBef>
+                <a:spcPts val="0"/>
+              </a:spcBef>
+              <a:spcAft>
+                <a:spcPts val="0"/>
+              </a:spcAft>
+              <a:buNone/>
+            </a:pPr>
+            <a:r>
+              <a:rPr b="1" i="1" lang="uk" sz="2200">
+                <a:latin typeface="Oswald"/>
+                <a:ea typeface="Oswald"/>
+                <a:cs typeface="Oswald"/>
+                <a:sym typeface="Oswald"/>
+              </a:rPr>
+              <a:t># </a:t>
+            </a:r>
+            <a:fld id="{00000000-1234-1234-1234-123412341234}" type="slidenum">
+              <a:rPr b="1" lang="uk" sz="2200">
+                <a:latin typeface="Oswald"/>
+                <a:ea typeface="Oswald"/>
+                <a:cs typeface="Oswald"/>
+                <a:sym typeface="Oswald"/>
+              </a:rPr>
+              <a:t>‹#›</a:t>
+            </a:fld>
+            <a:endParaRPr b="1" sz="2200">
+              <a:latin typeface="Oswald"/>
+              <a:ea typeface="Oswald"/>
+              <a:cs typeface="Oswald"/>
+              <a:sym typeface="Oswald"/>
+            </a:endParaRPr>
+          </a:p>
+        </p:txBody>
+      </p:sp>
     </p:spTree>
   </p:cSld>
   <p:clrMapOvr>
@@ -10556,7 +10910,7 @@
   <p:cSld>
     <p:spTree>
       <p:nvGrpSpPr>
-        <p:cNvPr id="165" name="Shape 165"/>
+        <p:cNvPr id="179" name="Shape 179"/>
         <p:cNvGrpSpPr/>
         <p:nvPr/>
       </p:nvGrpSpPr>
@@ -10570,7 +10924,7 @@
       </p:grpSpPr>
       <p:pic>
         <p:nvPicPr>
-          <p:cNvPr id="166" name="Google Shape;166;p28"/>
+          <p:cNvPr id="180" name="Google Shape;180;p28"/>
           <p:cNvPicPr preferRelativeResize="0"/>
           <p:nvPr/>
         </p:nvPicPr>
@@ -10598,7 +10952,7 @@
       </p:pic>
       <p:sp>
         <p:nvSpPr>
-          <p:cNvPr id="167" name="Google Shape;167;p28"/>
+          <p:cNvPr id="181" name="Google Shape;181;p28"/>
           <p:cNvSpPr txBox="1"/>
           <p:nvPr/>
         </p:nvSpPr>
@@ -10787,7 +11141,7 @@
       </p:sp>
       <p:sp>
         <p:nvSpPr>
-          <p:cNvPr id="168" name="Google Shape;168;p28"/>
+          <p:cNvPr id="182" name="Google Shape;182;p28"/>
           <p:cNvSpPr txBox="1"/>
           <p:nvPr/>
         </p:nvSpPr>
@@ -10997,6 +11351,65 @@
           </a:p>
         </p:txBody>
       </p:sp>
+      <p:sp>
+        <p:nvSpPr>
+          <p:cNvPr id="183" name="Google Shape;183;p28"/>
+          <p:cNvSpPr txBox="1"/>
+          <p:nvPr>
+            <p:ph idx="12" type="sldNum"/>
+          </p:nvPr>
+        </p:nvSpPr>
+        <p:spPr>
+          <a:xfrm>
+            <a:off x="8352398" y="4663225"/>
+            <a:ext cx="668700" cy="393600"/>
+          </a:xfrm>
+          <a:prstGeom prst="rect">
+            <a:avLst/>
+          </a:prstGeom>
+        </p:spPr>
+        <p:txBody>
+          <a:bodyPr anchorCtr="0" anchor="ctr" bIns="91425" lIns="91425" spcFirstLastPara="1" rIns="91425" wrap="square" tIns="91425">
+            <a:noAutofit/>
+          </a:bodyPr>
+          <a:lstStyle/>
+          <a:p>
+            <a:pPr indent="0" lvl="0" marL="0" rtl="0" algn="ctr">
+              <a:spcBef>
+                <a:spcPts val="0"/>
+              </a:spcBef>
+              <a:spcAft>
+                <a:spcPts val="0"/>
+              </a:spcAft>
+              <a:buNone/>
+            </a:pPr>
+            <a:r>
+              <a:rPr b="1" i="1" lang="uk" sz="2200">
+                <a:latin typeface="Oswald"/>
+                <a:ea typeface="Oswald"/>
+                <a:cs typeface="Oswald"/>
+                <a:sym typeface="Oswald"/>
+              </a:rPr>
+              <a:t># </a:t>
+            </a:r>
+            <a:fld id="{00000000-1234-1234-1234-123412341234}" type="slidenum">
+              <a:rPr b="1" lang="uk" sz="2200">
+                <a:latin typeface="Oswald"/>
+                <a:ea typeface="Oswald"/>
+                <a:cs typeface="Oswald"/>
+                <a:sym typeface="Oswald"/>
+              </a:rPr>
+              <a:t>‹#›</a:t>
+            </a:fld>
+            <a:endParaRPr b="1" sz="2200">
+              <a:latin typeface="Oswald"/>
+              <a:ea typeface="Oswald"/>
+              <a:cs typeface="Oswald"/>
+              <a:sym typeface="Oswald"/>
+            </a:endParaRPr>
+          </a:p>
+        </p:txBody>
+      </p:sp>
     </p:spTree>
   </p:cSld>
   <p:clrMapOvr>
@@ -11010,7 +11423,7 @@
   <p:cSld>
     <p:spTree>
       <p:nvGrpSpPr>
-        <p:cNvPr id="172" name="Shape 172"/>
+        <p:cNvPr id="187" name="Shape 187"/>
         <p:cNvGrpSpPr/>
         <p:nvPr/>
       </p:nvGrpSpPr>
@@ -11024,7 +11437,7 @@
       </p:grpSpPr>
       <p:pic>
         <p:nvPicPr>
-          <p:cNvPr id="173" name="Google Shape;173;p29"/>
+          <p:cNvPr id="188" name="Google Shape;188;p29"/>
           <p:cNvPicPr preferRelativeResize="0"/>
           <p:nvPr/>
         </p:nvPicPr>
@@ -11052,7 +11465,7 @@
       </p:pic>
       <p:pic>
         <p:nvPicPr>
-          <p:cNvPr id="174" name="Google Shape;174;p29"/>
+          <p:cNvPr id="189" name="Google Shape;189;p29"/>
           <p:cNvPicPr preferRelativeResize="0"/>
           <p:nvPr/>
         </p:nvPicPr>
@@ -11080,7 +11493,7 @@
       </p:pic>
       <p:sp>
         <p:nvSpPr>
-          <p:cNvPr id="175" name="Google Shape;175;p29"/>
+          <p:cNvPr id="190" name="Google Shape;190;p29"/>
           <p:cNvSpPr txBox="1"/>
           <p:nvPr/>
         </p:nvSpPr>
@@ -11196,7 +11609,7 @@
       </p:sp>
       <p:sp>
         <p:nvSpPr>
-          <p:cNvPr id="176" name="Google Shape;176;p29"/>
+          <p:cNvPr id="191" name="Google Shape;191;p29"/>
           <p:cNvSpPr txBox="1"/>
           <p:nvPr/>
         </p:nvSpPr>
@@ -11390,6 +11803,65 @@
           </a:p>
         </p:txBody>
       </p:sp>
+      <p:sp>
+        <p:nvSpPr>
+          <p:cNvPr id="192" name="Google Shape;192;p29"/>
+          <p:cNvSpPr txBox="1"/>
+          <p:nvPr>
+            <p:ph idx="12" type="sldNum"/>
+          </p:nvPr>
+        </p:nvSpPr>
+        <p:spPr>
+          <a:xfrm>
+            <a:off x="6440649" y="4597600"/>
+            <a:ext cx="672000" cy="393600"/>
+          </a:xfrm>
+          <a:prstGeom prst="rect">
+            <a:avLst/>
+          </a:prstGeom>
+        </p:spPr>
+        <p:txBody>
+          <a:bodyPr anchorCtr="0" anchor="ctr" bIns="91425" lIns="91425" spcFirstLastPara="1" rIns="91425" wrap="square" tIns="91425">
+            <a:noAutofit/>
+          </a:bodyPr>
+          <a:lstStyle/>
+          <a:p>
+            <a:pPr indent="0" lvl="0" marL="0" rtl="0" algn="l">
+              <a:spcBef>
+                <a:spcPts val="0"/>
+              </a:spcBef>
+              <a:spcAft>
+                <a:spcPts val="0"/>
+              </a:spcAft>
+              <a:buNone/>
+            </a:pPr>
+            <a:r>
+              <a:rPr b="1" i="1" lang="uk" sz="2200">
+                <a:latin typeface="Oswald"/>
+                <a:ea typeface="Oswald"/>
+                <a:cs typeface="Oswald"/>
+                <a:sym typeface="Oswald"/>
+              </a:rPr>
+              <a:t># </a:t>
+            </a:r>
+            <a:fld id="{00000000-1234-1234-1234-123412341234}" type="slidenum">
+              <a:rPr b="1" lang="uk" sz="2200">
+                <a:latin typeface="Oswald"/>
+                <a:ea typeface="Oswald"/>
+                <a:cs typeface="Oswald"/>
+                <a:sym typeface="Oswald"/>
+              </a:rPr>
+              <a:t>‹#›</a:t>
+            </a:fld>
+            <a:endParaRPr b="1" sz="2200">
+              <a:latin typeface="Oswald"/>
+              <a:ea typeface="Oswald"/>
+              <a:cs typeface="Oswald"/>
+              <a:sym typeface="Oswald"/>
+            </a:endParaRPr>
+          </a:p>
+        </p:txBody>
+      </p:sp>
     </p:spTree>
   </p:cSld>
   <p:clrMapOvr>
@@ -11403,7 +11875,7 @@
   <p:cSld>
     <p:spTree>
       <p:nvGrpSpPr>
-        <p:cNvPr id="180" name="Shape 180"/>
+        <p:cNvPr id="196" name="Shape 196"/>
         <p:cNvGrpSpPr/>
         <p:nvPr/>
       </p:nvGrpSpPr>
@@ -11417,7 +11889,7 @@
       </p:grpSpPr>
       <p:pic>
         <p:nvPicPr>
-          <p:cNvPr id="181" name="Google Shape;181;p30"/>
+          <p:cNvPr id="197" name="Google Shape;197;p30"/>
           <p:cNvPicPr preferRelativeResize="0"/>
           <p:nvPr/>
         </p:nvPicPr>
@@ -11445,7 +11917,7 @@
       </p:pic>
       <p:sp>
         <p:nvSpPr>
-          <p:cNvPr id="182" name="Google Shape;182;p30"/>
+          <p:cNvPr id="198" name="Google Shape;198;p30"/>
           <p:cNvSpPr txBox="1"/>
           <p:nvPr/>
         </p:nvSpPr>
@@ -11610,7 +12082,7 @@
       </p:sp>
       <p:sp>
         <p:nvSpPr>
-          <p:cNvPr id="183" name="Google Shape;183;p30"/>
+          <p:cNvPr id="199" name="Google Shape;199;p30"/>
           <p:cNvSpPr txBox="1"/>
           <p:nvPr/>
         </p:nvSpPr>
@@ -11837,7 +12309,7 @@
       </p:sp>
       <p:pic>
         <p:nvPicPr>
-          <p:cNvPr id="184" name="Google Shape;184;p30"/>
+          <p:cNvPr id="200" name="Google Shape;200;p30"/>
           <p:cNvPicPr preferRelativeResize="0"/>
           <p:nvPr/>
         </p:nvPicPr>
@@ -11863,6 +12335,65 @@
           </a:ln>
         </p:spPr>
       </p:pic>
+      <p:sp>
+        <p:nvSpPr>
+          <p:cNvPr id="201" name="Google Shape;201;p30"/>
+          <p:cNvSpPr txBox="1"/>
+          <p:nvPr>
+            <p:ph idx="12" type="sldNum"/>
+          </p:nvPr>
+        </p:nvSpPr>
+        <p:spPr>
+          <a:xfrm>
+            <a:off x="8207925" y="4663225"/>
+            <a:ext cx="813300" cy="393600"/>
+          </a:xfrm>
+          <a:prstGeom prst="rect">
+            <a:avLst/>
+          </a:prstGeom>
+        </p:spPr>
+        <p:txBody>
+          <a:bodyPr anchorCtr="0" anchor="ctr" bIns="91425" lIns="91425" spcFirstLastPara="1" rIns="91425" wrap="square" tIns="91425">
+            <a:noAutofit/>
+          </a:bodyPr>
+          <a:lstStyle/>
+          <a:p>
+            <a:pPr indent="0" lvl="0" marL="0" rtl="0" algn="ctr">
+              <a:spcBef>
+                <a:spcPts val="0"/>
+              </a:spcBef>
+              <a:spcAft>
+                <a:spcPts val="0"/>
+              </a:spcAft>
+              <a:buNone/>
+            </a:pPr>
+            <a:r>
+              <a:rPr b="1" i="1" lang="uk" sz="2200">
+                <a:latin typeface="Oswald"/>
+                <a:ea typeface="Oswald"/>
+                <a:cs typeface="Oswald"/>
+                <a:sym typeface="Oswald"/>
+              </a:rPr>
+              <a:t> # </a:t>
+            </a:r>
+            <a:fld id="{00000000-1234-1234-1234-123412341234}" type="slidenum">
+              <a:rPr b="1" lang="uk" sz="2200">
+                <a:latin typeface="Oswald"/>
+                <a:ea typeface="Oswald"/>
+                <a:cs typeface="Oswald"/>
+                <a:sym typeface="Oswald"/>
+              </a:rPr>
+              <a:t>‹#›</a:t>
+            </a:fld>
+            <a:endParaRPr b="1" sz="2200">
+              <a:latin typeface="Oswald"/>
+              <a:ea typeface="Oswald"/>
+              <a:cs typeface="Oswald"/>
+              <a:sym typeface="Oswald"/>
+            </a:endParaRPr>
+          </a:p>
+        </p:txBody>
+      </p:sp>
     </p:spTree>
   </p:cSld>
   <p:clrMapOvr>
@@ -11876,7 +12407,7 @@
   <p:cSld>
     <p:spTree>
       <p:nvGrpSpPr>
-        <p:cNvPr id="188" name="Shape 188"/>
+        <p:cNvPr id="205" name="Shape 205"/>
         <p:cNvGrpSpPr/>
         <p:nvPr/>
       </p:nvGrpSpPr>
@@ -11890,7 +12421,7 @@
       </p:grpSpPr>
       <p:sp>
         <p:nvSpPr>
-          <p:cNvPr id="189" name="Google Shape;189;p31"/>
+          <p:cNvPr id="206" name="Google Shape;206;p31"/>
           <p:cNvSpPr txBox="1"/>
           <p:nvPr/>
         </p:nvSpPr>
@@ -11948,7 +12479,7 @@
       </p:sp>
       <p:sp>
         <p:nvSpPr>
-          <p:cNvPr id="190" name="Google Shape;190;p31"/>
+          <p:cNvPr id="207" name="Google Shape;207;p31"/>
           <p:cNvSpPr txBox="1"/>
           <p:nvPr/>
         </p:nvSpPr>
@@ -12206,16 +12737,54 @@
               <a:sym typeface="Source Code Pro"/>
             </a:endParaRPr>
           </a:p>
+          <a:p>
+            <a:pPr indent="-342900" lvl="0" marL="457200" rtl="0" algn="l">
+              <a:spcBef>
+                <a:spcPts val="0"/>
+              </a:spcBef>
+              <a:spcAft>
+                <a:spcPts val="0"/>
+              </a:spcAft>
+              <a:buClr>
+                <a:schemeClr val="dk2"/>
+              </a:buClr>
+              <a:buSzPts val="1800"/>
+              <a:buFont typeface="Source Code Pro"/>
+              <a:buChar char="❏"/>
+            </a:pPr>
+            <a:r>
+              <a:rPr lang="uk" sz="1800" u="sng">
+                <a:solidFill>
+                  <a:schemeClr val="hlink"/>
+                </a:solidFill>
+                <a:latin typeface="Source Code Pro"/>
+                <a:ea typeface="Source Code Pro"/>
+                <a:cs typeface="Source Code Pro"/>
+                <a:sym typeface="Source Code Pro"/>
+                <a:hlinkClick r:id="rId4"/>
+              </a:rPr>
+              <a:t>Get agent skills here</a:t>
+            </a:r>
+            <a:endParaRPr sz="1800">
+              <a:solidFill>
+                <a:schemeClr val="dk2"/>
+              </a:solidFill>
+              <a:latin typeface="Source Code Pro"/>
+              <a:ea typeface="Source Code Pro"/>
+              <a:cs typeface="Source Code Pro"/>
+              <a:sym typeface="Source Code Pro"/>
+            </a:endParaRPr>
+          </a:p>
         </p:txBody>
       </p:sp>
       <p:pic>
         <p:nvPicPr>
-          <p:cNvPr id="191" name="Google Shape;191;p31"/>
+          <p:cNvPr id="208" name="Google Shape;208;p31"/>
           <p:cNvPicPr preferRelativeResize="0"/>
           <p:nvPr/>
         </p:nvPicPr>
         <p:blipFill>
-          <a:blip r:embed="rId4">
+          <a:blip r:embed="rId5">
             <a:alphaModFix/>
           </a:blip>
           <a:stretch>
@@ -12236,6 +12805,65 @@
           </a:ln>
         </p:spPr>
       </p:pic>
+      <p:sp>
+        <p:nvSpPr>
+          <p:cNvPr id="209" name="Google Shape;209;p31"/>
+          <p:cNvSpPr txBox="1"/>
+          <p:nvPr>
+            <p:ph idx="12" type="sldNum"/>
+          </p:nvPr>
+        </p:nvSpPr>
+        <p:spPr>
+          <a:xfrm>
+            <a:off x="8323498" y="4663225"/>
+            <a:ext cx="697800" cy="393600"/>
+          </a:xfrm>
+          <a:prstGeom prst="rect">
+            <a:avLst/>
+          </a:prstGeom>
+        </p:spPr>
+        <p:txBody>
+          <a:bodyPr anchorCtr="0" anchor="ctr" bIns="91425" lIns="91425" spcFirstLastPara="1" rIns="91425" wrap="square" tIns="91425">
+            <a:noAutofit/>
+          </a:bodyPr>
+          <a:lstStyle/>
+          <a:p>
+            <a:pPr indent="0" lvl="0" marL="0" rtl="0" algn="r">
+              <a:spcBef>
+                <a:spcPts val="0"/>
+              </a:spcBef>
+              <a:spcAft>
+                <a:spcPts val="0"/>
+              </a:spcAft>
+              <a:buNone/>
+            </a:pPr>
+            <a:r>
+              <a:rPr b="1" i="1" lang="uk" sz="2200">
+                <a:latin typeface="Oswald"/>
+                <a:ea typeface="Oswald"/>
+                <a:cs typeface="Oswald"/>
+                <a:sym typeface="Oswald"/>
+              </a:rPr>
+              <a:t># </a:t>
+            </a:r>
+            <a:fld id="{00000000-1234-1234-1234-123412341234}" type="slidenum">
+              <a:rPr b="1" lang="uk" sz="2200">
+                <a:latin typeface="Oswald"/>
+                <a:ea typeface="Oswald"/>
+                <a:cs typeface="Oswald"/>
+                <a:sym typeface="Oswald"/>
+              </a:rPr>
+              <a:t>‹#›</a:t>
+            </a:fld>
+            <a:endParaRPr b="1" sz="2200">
+              <a:latin typeface="Oswald"/>
+              <a:ea typeface="Oswald"/>
+              <a:cs typeface="Oswald"/>
+              <a:sym typeface="Oswald"/>
+            </a:endParaRPr>
+          </a:p>
+        </p:txBody>
+      </p:sp>
     </p:spTree>
   </p:cSld>
   <p:clrMapOvr>
@@ -12373,6 +13001,65 @@
           </a:p>
         </p:txBody>
       </p:sp>
+      <p:sp>
+        <p:nvSpPr>
+          <p:cNvPr id="70" name="Google Shape;70;p14"/>
+          <p:cNvSpPr txBox="1"/>
+          <p:nvPr>
+            <p:ph idx="12" type="sldNum"/>
+          </p:nvPr>
+        </p:nvSpPr>
+        <p:spPr>
+          <a:xfrm>
+            <a:off x="8424649" y="4663225"/>
+            <a:ext cx="596400" cy="393600"/>
+          </a:xfrm>
+          <a:prstGeom prst="rect">
+            <a:avLst/>
+          </a:prstGeom>
+        </p:spPr>
+        <p:txBody>
+          <a:bodyPr anchorCtr="0" anchor="ctr" bIns="91425" lIns="91425" spcFirstLastPara="1" rIns="91425" wrap="square" tIns="91425">
+            <a:noAutofit/>
+          </a:bodyPr>
+          <a:lstStyle/>
+          <a:p>
+            <a:pPr indent="0" lvl="0" marL="0" rtl="0" algn="r">
+              <a:spcBef>
+                <a:spcPts val="0"/>
+              </a:spcBef>
+              <a:spcAft>
+                <a:spcPts val="0"/>
+              </a:spcAft>
+              <a:buNone/>
+            </a:pPr>
+            <a:r>
+              <a:rPr b="1" i="1" lang="uk" sz="2200">
+                <a:latin typeface="Oswald"/>
+                <a:ea typeface="Oswald"/>
+                <a:cs typeface="Oswald"/>
+                <a:sym typeface="Oswald"/>
+              </a:rPr>
+              <a:t># </a:t>
+            </a:r>
+            <a:fld id="{00000000-1234-1234-1234-123412341234}" type="slidenum">
+              <a:rPr b="1" lang="uk" sz="2200">
+                <a:latin typeface="Oswald"/>
+                <a:ea typeface="Oswald"/>
+                <a:cs typeface="Oswald"/>
+                <a:sym typeface="Oswald"/>
+              </a:rPr>
+              <a:t>‹#›</a:t>
+            </a:fld>
+            <a:endParaRPr b="1" sz="2200">
+              <a:latin typeface="Oswald"/>
+              <a:ea typeface="Oswald"/>
+              <a:cs typeface="Oswald"/>
+              <a:sym typeface="Oswald"/>
+            </a:endParaRPr>
+          </a:p>
+        </p:txBody>
+      </p:sp>
     </p:spTree>
   </p:cSld>
   <p:clrMapOvr>
@@ -12386,7 +13073,7 @@
   <p:cSld>
     <p:spTree>
       <p:nvGrpSpPr>
-        <p:cNvPr id="195" name="Shape 195"/>
+        <p:cNvPr id="213" name="Shape 213"/>
         <p:cNvGrpSpPr/>
         <p:nvPr/>
       </p:nvGrpSpPr>
@@ -12400,7 +13087,7 @@
       </p:grpSpPr>
       <p:sp>
         <p:nvSpPr>
-          <p:cNvPr id="196" name="Google Shape;196;p32"/>
+          <p:cNvPr id="214" name="Google Shape;214;p32"/>
           <p:cNvSpPr txBox="1"/>
           <p:nvPr>
             <p:ph type="title"/>
@@ -12440,7 +13127,7 @@
       </p:sp>
       <p:sp>
         <p:nvSpPr>
-          <p:cNvPr id="197" name="Google Shape;197;p32"/>
+          <p:cNvPr id="215" name="Google Shape;215;p32"/>
           <p:cNvSpPr txBox="1"/>
           <p:nvPr/>
         </p:nvSpPr>
@@ -12883,6 +13570,65 @@
           </a:p>
         </p:txBody>
       </p:sp>
+      <p:sp>
+        <p:nvSpPr>
+          <p:cNvPr id="216" name="Google Shape;216;p32"/>
+          <p:cNvSpPr txBox="1"/>
+          <p:nvPr>
+            <p:ph idx="12" type="sldNum"/>
+          </p:nvPr>
+        </p:nvSpPr>
+        <p:spPr>
+          <a:xfrm>
+            <a:off x="8034543" y="4663225"/>
+            <a:ext cx="1051500" cy="393600"/>
+          </a:xfrm>
+          <a:prstGeom prst="rect">
+            <a:avLst/>
+          </a:prstGeom>
+        </p:spPr>
+        <p:txBody>
+          <a:bodyPr anchorCtr="0" anchor="ctr" bIns="91425" lIns="91425" spcFirstLastPara="1" rIns="91425" wrap="square" tIns="91425">
+            <a:noAutofit/>
+          </a:bodyPr>
+          <a:lstStyle/>
+          <a:p>
+            <a:pPr indent="0" lvl="0" marL="0" rtl="0" algn="ctr">
+              <a:spcBef>
+                <a:spcPts val="0"/>
+              </a:spcBef>
+              <a:spcAft>
+                <a:spcPts val="0"/>
+              </a:spcAft>
+              <a:buNone/>
+            </a:pPr>
+            <a:r>
+              <a:rPr b="1" i="1" lang="uk" sz="2200">
+                <a:latin typeface="Oswald"/>
+                <a:ea typeface="Oswald"/>
+                <a:cs typeface="Oswald"/>
+                <a:sym typeface="Oswald"/>
+              </a:rPr>
+              <a:t># </a:t>
+            </a:r>
+            <a:r>
+              <a:rPr b="1" lang="uk" sz="2200">
+                <a:latin typeface="Oswald"/>
+                <a:ea typeface="Oswald"/>
+                <a:cs typeface="Oswald"/>
+                <a:sym typeface="Oswald"/>
+              </a:rPr>
+              <a:t>20</a:t>
+            </a:r>
+            <a:endParaRPr b="1" sz="2200">
+              <a:latin typeface="Oswald"/>
+              <a:ea typeface="Oswald"/>
+              <a:cs typeface="Oswald"/>
+              <a:sym typeface="Oswald"/>
+            </a:endParaRPr>
+          </a:p>
+        </p:txBody>
+      </p:sp>
     </p:spTree>
   </p:cSld>
   <p:clrMapOvr>
@@ -12896,7 +13642,7 @@
   <p:cSld>
     <p:spTree>
       <p:nvGrpSpPr>
-        <p:cNvPr id="201" name="Shape 201"/>
+        <p:cNvPr id="220" name="Shape 220"/>
         <p:cNvGrpSpPr/>
         <p:nvPr/>
       </p:nvGrpSpPr>
@@ -12910,7 +13656,7 @@
       </p:grpSpPr>
       <p:sp>
         <p:nvSpPr>
-          <p:cNvPr id="202" name="Google Shape;202;p33"/>
+          <p:cNvPr id="221" name="Google Shape;221;p33"/>
           <p:cNvSpPr txBox="1"/>
           <p:nvPr/>
         </p:nvSpPr>
@@ -13331,6 +14077,74 @@
           </a:p>
         </p:txBody>
       </p:sp>
+      <p:sp>
+        <p:nvSpPr>
+          <p:cNvPr id="222" name="Google Shape;222;p33"/>
+          <p:cNvSpPr txBox="1"/>
+          <p:nvPr>
+            <p:ph idx="12" type="sldNum"/>
+          </p:nvPr>
+        </p:nvSpPr>
+        <p:spPr>
+          <a:xfrm>
+            <a:off x="8280175" y="4663225"/>
+            <a:ext cx="741000" cy="393600"/>
+          </a:xfrm>
+          <a:prstGeom prst="rect">
+            <a:avLst/>
+          </a:prstGeom>
+        </p:spPr>
+        <p:txBody>
+          <a:bodyPr anchorCtr="0" anchor="ctr" bIns="91425" lIns="91425" spcFirstLastPara="1" rIns="91425" wrap="square" tIns="91425">
+            <a:noAutofit/>
+          </a:bodyPr>
+          <a:lstStyle/>
+          <a:p>
+            <a:pPr indent="0" lvl="0" marL="0" rtl="0" algn="l">
+              <a:spcBef>
+                <a:spcPts val="0"/>
+              </a:spcBef>
+              <a:spcAft>
+                <a:spcPts val="0"/>
+              </a:spcAft>
+              <a:buNone/>
+            </a:pPr>
+            <a:r>
+              <a:rPr b="1" i="1" lang="uk" sz="2200">
+                <a:latin typeface="Oswald"/>
+                <a:ea typeface="Oswald"/>
+                <a:cs typeface="Oswald"/>
+                <a:sym typeface="Oswald"/>
+              </a:rPr>
+              <a:t>#</a:t>
+            </a:r>
+            <a:r>
+              <a:rPr b="1" lang="uk" sz="2200">
+                <a:latin typeface="Oswald"/>
+                <a:ea typeface="Oswald"/>
+                <a:cs typeface="Oswald"/>
+                <a:sym typeface="Oswald"/>
+              </a:rPr>
+              <a:t> </a:t>
+            </a:r>
+            <a:fld id="{00000000-1234-1234-1234-123412341234}" type="slidenum">
+              <a:rPr b="1" lang="uk" sz="2200">
+                <a:latin typeface="Oswald"/>
+                <a:ea typeface="Oswald"/>
+                <a:cs typeface="Oswald"/>
+                <a:sym typeface="Oswald"/>
+              </a:rPr>
+              <a:t>‹#›</a:t>
+            </a:fld>
+            <a:endParaRPr b="1" sz="2200">
+              <a:latin typeface="Oswald"/>
+              <a:ea typeface="Oswald"/>
+              <a:cs typeface="Oswald"/>
+              <a:sym typeface="Oswald"/>
+            </a:endParaRPr>
+          </a:p>
+        </p:txBody>
+      </p:sp>
     </p:spTree>
   </p:cSld>
   <p:clrMapOvr>
@@ -13344,7 +14158,7 @@
   <p:cSld>
     <p:spTree>
       <p:nvGrpSpPr>
-        <p:cNvPr id="73" name="Shape 73"/>
+        <p:cNvPr id="74" name="Shape 74"/>
         <p:cNvGrpSpPr/>
         <p:nvPr/>
       </p:nvGrpSpPr>
@@ -13358,7 +14172,7 @@
       </p:grpSpPr>
       <p:sp>
         <p:nvSpPr>
-          <p:cNvPr id="74" name="Google Shape;74;p15"/>
+          <p:cNvPr id="75" name="Google Shape;75;p15"/>
           <p:cNvSpPr txBox="1"/>
           <p:nvPr>
             <p:ph type="title"/>
@@ -13407,7 +14221,7 @@
       </p:sp>
       <p:sp>
         <p:nvSpPr>
-          <p:cNvPr id="75" name="Google Shape;75;p15"/>
+          <p:cNvPr id="76" name="Google Shape;76;p15"/>
           <p:cNvSpPr txBox="1"/>
           <p:nvPr/>
         </p:nvSpPr>
@@ -13566,6 +14380,65 @@
           </a:p>
         </p:txBody>
       </p:sp>
+      <p:sp>
+        <p:nvSpPr>
+          <p:cNvPr id="77" name="Google Shape;77;p15"/>
+          <p:cNvSpPr txBox="1"/>
+          <p:nvPr>
+            <p:ph idx="12" type="sldNum"/>
+          </p:nvPr>
+        </p:nvSpPr>
+        <p:spPr>
+          <a:xfrm>
+            <a:off x="8446325" y="4663225"/>
+            <a:ext cx="574800" cy="393600"/>
+          </a:xfrm>
+          <a:prstGeom prst="rect">
+            <a:avLst/>
+          </a:prstGeom>
+        </p:spPr>
+        <p:txBody>
+          <a:bodyPr anchorCtr="0" anchor="ctr" bIns="91425" lIns="91425" spcFirstLastPara="1" rIns="91425" wrap="square" tIns="91425">
+            <a:noAutofit/>
+          </a:bodyPr>
+          <a:lstStyle/>
+          <a:p>
+            <a:pPr indent="0" lvl="0" marL="0" rtl="0" algn="l">
+              <a:spcBef>
+                <a:spcPts val="0"/>
+              </a:spcBef>
+              <a:spcAft>
+                <a:spcPts val="0"/>
+              </a:spcAft>
+              <a:buNone/>
+            </a:pPr>
+            <a:r>
+              <a:rPr b="1" i="1" lang="uk" sz="2200">
+                <a:latin typeface="Oswald"/>
+                <a:ea typeface="Oswald"/>
+                <a:cs typeface="Oswald"/>
+                <a:sym typeface="Oswald"/>
+              </a:rPr>
+              <a:t># </a:t>
+            </a:r>
+            <a:fld id="{00000000-1234-1234-1234-123412341234}" type="slidenum">
+              <a:rPr b="1" lang="uk" sz="2200">
+                <a:latin typeface="Oswald"/>
+                <a:ea typeface="Oswald"/>
+                <a:cs typeface="Oswald"/>
+                <a:sym typeface="Oswald"/>
+              </a:rPr>
+              <a:t>‹#›</a:t>
+            </a:fld>
+            <a:endParaRPr b="1" sz="2200">
+              <a:latin typeface="Oswald"/>
+              <a:ea typeface="Oswald"/>
+              <a:cs typeface="Oswald"/>
+              <a:sym typeface="Oswald"/>
+            </a:endParaRPr>
+          </a:p>
+        </p:txBody>
+      </p:sp>
     </p:spTree>
   </p:cSld>
   <p:clrMapOvr>
@@ -13579,7 +14452,7 @@
   <p:cSld>
     <p:spTree>
       <p:nvGrpSpPr>
-        <p:cNvPr id="79" name="Shape 79"/>
+        <p:cNvPr id="81" name="Shape 81"/>
         <p:cNvGrpSpPr/>
         <p:nvPr/>
       </p:nvGrpSpPr>
@@ -13593,7 +14466,7 @@
       </p:grpSpPr>
       <p:sp>
         <p:nvSpPr>
-          <p:cNvPr id="80" name="Google Shape;80;p16"/>
+          <p:cNvPr id="82" name="Google Shape;82;p16"/>
           <p:cNvSpPr txBox="1"/>
           <p:nvPr>
             <p:ph type="title"/>
@@ -13641,7 +14514,7 @@
       </p:sp>
       <p:sp>
         <p:nvSpPr>
-          <p:cNvPr id="81" name="Google Shape;81;p16"/>
+          <p:cNvPr id="83" name="Google Shape;83;p16"/>
           <p:cNvSpPr txBox="1"/>
           <p:nvPr>
             <p:ph idx="1" type="body"/>
@@ -13811,7 +14684,7 @@
       </p:sp>
       <p:pic>
         <p:nvPicPr>
-          <p:cNvPr id="82" name="Google Shape;82;p16"/>
+          <p:cNvPr id="84" name="Google Shape;84;p16"/>
           <p:cNvPicPr preferRelativeResize="0"/>
           <p:nvPr/>
         </p:nvPicPr>
@@ -13825,7 +14698,7 @@
         </p:blipFill>
         <p:spPr>
           <a:xfrm>
-            <a:off x="5062775" y="4091100"/>
+            <a:off x="5016300" y="3888825"/>
             <a:ext cx="3853050" cy="695550"/>
           </a:xfrm>
           <a:prstGeom prst="rect">
@@ -13839,7 +14712,7 @@
       </p:pic>
       <p:pic>
         <p:nvPicPr>
-          <p:cNvPr id="83" name="Google Shape;83;p16"/>
+          <p:cNvPr id="85" name="Google Shape;85;p16"/>
           <p:cNvPicPr preferRelativeResize="0"/>
           <p:nvPr/>
         </p:nvPicPr>
@@ -13853,7 +14726,7 @@
         </p:blipFill>
         <p:spPr>
           <a:xfrm>
-            <a:off x="5667125" y="1222688"/>
+            <a:off x="5667138" y="1020413"/>
             <a:ext cx="2644333" cy="2723937"/>
           </a:xfrm>
           <a:prstGeom prst="rect">
@@ -13865,6 +14738,65 @@
           </a:ln>
         </p:spPr>
       </p:pic>
+      <p:sp>
+        <p:nvSpPr>
+          <p:cNvPr id="86" name="Google Shape;86;p16"/>
+          <p:cNvSpPr txBox="1"/>
+          <p:nvPr>
+            <p:ph idx="12" type="sldNum"/>
+          </p:nvPr>
+        </p:nvSpPr>
+        <p:spPr>
+          <a:xfrm>
+            <a:off x="8417424" y="4663225"/>
+            <a:ext cx="603600" cy="393600"/>
+          </a:xfrm>
+          <a:prstGeom prst="rect">
+            <a:avLst/>
+          </a:prstGeom>
+        </p:spPr>
+        <p:txBody>
+          <a:bodyPr anchorCtr="0" anchor="ctr" bIns="91425" lIns="91425" spcFirstLastPara="1" rIns="91425" wrap="square" tIns="91425">
+            <a:noAutofit/>
+          </a:bodyPr>
+          <a:lstStyle/>
+          <a:p>
+            <a:pPr indent="0" lvl="0" marL="0" rtl="0" algn="l">
+              <a:spcBef>
+                <a:spcPts val="0"/>
+              </a:spcBef>
+              <a:spcAft>
+                <a:spcPts val="0"/>
+              </a:spcAft>
+              <a:buNone/>
+            </a:pPr>
+            <a:r>
+              <a:rPr b="1" i="1" lang="uk" sz="2200">
+                <a:latin typeface="Oswald"/>
+                <a:ea typeface="Oswald"/>
+                <a:cs typeface="Oswald"/>
+                <a:sym typeface="Oswald"/>
+              </a:rPr>
+              <a:t># </a:t>
+            </a:r>
+            <a:fld id="{00000000-1234-1234-1234-123412341234}" type="slidenum">
+              <a:rPr b="1" lang="uk" sz="2200">
+                <a:latin typeface="Oswald"/>
+                <a:ea typeface="Oswald"/>
+                <a:cs typeface="Oswald"/>
+                <a:sym typeface="Oswald"/>
+              </a:rPr>
+              <a:t>‹#›</a:t>
+            </a:fld>
+            <a:endParaRPr b="1" sz="2200">
+              <a:latin typeface="Oswald"/>
+              <a:ea typeface="Oswald"/>
+              <a:cs typeface="Oswald"/>
+              <a:sym typeface="Oswald"/>
+            </a:endParaRPr>
+          </a:p>
+        </p:txBody>
+      </p:sp>
     </p:spTree>
   </p:cSld>
   <p:clrMapOvr>
@@ -13878,7 +14810,7 @@
   <p:cSld>
     <p:spTree>
       <p:nvGrpSpPr>
-        <p:cNvPr id="87" name="Shape 87"/>
+        <p:cNvPr id="90" name="Shape 90"/>
         <p:cNvGrpSpPr/>
         <p:nvPr/>
       </p:nvGrpSpPr>
@@ -13892,7 +14824,7 @@
       </p:grpSpPr>
       <p:sp>
         <p:nvSpPr>
-          <p:cNvPr id="88" name="Google Shape;88;p17"/>
+          <p:cNvPr id="91" name="Google Shape;91;p17"/>
           <p:cNvSpPr txBox="1"/>
           <p:nvPr>
             <p:ph type="title"/>
@@ -13932,7 +14864,7 @@
       </p:sp>
       <p:pic>
         <p:nvPicPr>
-          <p:cNvPr id="89" name="Google Shape;89;p17"/>
+          <p:cNvPr id="92" name="Google Shape;92;p17"/>
           <p:cNvPicPr preferRelativeResize="0"/>
           <p:nvPr/>
         </p:nvPicPr>
@@ -13960,7 +14892,7 @@
       </p:pic>
       <p:pic>
         <p:nvPicPr>
-          <p:cNvPr id="90" name="Google Shape;90;p17"/>
+          <p:cNvPr id="93" name="Google Shape;93;p17"/>
           <p:cNvPicPr preferRelativeResize="0"/>
           <p:nvPr/>
         </p:nvPicPr>
@@ -13988,7 +14920,7 @@
       </p:pic>
       <p:sp>
         <p:nvSpPr>
-          <p:cNvPr id="91" name="Google Shape;91;p17"/>
+          <p:cNvPr id="94" name="Google Shape;94;p17"/>
           <p:cNvSpPr txBox="1"/>
           <p:nvPr/>
         </p:nvSpPr>
@@ -14136,6 +15068,65 @@
           </a:p>
         </p:txBody>
       </p:sp>
+      <p:sp>
+        <p:nvSpPr>
+          <p:cNvPr id="95" name="Google Shape;95;p17"/>
+          <p:cNvSpPr txBox="1"/>
+          <p:nvPr>
+            <p:ph idx="12" type="sldNum"/>
+          </p:nvPr>
+        </p:nvSpPr>
+        <p:spPr>
+          <a:xfrm>
+            <a:off x="8472458" y="4663217"/>
+            <a:ext cx="548700" cy="393600"/>
+          </a:xfrm>
+          <a:prstGeom prst="rect">
+            <a:avLst/>
+          </a:prstGeom>
+        </p:spPr>
+        <p:txBody>
+          <a:bodyPr anchorCtr="0" anchor="ctr" bIns="91425" lIns="91425" spcFirstLastPara="1" rIns="91425" wrap="square" tIns="91425">
+            <a:noAutofit/>
+          </a:bodyPr>
+          <a:lstStyle/>
+          <a:p>
+            <a:pPr indent="0" lvl="0" marL="0" rtl="0" algn="l">
+              <a:spcBef>
+                <a:spcPts val="0"/>
+              </a:spcBef>
+              <a:spcAft>
+                <a:spcPts val="0"/>
+              </a:spcAft>
+              <a:buNone/>
+            </a:pPr>
+            <a:r>
+              <a:rPr b="1" lang="uk" sz="2200">
+                <a:latin typeface="Oswald"/>
+                <a:ea typeface="Oswald"/>
+                <a:cs typeface="Oswald"/>
+                <a:sym typeface="Oswald"/>
+              </a:rPr>
+              <a:t># </a:t>
+            </a:r>
+            <a:fld id="{00000000-1234-1234-1234-123412341234}" type="slidenum">
+              <a:rPr b="1" lang="uk" sz="2200">
+                <a:latin typeface="Oswald"/>
+                <a:ea typeface="Oswald"/>
+                <a:cs typeface="Oswald"/>
+                <a:sym typeface="Oswald"/>
+              </a:rPr>
+              <a:t>‹#›</a:t>
+            </a:fld>
+            <a:endParaRPr b="1" sz="2200">
+              <a:latin typeface="Oswald"/>
+              <a:ea typeface="Oswald"/>
+              <a:cs typeface="Oswald"/>
+              <a:sym typeface="Oswald"/>
+            </a:endParaRPr>
+          </a:p>
+        </p:txBody>
+      </p:sp>
     </p:spTree>
   </p:cSld>
   <p:clrMapOvr>
@@ -14149,7 +15140,7 @@
   <p:cSld>
     <p:spTree>
       <p:nvGrpSpPr>
-        <p:cNvPr id="95" name="Shape 95"/>
+        <p:cNvPr id="99" name="Shape 99"/>
         <p:cNvGrpSpPr/>
         <p:nvPr/>
       </p:nvGrpSpPr>
@@ -14163,7 +15154,7 @@
       </p:grpSpPr>
       <p:sp>
         <p:nvSpPr>
-          <p:cNvPr id="96" name="Google Shape;96;p18"/>
+          <p:cNvPr id="100" name="Google Shape;100;p18"/>
           <p:cNvSpPr txBox="1"/>
           <p:nvPr>
             <p:ph type="title"/>
@@ -14203,7 +15194,7 @@
       </p:sp>
       <p:sp>
         <p:nvSpPr>
-          <p:cNvPr id="97" name="Google Shape;97;p18"/>
+          <p:cNvPr id="101" name="Google Shape;101;p18"/>
           <p:cNvSpPr txBox="1"/>
           <p:nvPr/>
         </p:nvSpPr>
@@ -14868,6 +15859,65 @@
           </a:p>
         </p:txBody>
       </p:sp>
+      <p:sp>
+        <p:nvSpPr>
+          <p:cNvPr id="102" name="Google Shape;102;p18"/>
+          <p:cNvSpPr txBox="1"/>
+          <p:nvPr>
+            <p:ph idx="12" type="sldNum"/>
+          </p:nvPr>
+        </p:nvSpPr>
+        <p:spPr>
+          <a:xfrm>
+            <a:off x="8431874" y="4663225"/>
+            <a:ext cx="589200" cy="393600"/>
+          </a:xfrm>
+          <a:prstGeom prst="rect">
+            <a:avLst/>
+          </a:prstGeom>
+        </p:spPr>
+        <p:txBody>
+          <a:bodyPr anchorCtr="0" anchor="ctr" bIns="91425" lIns="91425" spcFirstLastPara="1" rIns="91425" wrap="square" tIns="91425">
+            <a:noAutofit/>
+          </a:bodyPr>
+          <a:lstStyle/>
+          <a:p>
+            <a:pPr indent="0" lvl="0" marL="0" rtl="0" algn="l">
+              <a:spcBef>
+                <a:spcPts val="0"/>
+              </a:spcBef>
+              <a:spcAft>
+                <a:spcPts val="0"/>
+              </a:spcAft>
+              <a:buNone/>
+            </a:pPr>
+            <a:r>
+              <a:rPr b="1" i="1" lang="uk" sz="2200">
+                <a:latin typeface="Oswald"/>
+                <a:ea typeface="Oswald"/>
+                <a:cs typeface="Oswald"/>
+                <a:sym typeface="Oswald"/>
+              </a:rPr>
+              <a:t># </a:t>
+            </a:r>
+            <a:fld id="{00000000-1234-1234-1234-123412341234}" type="slidenum">
+              <a:rPr b="1" lang="uk" sz="2200">
+                <a:latin typeface="Oswald"/>
+                <a:ea typeface="Oswald"/>
+                <a:cs typeface="Oswald"/>
+                <a:sym typeface="Oswald"/>
+              </a:rPr>
+              <a:t>‹#›</a:t>
+            </a:fld>
+            <a:endParaRPr b="1" sz="2200">
+              <a:latin typeface="Oswald"/>
+              <a:ea typeface="Oswald"/>
+              <a:cs typeface="Oswald"/>
+              <a:sym typeface="Oswald"/>
+            </a:endParaRPr>
+          </a:p>
+        </p:txBody>
+      </p:sp>
     </p:spTree>
   </p:cSld>
   <p:clrMapOvr>
@@ -14881,7 +15931,7 @@
   <p:cSld>
     <p:spTree>
       <p:nvGrpSpPr>
-        <p:cNvPr id="101" name="Shape 101"/>
+        <p:cNvPr id="106" name="Shape 106"/>
         <p:cNvGrpSpPr/>
         <p:nvPr/>
       </p:nvGrpSpPr>
@@ -14895,7 +15945,7 @@
       </p:grpSpPr>
       <p:sp>
         <p:nvSpPr>
-          <p:cNvPr id="102" name="Google Shape;102;p19"/>
+          <p:cNvPr id="107" name="Google Shape;107;p19"/>
           <p:cNvSpPr txBox="1"/>
           <p:nvPr>
             <p:ph type="title"/>
@@ -14935,7 +15985,7 @@
       </p:sp>
       <p:sp>
         <p:nvSpPr>
-          <p:cNvPr id="103" name="Google Shape;103;p19"/>
+          <p:cNvPr id="108" name="Google Shape;108;p19"/>
           <p:cNvSpPr txBox="1"/>
           <p:nvPr>
             <p:ph idx="1" type="body"/>
@@ -15051,7 +16101,7 @@
       </p:sp>
       <p:pic>
         <p:nvPicPr>
-          <p:cNvPr id="104" name="Google Shape;104;p19"/>
+          <p:cNvPr id="109" name="Google Shape;109;p19"/>
           <p:cNvPicPr preferRelativeResize="0"/>
           <p:nvPr/>
         </p:nvPicPr>
@@ -15077,6 +16127,74 @@
           </a:ln>
         </p:spPr>
       </p:pic>
+      <p:sp>
+        <p:nvSpPr>
+          <p:cNvPr id="110" name="Google Shape;110;p19"/>
+          <p:cNvSpPr txBox="1"/>
+          <p:nvPr>
+            <p:ph idx="12" type="sldNum"/>
+          </p:nvPr>
+        </p:nvSpPr>
+        <p:spPr>
+          <a:xfrm>
+            <a:off x="8472458" y="4663217"/>
+            <a:ext cx="548700" cy="393600"/>
+          </a:xfrm>
+          <a:prstGeom prst="rect">
+            <a:avLst/>
+          </a:prstGeom>
+        </p:spPr>
+        <p:txBody>
+          <a:bodyPr anchorCtr="0" anchor="ctr" bIns="91425" lIns="91425" spcFirstLastPara="1" rIns="91425" wrap="square" tIns="91425">
+            <a:noAutofit/>
+          </a:bodyPr>
+          <a:lstStyle/>
+          <a:p>
+            <a:pPr indent="0" lvl="0" marL="0" rtl="0" algn="l">
+              <a:spcBef>
+                <a:spcPts val="0"/>
+              </a:spcBef>
+              <a:spcAft>
+                <a:spcPts val="0"/>
+              </a:spcAft>
+              <a:buNone/>
+            </a:pPr>
+            <a:r>
+              <a:rPr b="1" i="1" lang="uk" sz="2200">
+                <a:latin typeface="Oswald"/>
+                <a:ea typeface="Oswald"/>
+                <a:cs typeface="Oswald"/>
+                <a:sym typeface="Oswald"/>
+              </a:rPr>
+              <a:t>#</a:t>
+            </a:r>
+            <a:r>
+              <a:rPr b="1" lang="uk" sz="2200">
+                <a:latin typeface="Oswald"/>
+                <a:ea typeface="Oswald"/>
+                <a:cs typeface="Oswald"/>
+                <a:sym typeface="Oswald"/>
+              </a:rPr>
+              <a:t> </a:t>
+            </a:r>
+            <a:fld id="{00000000-1234-1234-1234-123412341234}" type="slidenum">
+              <a:rPr b="1" lang="uk" sz="2200">
+                <a:latin typeface="Oswald"/>
+                <a:ea typeface="Oswald"/>
+                <a:cs typeface="Oswald"/>
+                <a:sym typeface="Oswald"/>
+              </a:rPr>
+              <a:t>‹#›</a:t>
+            </a:fld>
+            <a:endParaRPr b="1" sz="2200">
+              <a:latin typeface="Oswald"/>
+              <a:ea typeface="Oswald"/>
+              <a:cs typeface="Oswald"/>
+              <a:sym typeface="Oswald"/>
+            </a:endParaRPr>
+          </a:p>
+        </p:txBody>
+      </p:sp>
     </p:spTree>
   </p:cSld>
   <p:clrMapOvr>
@@ -15090,7 +16208,7 @@
   <p:cSld>
     <p:spTree>
       <p:nvGrpSpPr>
-        <p:cNvPr id="108" name="Shape 108"/>
+        <p:cNvPr id="114" name="Shape 114"/>
         <p:cNvGrpSpPr/>
         <p:nvPr/>
       </p:nvGrpSpPr>
@@ -15104,7 +16222,7 @@
       </p:grpSpPr>
       <p:sp>
         <p:nvSpPr>
-          <p:cNvPr id="109" name="Google Shape;109;p20"/>
+          <p:cNvPr id="115" name="Google Shape;115;p20"/>
           <p:cNvSpPr txBox="1"/>
           <p:nvPr>
             <p:ph type="title"/>
@@ -15144,7 +16262,7 @@
       </p:sp>
       <p:pic>
         <p:nvPicPr>
-          <p:cNvPr id="110" name="Google Shape;110;p20"/>
+          <p:cNvPr id="116" name="Google Shape;116;p20"/>
           <p:cNvPicPr preferRelativeResize="0"/>
           <p:nvPr/>
         </p:nvPicPr>
@@ -15172,7 +16290,7 @@
       </p:pic>
       <p:sp>
         <p:nvSpPr>
-          <p:cNvPr id="111" name="Google Shape;111;p20"/>
+          <p:cNvPr id="117" name="Google Shape;117;p20"/>
           <p:cNvSpPr txBox="1"/>
           <p:nvPr/>
         </p:nvSpPr>
@@ -15431,6 +16549,65 @@
           </a:p>
         </p:txBody>
       </p:sp>
+      <p:sp>
+        <p:nvSpPr>
+          <p:cNvPr id="118" name="Google Shape;118;p20"/>
+          <p:cNvSpPr txBox="1"/>
+          <p:nvPr>
+            <p:ph idx="12" type="sldNum"/>
+          </p:nvPr>
+        </p:nvSpPr>
+        <p:spPr>
+          <a:xfrm>
+            <a:off x="8229597" y="4663225"/>
+            <a:ext cx="791700" cy="393600"/>
+          </a:xfrm>
+          <a:prstGeom prst="rect">
+            <a:avLst/>
+          </a:prstGeom>
+        </p:spPr>
+        <p:txBody>
+          <a:bodyPr anchorCtr="0" anchor="ctr" bIns="91425" lIns="91425" spcFirstLastPara="1" rIns="91425" wrap="square" tIns="91425">
+            <a:noAutofit/>
+          </a:bodyPr>
+          <a:lstStyle/>
+          <a:p>
+            <a:pPr indent="0" lvl="0" marL="0" rtl="0" algn="r">
+              <a:spcBef>
+                <a:spcPts val="0"/>
+              </a:spcBef>
+              <a:spcAft>
+                <a:spcPts val="0"/>
+              </a:spcAft>
+              <a:buNone/>
+            </a:pPr>
+            <a:r>
+              <a:rPr b="1" i="1" lang="uk" sz="2200">
+                <a:latin typeface="Oswald"/>
+                <a:ea typeface="Oswald"/>
+                <a:cs typeface="Oswald"/>
+                <a:sym typeface="Oswald"/>
+              </a:rPr>
+              <a:t># </a:t>
+            </a:r>
+            <a:fld id="{00000000-1234-1234-1234-123412341234}" type="slidenum">
+              <a:rPr b="1" lang="uk" sz="2200">
+                <a:latin typeface="Oswald"/>
+                <a:ea typeface="Oswald"/>
+                <a:cs typeface="Oswald"/>
+                <a:sym typeface="Oswald"/>
+              </a:rPr>
+              <a:t>‹#›</a:t>
+            </a:fld>
+            <a:endParaRPr b="1" sz="2200">
+              <a:latin typeface="Oswald"/>
+              <a:ea typeface="Oswald"/>
+              <a:cs typeface="Oswald"/>
+              <a:sym typeface="Oswald"/>
+            </a:endParaRPr>
+          </a:p>
+        </p:txBody>
+      </p:sp>
     </p:spTree>
   </p:cSld>
   <p:clrMapOvr>
@@ -15444,7 +16621,7 @@
   <p:cSld>
     <p:spTree>
       <p:nvGrpSpPr>
-        <p:cNvPr id="115" name="Shape 115"/>
+        <p:cNvPr id="122" name="Shape 122"/>
         <p:cNvGrpSpPr/>
         <p:nvPr/>
       </p:nvGrpSpPr>
@@ -15458,7 +16635,7 @@
       </p:grpSpPr>
       <p:sp>
         <p:nvSpPr>
-          <p:cNvPr id="116" name="Google Shape;116;p21"/>
+          <p:cNvPr id="123" name="Google Shape;123;p21"/>
           <p:cNvSpPr txBox="1"/>
           <p:nvPr>
             <p:ph type="title"/>
@@ -15498,13 +16675,13 @@
       </p:sp>
       <p:sp>
         <p:nvSpPr>
-          <p:cNvPr id="117" name="Google Shape;117;p21"/>
+          <p:cNvPr id="124" name="Google Shape;124;p21"/>
           <p:cNvSpPr txBox="1"/>
           <p:nvPr/>
         </p:nvSpPr>
         <p:spPr>
           <a:xfrm>
-            <a:off x="260250" y="1006375"/>
+            <a:off x="231350" y="1006375"/>
             <a:ext cx="8623500" cy="3912300"/>
           </a:xfrm>
           <a:prstGeom prst="rect">
@@ -15715,7 +16892,7 @@
       </p:sp>
       <p:pic>
         <p:nvPicPr>
-          <p:cNvPr id="118" name="Google Shape;118;p21"/>
+          <p:cNvPr id="125" name="Google Shape;125;p21"/>
           <p:cNvPicPr preferRelativeResize="0"/>
           <p:nvPr/>
         </p:nvPicPr>
@@ -15741,6 +16918,65 @@
           </a:ln>
         </p:spPr>
       </p:pic>
+      <p:sp>
+        <p:nvSpPr>
+          <p:cNvPr id="126" name="Google Shape;126;p21"/>
+          <p:cNvSpPr txBox="1"/>
+          <p:nvPr>
+            <p:ph idx="12" type="sldNum"/>
+          </p:nvPr>
+        </p:nvSpPr>
+        <p:spPr>
+          <a:xfrm>
+            <a:off x="8345175" y="4663225"/>
+            <a:ext cx="676200" cy="393600"/>
+          </a:xfrm>
+          <a:prstGeom prst="rect">
+            <a:avLst/>
+          </a:prstGeom>
+        </p:spPr>
+        <p:txBody>
+          <a:bodyPr anchorCtr="0" anchor="ctr" bIns="91425" lIns="91425" spcFirstLastPara="1" rIns="91425" wrap="square" tIns="91425">
+            <a:noAutofit/>
+          </a:bodyPr>
+          <a:lstStyle/>
+          <a:p>
+            <a:pPr indent="0" lvl="0" marL="0" rtl="0" algn="r">
+              <a:spcBef>
+                <a:spcPts val="0"/>
+              </a:spcBef>
+              <a:spcAft>
+                <a:spcPts val="0"/>
+              </a:spcAft>
+              <a:buNone/>
+            </a:pPr>
+            <a:r>
+              <a:rPr b="1" i="1" lang="uk" sz="2200">
+                <a:latin typeface="Oswald"/>
+                <a:ea typeface="Oswald"/>
+                <a:cs typeface="Oswald"/>
+                <a:sym typeface="Oswald"/>
+              </a:rPr>
+              <a:t># </a:t>
+            </a:r>
+            <a:fld id="{00000000-1234-1234-1234-123412341234}" type="slidenum">
+              <a:rPr b="1" lang="uk" sz="2200">
+                <a:latin typeface="Oswald"/>
+                <a:ea typeface="Oswald"/>
+                <a:cs typeface="Oswald"/>
+                <a:sym typeface="Oswald"/>
+              </a:rPr>
+              <a:t>‹#›</a:t>
+            </a:fld>
+            <a:endParaRPr b="1" sz="2200">
+              <a:latin typeface="Oswald"/>
+              <a:ea typeface="Oswald"/>
+              <a:cs typeface="Oswald"/>
+              <a:sym typeface="Oswald"/>
+            </a:endParaRPr>
+          </a:p>
+        </p:txBody>
+      </p:sp>
     </p:spTree>
   </p:cSld>
   <p:clrMapOvr>
@@ -15750,6 +16986,285 @@
 </file>
 
 <file path=ppt/theme/theme1.xml><?xml version="1.0" encoding="utf-8"?>
+<a:theme xmlns:a="http://schemas.openxmlformats.org/drawingml/2006/main" xmlns:r="http://schemas.openxmlformats.org/officeDocument/2006/relationships">
+  <a:themeElements>
+    <a:clrScheme name="Default">
+      <a:dk1>
+        <a:srgbClr val="000000"/>
+      </a:dk1>
+      <a:lt1>
+        <a:srgbClr val="FFFFFF"/>
+      </a:lt1>
+      <a:dk2>
+        <a:srgbClr val="158158"/>
+      </a:dk2>
+      <a:lt2>
+        <a:srgbClr val="F3F3F3"/>
+      </a:lt2>
+      <a:accent1>
+        <a:srgbClr val="058DC7"/>
+      </a:accent1>
+      <a:accent2>
+        <a:srgbClr val="50B432"/>
+      </a:accent2>
+      <a:accent3>
+        <a:srgbClr val="ED561B"/>
+      </a:accent3>
+      <a:accent4>
+        <a:srgbClr val="EDEF00"/>
+      </a:accent4>
+      <a:accent5>
+        <a:srgbClr val="24CBE5"/>
+      </a:accent5>
+      <a:accent6>
+        <a:srgbClr val="64E572"/>
+      </a:accent6>
+      <a:hlink>
+        <a:srgbClr val="2200CC"/>
+      </a:hlink>
+      <a:folHlink>
+        <a:srgbClr val="551A8B"/>
+      </a:folHlink>
+    </a:clrScheme>
+    <a:fontScheme name="Office">
+      <a:majorFont>
+        <a:latin typeface="Arial"/>
+        <a:ea typeface=""/>
+        <a:cs typeface=""/>
+        <a:font script="Jpan" typeface="ＭＳ Ｐゴシック"/>
+        <a:font script="Hang" typeface="맑은 고딕"/>
+        <a:font script="Hans" typeface="宋体"/>
+        <a:font script="Hant" typeface="新細明體"/>
+        <a:font script="Arab" typeface="Times New Roman"/>
+        <a:font script="Hebr" typeface="Times New Roman"/>
+        <a:font script="Thai" typeface="Angsana New"/>
+        <a:font script="Ethi" typeface="Nyala"/>
+        <a:font script="Beng" typeface="Vrinda"/>
+        <a:font script="Gujr" typeface="Shruti"/>
+        <a:font script="Khmr" typeface="MoolBoran"/>
+        <a:font script="Knda" typeface="Tunga"/>
+        <a:font script="Guru" typeface="Raavi"/>
+        <a:font script="Cans" typeface="Euphemia"/>
+        <a:font script="Cher" typeface="Plantagenet Cherokee"/>
+        <a:font script="Yiii" typeface="Microsoft Yi Baiti"/>
+        <a:font script="Tibt" typeface="Microsoft Himalaya"/>
+        <a:font script="Thaa" typeface="MV Boli"/>
+        <a:font script="Deva" typeface="Mangal"/>
+        <a:font script="Telu" typeface="Gautami"/>
+        <a:font script="Taml" typeface="Latha"/>
+        <a:font script="Syrc" typeface="Estrangelo Edessa"/>
+        <a:font script="Orya" typeface="Kalinga"/>
+        <a:font script="Mlym" typeface="Kartika"/>
+        <a:font script="Laoo" typeface="DokChampa"/>
+        <a:font script="Sinh" typeface="Iskoola Pota"/>
+        <a:font script="Mong" typeface="Mongolian Baiti"/>
+        <a:font script="Viet" typeface="Times New Roman"/>
+        <a:font script="Uigh" typeface="Microsoft Uighur"/>
+        <a:font script="Geor" typeface="Sylfaen"/>
+      </a:majorFont>
+      <a:minorFont>
+        <a:latin typeface="Arial"/>
+        <a:ea typeface=""/>
+        <a:cs typeface=""/>
+        <a:font script="Jpan" typeface="ＭＳ Ｐゴシック"/>
+        <a:font script="Hang" typeface="맑은 고딕"/>
+        <a:font script="Hans" typeface="宋体"/>
+        <a:font script="Hant" typeface="新細明體"/>
+        <a:font script="Arab" typeface="Arial"/>
+        <a:font script="Hebr" typeface="Arial"/>
+        <a:font script="Thai" typeface="Cordia New"/>
+        <a:font script="Ethi" typeface="Nyala"/>
+        <a:font script="Beng" typeface="Vrinda"/>
+        <a:font script="Gujr" typeface="Shruti"/>
+        <a:font script="Khmr" typeface="DaunPenh"/>
+        <a:font script="Knda" typeface="Tunga"/>
+        <a:font script="Guru" typeface="Raavi"/>
+        <a:font script="Cans" typeface="Euphemia"/>
+        <a:font script="Cher" typeface="Plantagenet Cherokee"/>
+        <a:font script="Yiii" typeface="Microsoft Yi Baiti"/>
+        <a:font script="Tibt" typeface="Microsoft Himalaya"/>
+        <a:font script="Thaa" typeface="MV Boli"/>
+        <a:font script="Deva" typeface="Mangal"/>
+        <a:font script="Telu" typeface="Gautami"/>
+        <a:font script="Taml" typeface="Latha"/>
+        <a:font script="Syrc" typeface="Estrangelo Edessa"/>
+        <a:font script="Orya" typeface="Kalinga"/>
+        <a:font script="Mlym" typeface="Kartika"/>
+        <a:font script="Laoo" typeface="DokChampa"/>
+        <a:font script="Sinh" typeface="Iskoola Pota"/>
+        <a:font script="Mong" typeface="Mongolian Baiti"/>
+        <a:font script="Viet" typeface="Arial"/>
+        <a:font script="Uigh" typeface="Microsoft Uighur"/>
+        <a:font script="Geor" typeface="Sylfaen"/>
+      </a:minorFont>
+    </a:fontScheme>
+    <a:fmtScheme name="Office">
+      <a:fillStyleLst>
+        <a:solidFill>
+          <a:schemeClr val="phClr"/>
+        </a:solidFill>
+        <a:gradFill rotWithShape="1">
+          <a:gsLst>
+            <a:gs pos="0">
+              <a:schemeClr val="phClr">
+                <a:tint val="50000"/>
+                <a:satMod val="300000"/>
+              </a:schemeClr>
+            </a:gs>
+            <a:gs pos="35000">
+              <a:schemeClr val="phClr">
+                <a:tint val="37000"/>
+                <a:satMod val="300000"/>
+              </a:schemeClr>
+            </a:gs>
+            <a:gs pos="100000">
+              <a:schemeClr val="phClr">
+                <a:tint val="15000"/>
+                <a:satMod val="350000"/>
+              </a:schemeClr>
+            </a:gs>
+          </a:gsLst>
+          <a:lin ang="16200000" scaled="1"/>
+        </a:gradFill>
+        <a:gradFill rotWithShape="1">
+          <a:gsLst>
+            <a:gs pos="0">
+              <a:schemeClr val="phClr">
+                <a:tint val="100000"/>
+                <a:shade val="100000"/>
+                <a:satMod val="130000"/>
+              </a:schemeClr>
+            </a:gs>
+            <a:gs pos="100000">
+              <a:schemeClr val="phClr">
+                <a:tint val="50000"/>
+                <a:shade val="100000"/>
+                <a:satMod val="350000"/>
+              </a:schemeClr>
+            </a:gs>
+          </a:gsLst>
+          <a:lin ang="16200000" scaled="0"/>
+        </a:gradFill>
+      </a:fillStyleLst>
+      <a:lnStyleLst>
+        <a:ln w="9525" cap="flat" cmpd="sng" algn="ctr">
+          <a:solidFill>
+            <a:schemeClr val="phClr">
+              <a:shade val="95000"/>
+              <a:satMod val="105000"/>
+            </a:schemeClr>
+          </a:solidFill>
+          <a:prstDash val="solid"/>
+        </a:ln>
+        <a:ln w="25400" cap="flat" cmpd="sng" algn="ctr">
+          <a:solidFill>
+            <a:schemeClr val="phClr"/>
+          </a:solidFill>
+          <a:prstDash val="solid"/>
+        </a:ln>
+        <a:ln w="38100" cap="flat" cmpd="sng" algn="ctr">
+          <a:solidFill>
+            <a:schemeClr val="phClr"/>
+          </a:solidFill>
+          <a:prstDash val="solid"/>
+        </a:ln>
+      </a:lnStyleLst>
+      <a:effectStyleLst>
+        <a:effectStyle>
+          <a:effectLst>
+            <a:outerShdw blurRad="40000" dist="20000" dir="5400000" rotWithShape="0">
+              <a:srgbClr val="000000">
+                <a:alpha val="38000"/>
+              </a:srgbClr>
+            </a:outerShdw>
+          </a:effectLst>
+        </a:effectStyle>
+        <a:effectStyle>
+          <a:effectLst>
+            <a:outerShdw blurRad="40000" dist="23000" dir="5400000" rotWithShape="0">
+              <a:srgbClr val="000000">
+                <a:alpha val="35000"/>
+              </a:srgbClr>
+            </a:outerShdw>
+          </a:effectLst>
+        </a:effectStyle>
+        <a:effectStyle>
+          <a:effectLst>
+            <a:outerShdw blurRad="40000" dist="23000" dir="5400000" rotWithShape="0">
+              <a:srgbClr val="000000">
+                <a:alpha val="35000"/>
+              </a:srgbClr>
+            </a:outerShdw>
+          </a:effectLst>
+          <a:scene3d>
+            <a:camera prst="orthographicFront">
+              <a:rot lat="0" lon="0" rev="0"/>
+            </a:camera>
+            <a:lightRig rig="threePt" dir="t">
+              <a:rot lat="0" lon="0" rev="1200000"/>
+            </a:lightRig>
+          </a:scene3d>
+          <a:sp3d>
+            <a:bevelT w="63500" h="25400"/>
+          </a:sp3d>
+        </a:effectStyle>
+      </a:effectStyleLst>
+      <a:bgFillStyleLst>
+        <a:solidFill>
+          <a:schemeClr val="phClr"/>
+        </a:solidFill>
+        <a:gradFill rotWithShape="1">
+          <a:gsLst>
+            <a:gs pos="0">
+              <a:schemeClr val="phClr">
+                <a:tint val="40000"/>
+                <a:satMod val="350000"/>
+              </a:schemeClr>
+            </a:gs>
+            <a:gs pos="40000">
+              <a:schemeClr val="phClr">
+                <a:tint val="45000"/>
+                <a:shade val="99000"/>
+                <a:satMod val="350000"/>
+              </a:schemeClr>
+            </a:gs>
+            <a:gs pos="100000">
+              <a:schemeClr val="phClr">
+                <a:shade val="20000"/>
+                <a:satMod val="255000"/>
+              </a:schemeClr>
+            </a:gs>
+          </a:gsLst>
+          <a:path path="circle">
+            <a:fillToRect l="50000" t="-80000" r="50000" b="180000"/>
+          </a:path>
+        </a:gradFill>
+        <a:gradFill rotWithShape="1">
+          <a:gsLst>
+            <a:gs pos="0">
+              <a:schemeClr val="phClr">
+                <a:tint val="80000"/>
+                <a:satMod val="300000"/>
+              </a:schemeClr>
+            </a:gs>
+            <a:gs pos="100000">
+              <a:schemeClr val="phClr">
+                <a:shade val="30000"/>
+                <a:satMod val="200000"/>
+              </a:schemeClr>
+            </a:gs>
+          </a:gsLst>
+          <a:path path="circle">
+            <a:fillToRect l="50000" t="50000" r="50000" b="50000"/>
+          </a:path>
+        </a:gradFill>
+      </a:bgFillStyleLst>
+    </a:fmtScheme>
+  </a:themeElements>
+</a:theme>
+</file>
+
+<file path=ppt/theme/theme2.xml><?xml version="1.0" encoding="utf-8"?>
 <a:theme xmlns:a="http://schemas.openxmlformats.org/drawingml/2006/main" xmlns:r="http://schemas.openxmlformats.org/officeDocument/2006/relationships" name="Modern Writer">
   <a:themeElements>
     <a:clrScheme name="Modern Writer">
@@ -16026,283 +17541,4 @@
     </a:fmtScheme>
   </a:themeElements>
 </a:theme>
-</file>
-
-<file path=ppt/theme/theme2.xml><?xml version="1.0" encoding="utf-8"?>
-<a:theme xmlns:a="http://schemas.openxmlformats.org/drawingml/2006/main" xmlns:r="http://schemas.openxmlformats.org/officeDocument/2006/relationships">
-  <a:themeElements>
-    <a:clrScheme name="Default">
-      <a:dk1>
-        <a:srgbClr val="000000"/>
-      </a:dk1>
-      <a:lt1>
-        <a:srgbClr val="FFFFFF"/>
-      </a:lt1>
-      <a:dk2>
-        <a:srgbClr val="158158"/>
-      </a:dk2>
-      <a:lt2>
-        <a:srgbClr val="F3F3F3"/>
-      </a:lt2>
-      <a:accent1>
-        <a:srgbClr val="058DC7"/>
-      </a:accent1>
-      <a:accent2>
-        <a:srgbClr val="50B432"/>
-      </a:accent2>
-      <a:accent3>
-        <a:srgbClr val="ED561B"/>
-      </a:accent3>
-      <a:accent4>
-        <a:srgbClr val="EDEF00"/>
-      </a:accent4>
-      <a:accent5>
-        <a:srgbClr val="24CBE5"/>
-      </a:accent5>
-      <a:accent6>
-        <a:srgbClr val="64E572"/>
-      </a:accent6>
-      <a:hlink>
-        <a:srgbClr val="2200CC"/>
-      </a:hlink>
-      <a:folHlink>
-        <a:srgbClr val="551A8B"/>
-      </a:folHlink>
-    </a:clrScheme>
-    <a:fontScheme name="Office">
-      <a:majorFont>
-        <a:latin typeface="Arial"/>
-        <a:ea typeface=""/>
-        <a:cs typeface=""/>
-        <a:font script="Jpan" typeface="ＭＳ Ｐゴシック"/>
-        <a:font script="Hang" typeface="맑은 고딕"/>
-        <a:font script="Hans" typeface="宋体"/>
-        <a:font script="Hant" typeface="新細明體"/>
-        <a:font script="Arab" typeface="Times New Roman"/>
-        <a:font script="Hebr" typeface="Times New Roman"/>
-        <a:font script="Thai" typeface="Angsana New"/>
-        <a:font script="Ethi" typeface="Nyala"/>
-        <a:font script="Beng" typeface="Vrinda"/>
-        <a:font script="Gujr" typeface="Shruti"/>
-        <a:font script="Khmr" typeface="MoolBoran"/>
-        <a:font script="Knda" typeface="Tunga"/>
-        <a:font script="Guru" typeface="Raavi"/>
-        <a:font script="Cans" typeface="Euphemia"/>
-        <a:font script="Cher" typeface="Plantagenet Cherokee"/>
-        <a:font script="Yiii" typeface="Microsoft Yi Baiti"/>
-        <a:font script="Tibt" typeface="Microsoft Himalaya"/>
-        <a:font script="Thaa" typeface="MV Boli"/>
-        <a:font script="Deva" typeface="Mangal"/>
-        <a:font script="Telu" typeface="Gautami"/>
-        <a:font script="Taml" typeface="Latha"/>
-        <a:font script="Syrc" typeface="Estrangelo Edessa"/>
-        <a:font script="Orya" typeface="Kalinga"/>
-        <a:font script="Mlym" typeface="Kartika"/>
-        <a:font script="Laoo" typeface="DokChampa"/>
-        <a:font script="Sinh" typeface="Iskoola Pota"/>
-        <a:font script="Mong" typeface="Mongolian Baiti"/>
-        <a:font script="Viet" typeface="Times New Roman"/>
-        <a:font script="Uigh" typeface="Microsoft Uighur"/>
-        <a:font script="Geor" typeface="Sylfaen"/>
-      </a:majorFont>
-      <a:minorFont>
-        <a:latin typeface="Arial"/>
-        <a:ea typeface=""/>
-        <a:cs typeface=""/>
-        <a:font script="Jpan" typeface="ＭＳ Ｐゴシック"/>
-        <a:font script="Hang" typeface="맑은 고딕"/>
-        <a:font script="Hans" typeface="宋体"/>
-        <a:font script="Hant" typeface="新細明體"/>
-        <a:font script="Arab" typeface="Arial"/>
-        <a:font script="Hebr" typeface="Arial"/>
-        <a:font script="Thai" typeface="Cordia New"/>
-        <a:font script="Ethi" typeface="Nyala"/>
-        <a:font script="Beng" typeface="Vrinda"/>
-        <a:font script="Gujr" typeface="Shruti"/>
-        <a:font script="Khmr" typeface="DaunPenh"/>
-        <a:font script="Knda" typeface="Tunga"/>
-        <a:font script="Guru" typeface="Raavi"/>
-        <a:font script="Cans" typeface="Euphemia"/>
-        <a:font script="Cher" typeface="Plantagenet Cherokee"/>
-        <a:font script="Yiii" typeface="Microsoft Yi Baiti"/>
-        <a:font script="Tibt" typeface="Microsoft Himalaya"/>
-        <a:font script="Thaa" typeface="MV Boli"/>
-        <a:font script="Deva" typeface="Mangal"/>
-        <a:font script="Telu" typeface="Gautami"/>
-        <a:font script="Taml" typeface="Latha"/>
-        <a:font script="Syrc" typeface="Estrangelo Edessa"/>
-        <a:font script="Orya" typeface="Kalinga"/>
-        <a:font script="Mlym" typeface="Kartika"/>
-        <a:font script="Laoo" typeface="DokChampa"/>
-        <a:font script="Sinh" typeface="Iskoola Pota"/>
-        <a:font script="Mong" typeface="Mongolian Baiti"/>
-        <a:font script="Viet" typeface="Arial"/>
-        <a:font script="Uigh" typeface="Microsoft Uighur"/>
-        <a:font script="Geor" typeface="Sylfaen"/>
-      </a:minorFont>
-    </a:fontScheme>
-    <a:fmtScheme name="Office">
-      <a:fillStyleLst>
-        <a:solidFill>
-          <a:schemeClr val="phClr"/>
-        </a:solidFill>
-        <a:gradFill rotWithShape="1">
-          <a:gsLst>
-            <a:gs pos="0">
-              <a:schemeClr val="phClr">
-                <a:tint val="50000"/>
-                <a:satMod val="300000"/>
-              </a:schemeClr>
-            </a:gs>
-            <a:gs pos="35000">
-              <a:schemeClr val="phClr">
-                <a:tint val="37000"/>
-                <a:satMod val="300000"/>
-              </a:schemeClr>
-            </a:gs>
-            <a:gs pos="100000">
-              <a:schemeClr val="phClr">
-                <a:tint val="15000"/>
-                <a:satMod val="350000"/>
-              </a:schemeClr>
-            </a:gs>
-          </a:gsLst>
-          <a:lin ang="16200000" scaled="1"/>
-        </a:gradFill>
-        <a:gradFill rotWithShape="1">
-          <a:gsLst>
-            <a:gs pos="0">
-              <a:schemeClr val="phClr">
-                <a:tint val="100000"/>
-                <a:shade val="100000"/>
-                <a:satMod val="130000"/>
-              </a:schemeClr>
-            </a:gs>
-            <a:gs pos="100000">
-              <a:schemeClr val="phClr">
-                <a:tint val="50000"/>
-                <a:shade val="100000"/>
-                <a:satMod val="350000"/>
-              </a:schemeClr>
-            </a:gs>
-          </a:gsLst>
-          <a:lin ang="16200000" scaled="0"/>
-        </a:gradFill>
-      </a:fillStyleLst>
-      <a:lnStyleLst>
-        <a:ln w="9525" cap="flat" cmpd="sng" algn="ctr">
-          <a:solidFill>
-            <a:schemeClr val="phClr">
-              <a:shade val="95000"/>
-              <a:satMod val="105000"/>
-            </a:schemeClr>
-          </a:solidFill>
-          <a:prstDash val="solid"/>
-        </a:ln>
-        <a:ln w="25400" cap="flat" cmpd="sng" algn="ctr">
-          <a:solidFill>
-            <a:schemeClr val="phClr"/>
-          </a:solidFill>
-          <a:prstDash val="solid"/>
-        </a:ln>
-        <a:ln w="38100" cap="flat" cmpd="sng" algn="ctr">
-          <a:solidFill>
-            <a:schemeClr val="phClr"/>
-          </a:solidFill>
-          <a:prstDash val="solid"/>
-        </a:ln>
-      </a:lnStyleLst>
-      <a:effectStyleLst>
-        <a:effectStyle>
-          <a:effectLst>
-            <a:outerShdw blurRad="40000" dist="20000" dir="5400000" rotWithShape="0">
-              <a:srgbClr val="000000">
-                <a:alpha val="38000"/>
-              </a:srgbClr>
-            </a:outerShdw>
-          </a:effectLst>
-        </a:effectStyle>
-        <a:effectStyle>
-          <a:effectLst>
-            <a:outerShdw blurRad="40000" dist="23000" dir="5400000" rotWithShape="0">
-              <a:srgbClr val="000000">
-                <a:alpha val="35000"/>
-              </a:srgbClr>
-            </a:outerShdw>
-          </a:effectLst>
-        </a:effectStyle>
-        <a:effectStyle>
-          <a:effectLst>
-            <a:outerShdw blurRad="40000" dist="23000" dir="5400000" rotWithShape="0">
-              <a:srgbClr val="000000">
-                <a:alpha val="35000"/>
-              </a:srgbClr>
-            </a:outerShdw>
-          </a:effectLst>
-          <a:scene3d>
-            <a:camera prst="orthographicFront">
-              <a:rot lat="0" lon="0" rev="0"/>
-            </a:camera>
-            <a:lightRig rig="threePt" dir="t">
-              <a:rot lat="0" lon="0" rev="1200000"/>
-            </a:lightRig>
-          </a:scene3d>
-          <a:sp3d>
-            <a:bevelT w="63500" h="25400"/>
-          </a:sp3d>
-        </a:effectStyle>
-      </a:effectStyleLst>
-      <a:bgFillStyleLst>
-        <a:solidFill>
-          <a:schemeClr val="phClr"/>
-        </a:solidFill>
-        <a:gradFill rotWithShape="1">
-          <a:gsLst>
-            <a:gs pos="0">
-              <a:schemeClr val="phClr">
-                <a:tint val="40000"/>
-                <a:satMod val="350000"/>
-              </a:schemeClr>
-            </a:gs>
-            <a:gs pos="40000">
-              <a:schemeClr val="phClr">
-                <a:tint val="45000"/>
-                <a:shade val="99000"/>
-                <a:satMod val="350000"/>
-              </a:schemeClr>
-            </a:gs>
-            <a:gs pos="100000">
-              <a:schemeClr val="phClr">
-                <a:shade val="20000"/>
-                <a:satMod val="255000"/>
-              </a:schemeClr>
-            </a:gs>
-          </a:gsLst>
-          <a:path path="circle">
-            <a:fillToRect l="50000" t="-80000" r="50000" b="180000"/>
-          </a:path>
-        </a:gradFill>
-        <a:gradFill rotWithShape="1">
-          <a:gsLst>
-            <a:gs pos="0">
-              <a:schemeClr val="phClr">
-                <a:tint val="80000"/>
-                <a:satMod val="300000"/>
-              </a:schemeClr>
-            </a:gs>
-            <a:gs pos="100000">
-              <a:schemeClr val="phClr">
-                <a:shade val="30000"/>
-                <a:satMod val="200000"/>
-              </a:schemeClr>
-            </a:gs>
-          </a:gsLst>
-          <a:path path="circle">
-            <a:fillToRect l="50000" t="50000" r="50000" b="50000"/>
-          </a:path>
-        </a:gradFill>
-      </a:bgFillStyleLst>
-    </a:fmtScheme>
-  </a:themeElements>
-</a:theme>
 </file>
--- a/presentations/.github Presentation/github folder in the project.pptx
+++ b/presentations/.github Presentation/github folder in the project.pptx
@@ -824,7 +824,7 @@
   <p:cSld>
     <p:spTree>
       <p:nvGrpSpPr>
-        <p:cNvPr id="127" name="Shape 127"/>
+        <p:cNvPr id="128" name="Shape 128"/>
         <p:cNvGrpSpPr/>
         <p:nvPr/>
       </p:nvGrpSpPr>
@@ -838,7 +838,7 @@
       </p:grpSpPr>
       <p:sp>
         <p:nvSpPr>
-          <p:cNvPr id="128" name="Google Shape;128;g3d573b5558c_0_165:notes"/>
+          <p:cNvPr id="129" name="Google Shape;129;g3d573b5558c_0_165:notes"/>
           <p:cNvSpPr/>
           <p:nvPr>
             <p:ph idx="2" type="sldImg"/>
@@ -873,7 +873,7 @@
       </p:sp>
       <p:sp>
         <p:nvSpPr>
-          <p:cNvPr id="129" name="Google Shape;129;g3d573b5558c_0_165:notes"/>
+          <p:cNvPr id="130" name="Google Shape;130;g3d573b5558c_0_165:notes"/>
           <p:cNvSpPr txBox="1"/>
           <p:nvPr>
             <p:ph idx="1" type="body"/>
@@ -923,7 +923,7 @@
   <p:cSld>
     <p:spTree>
       <p:nvGrpSpPr>
-        <p:cNvPr id="135" name="Shape 135"/>
+        <p:cNvPr id="136" name="Shape 136"/>
         <p:cNvGrpSpPr/>
         <p:nvPr/>
       </p:nvGrpSpPr>
@@ -937,7 +937,7 @@
       </p:grpSpPr>
       <p:sp>
         <p:nvSpPr>
-          <p:cNvPr id="136" name="Google Shape;136;g3d573b5558c_0_171:notes"/>
+          <p:cNvPr id="137" name="Google Shape;137;g3d573b5558c_0_171:notes"/>
           <p:cNvSpPr/>
           <p:nvPr>
             <p:ph idx="2" type="sldImg"/>
@@ -972,7 +972,7 @@
       </p:sp>
       <p:sp>
         <p:nvSpPr>
-          <p:cNvPr id="137" name="Google Shape;137;g3d573b5558c_0_171:notes"/>
+          <p:cNvPr id="138" name="Google Shape;138;g3d573b5558c_0_171:notes"/>
           <p:cNvSpPr txBox="1"/>
           <p:nvPr>
             <p:ph idx="1" type="body"/>
@@ -1022,7 +1022,7 @@
   <p:cSld>
     <p:spTree>
       <p:nvGrpSpPr>
-        <p:cNvPr id="142" name="Shape 142"/>
+        <p:cNvPr id="143" name="Shape 143"/>
         <p:cNvGrpSpPr/>
         <p:nvPr/>
       </p:nvGrpSpPr>
@@ -1036,7 +1036,7 @@
       </p:grpSpPr>
       <p:sp>
         <p:nvSpPr>
-          <p:cNvPr id="143" name="Google Shape;143;g3d573b5558c_0_177:notes"/>
+          <p:cNvPr id="144" name="Google Shape;144;g3d573b5558c_0_177:notes"/>
           <p:cNvSpPr/>
           <p:nvPr>
             <p:ph idx="2" type="sldImg"/>
@@ -1071,7 +1071,7 @@
       </p:sp>
       <p:sp>
         <p:nvSpPr>
-          <p:cNvPr id="144" name="Google Shape;144;g3d573b5558c_0_177:notes"/>
+          <p:cNvPr id="145" name="Google Shape;145;g3d573b5558c_0_177:notes"/>
           <p:cNvSpPr txBox="1"/>
           <p:nvPr>
             <p:ph idx="1" type="body"/>
@@ -1121,7 +1121,7 @@
   <p:cSld>
     <p:spTree>
       <p:nvGrpSpPr>
-        <p:cNvPr id="151" name="Shape 151"/>
+        <p:cNvPr id="152" name="Shape 152"/>
         <p:cNvGrpSpPr/>
         <p:nvPr/>
       </p:nvGrpSpPr>
@@ -1135,7 +1135,7 @@
       </p:grpSpPr>
       <p:sp>
         <p:nvSpPr>
-          <p:cNvPr id="152" name="Google Shape;152;g3d573b5558c_0_313:notes"/>
+          <p:cNvPr id="153" name="Google Shape;153;g3d573b5558c_0_313:notes"/>
           <p:cNvSpPr/>
           <p:nvPr>
             <p:ph idx="2" type="sldImg"/>
@@ -1170,7 +1170,7 @@
       </p:sp>
       <p:sp>
         <p:nvSpPr>
-          <p:cNvPr id="153" name="Google Shape;153;g3d573b5558c_0_313:notes"/>
+          <p:cNvPr id="154" name="Google Shape;154;g3d573b5558c_0_313:notes"/>
           <p:cNvSpPr txBox="1"/>
           <p:nvPr>
             <p:ph idx="1" type="body"/>
@@ -1220,7 +1220,7 @@
   <p:cSld>
     <p:spTree>
       <p:nvGrpSpPr>
-        <p:cNvPr id="160" name="Shape 160"/>
+        <p:cNvPr id="161" name="Shape 161"/>
         <p:cNvGrpSpPr/>
         <p:nvPr/>
       </p:nvGrpSpPr>
@@ -1234,7 +1234,7 @@
       </p:grpSpPr>
       <p:sp>
         <p:nvSpPr>
-          <p:cNvPr id="161" name="Google Shape;161;g3d573b5558c_0_320:notes"/>
+          <p:cNvPr id="162" name="Google Shape;162;g3d573b5558c_0_320:notes"/>
           <p:cNvSpPr/>
           <p:nvPr>
             <p:ph idx="2" type="sldImg"/>
@@ -1269,7 +1269,7 @@
       </p:sp>
       <p:sp>
         <p:nvSpPr>
-          <p:cNvPr id="162" name="Google Shape;162;g3d573b5558c_0_320:notes"/>
+          <p:cNvPr id="163" name="Google Shape;163;g3d573b5558c_0_320:notes"/>
           <p:cNvSpPr txBox="1"/>
           <p:nvPr>
             <p:ph idx="1" type="body"/>
@@ -1319,7 +1319,7 @@
   <p:cSld>
     <p:spTree>
       <p:nvGrpSpPr>
-        <p:cNvPr id="167" name="Shape 167"/>
+        <p:cNvPr id="168" name="Shape 168"/>
         <p:cNvGrpSpPr/>
         <p:nvPr/>
       </p:nvGrpSpPr>
@@ -1333,7 +1333,7 @@
       </p:grpSpPr>
       <p:sp>
         <p:nvSpPr>
-          <p:cNvPr id="168" name="Google Shape;168;g3d573b5558c_0_326:notes"/>
+          <p:cNvPr id="169" name="Google Shape;169;g3d573b5558c_0_326:notes"/>
           <p:cNvSpPr/>
           <p:nvPr>
             <p:ph idx="2" type="sldImg"/>
@@ -1368,7 +1368,7 @@
       </p:sp>
       <p:sp>
         <p:nvSpPr>
-          <p:cNvPr id="169" name="Google Shape;169;g3d573b5558c_0_326:notes"/>
+          <p:cNvPr id="170" name="Google Shape;170;g3d573b5558c_0_326:notes"/>
           <p:cNvSpPr txBox="1"/>
           <p:nvPr>
             <p:ph idx="1" type="body"/>
@@ -1418,7 +1418,7 @@
   <p:cSld>
     <p:spTree>
       <p:nvGrpSpPr>
-        <p:cNvPr id="176" name="Shape 176"/>
+        <p:cNvPr id="177" name="Shape 177"/>
         <p:cNvGrpSpPr/>
         <p:nvPr/>
       </p:nvGrpSpPr>
@@ -1432,7 +1432,7 @@
       </p:grpSpPr>
       <p:sp>
         <p:nvSpPr>
-          <p:cNvPr id="177" name="Google Shape;177;g3d573b5558c_0_340:notes"/>
+          <p:cNvPr id="178" name="Google Shape;178;g3d573b5558c_0_340:notes"/>
           <p:cNvSpPr/>
           <p:nvPr>
             <p:ph idx="2" type="sldImg"/>
@@ -1467,7 +1467,7 @@
       </p:sp>
       <p:sp>
         <p:nvSpPr>
-          <p:cNvPr id="178" name="Google Shape;178;g3d573b5558c_0_340:notes"/>
+          <p:cNvPr id="179" name="Google Shape;179;g3d573b5558c_0_340:notes"/>
           <p:cNvSpPr txBox="1"/>
           <p:nvPr>
             <p:ph idx="1" type="body"/>
@@ -1517,7 +1517,7 @@
   <p:cSld>
     <p:spTree>
       <p:nvGrpSpPr>
-        <p:cNvPr id="184" name="Shape 184"/>
+        <p:cNvPr id="185" name="Shape 185"/>
         <p:cNvGrpSpPr/>
         <p:nvPr/>
       </p:nvGrpSpPr>
@@ -1531,7 +1531,7 @@
       </p:grpSpPr>
       <p:sp>
         <p:nvSpPr>
-          <p:cNvPr id="185" name="Google Shape;185;g3d59729d16c_0_5:notes"/>
+          <p:cNvPr id="186" name="Google Shape;186;g3d59729d16c_0_5:notes"/>
           <p:cNvSpPr/>
           <p:nvPr>
             <p:ph idx="2" type="sldImg"/>
@@ -1566,7 +1566,7 @@
       </p:sp>
       <p:sp>
         <p:nvSpPr>
-          <p:cNvPr id="186" name="Google Shape;186;g3d59729d16c_0_5:notes"/>
+          <p:cNvPr id="187" name="Google Shape;187;g3d59729d16c_0_5:notes"/>
           <p:cNvSpPr txBox="1"/>
           <p:nvPr>
             <p:ph idx="1" type="body"/>
@@ -1616,7 +1616,7 @@
   <p:cSld>
     <p:spTree>
       <p:nvGrpSpPr>
-        <p:cNvPr id="193" name="Shape 193"/>
+        <p:cNvPr id="194" name="Shape 194"/>
         <p:cNvGrpSpPr/>
         <p:nvPr/>
       </p:nvGrpSpPr>
@@ -1630,7 +1630,7 @@
       </p:grpSpPr>
       <p:sp>
         <p:nvSpPr>
-          <p:cNvPr id="194" name="Google Shape;194;g3d59729d16c_0_14:notes"/>
+          <p:cNvPr id="195" name="Google Shape;195;g3d59729d16c_0_14:notes"/>
           <p:cNvSpPr/>
           <p:nvPr>
             <p:ph idx="2" type="sldImg"/>
@@ -1665,7 +1665,7 @@
       </p:sp>
       <p:sp>
         <p:nvSpPr>
-          <p:cNvPr id="195" name="Google Shape;195;g3d59729d16c_0_14:notes"/>
+          <p:cNvPr id="196" name="Google Shape;196;g3d59729d16c_0_14:notes"/>
           <p:cNvSpPr txBox="1"/>
           <p:nvPr>
             <p:ph idx="1" type="body"/>
@@ -1715,7 +1715,7 @@
   <p:cSld>
     <p:spTree>
       <p:nvGrpSpPr>
-        <p:cNvPr id="202" name="Shape 202"/>
+        <p:cNvPr id="203" name="Shape 203"/>
         <p:cNvGrpSpPr/>
         <p:nvPr/>
       </p:nvGrpSpPr>
@@ -1729,7 +1729,7 @@
       </p:grpSpPr>
       <p:sp>
         <p:nvSpPr>
-          <p:cNvPr id="203" name="Google Shape;203;g3d59729d16c_0_25:notes"/>
+          <p:cNvPr id="204" name="Google Shape;204;g3d59729d16c_0_25:notes"/>
           <p:cNvSpPr/>
           <p:nvPr>
             <p:ph idx="2" type="sldImg"/>
@@ -1764,7 +1764,7 @@
       </p:sp>
       <p:sp>
         <p:nvSpPr>
-          <p:cNvPr id="204" name="Google Shape;204;g3d59729d16c_0_25:notes"/>
+          <p:cNvPr id="205" name="Google Shape;205;g3d59729d16c_0_25:notes"/>
           <p:cNvSpPr txBox="1"/>
           <p:nvPr>
             <p:ph idx="1" type="body"/>
@@ -1814,7 +1814,7 @@
   <p:cSld>
     <p:spTree>
       <p:nvGrpSpPr>
-        <p:cNvPr id="64" name="Shape 64"/>
+        <p:cNvPr id="65" name="Shape 65"/>
         <p:cNvGrpSpPr/>
         <p:nvPr/>
       </p:nvGrpSpPr>
@@ -1828,7 +1828,7 @@
       </p:grpSpPr>
       <p:sp>
         <p:nvSpPr>
-          <p:cNvPr id="65" name="Google Shape;65;g3d573b5558c_0_100:notes"/>
+          <p:cNvPr id="66" name="Google Shape;66;g3d573b5558c_0_100:notes"/>
           <p:cNvSpPr/>
           <p:nvPr>
             <p:ph idx="2" type="sldImg"/>
@@ -1863,7 +1863,7 @@
       </p:sp>
       <p:sp>
         <p:nvSpPr>
-          <p:cNvPr id="66" name="Google Shape;66;g3d573b5558c_0_100:notes"/>
+          <p:cNvPr id="67" name="Google Shape;67;g3d573b5558c_0_100:notes"/>
           <p:cNvSpPr txBox="1"/>
           <p:nvPr>
             <p:ph idx="1" type="body"/>
@@ -1913,7 +1913,7 @@
   <p:cSld>
     <p:spTree>
       <p:nvGrpSpPr>
-        <p:cNvPr id="210" name="Shape 210"/>
+        <p:cNvPr id="211" name="Shape 211"/>
         <p:cNvGrpSpPr/>
         <p:nvPr/>
       </p:nvGrpSpPr>
@@ -1927,7 +1927,7 @@
       </p:grpSpPr>
       <p:sp>
         <p:nvSpPr>
-          <p:cNvPr id="211" name="Google Shape;211;g3d59729d16c_0_35:notes"/>
+          <p:cNvPr id="212" name="Google Shape;212;g3d59729d16c_0_35:notes"/>
           <p:cNvSpPr/>
           <p:nvPr>
             <p:ph idx="2" type="sldImg"/>
@@ -1962,7 +1962,7 @@
       </p:sp>
       <p:sp>
         <p:nvSpPr>
-          <p:cNvPr id="212" name="Google Shape;212;g3d59729d16c_0_35:notes"/>
+          <p:cNvPr id="213" name="Google Shape;213;g3d59729d16c_0_35:notes"/>
           <p:cNvSpPr txBox="1"/>
           <p:nvPr>
             <p:ph idx="1" type="body"/>
@@ -2012,7 +2012,7 @@
   <p:cSld>
     <p:spTree>
       <p:nvGrpSpPr>
-        <p:cNvPr id="217" name="Shape 217"/>
+        <p:cNvPr id="218" name="Shape 218"/>
         <p:cNvGrpSpPr/>
         <p:nvPr/>
       </p:nvGrpSpPr>
@@ -2026,7 +2026,7 @@
       </p:grpSpPr>
       <p:sp>
         <p:nvSpPr>
-          <p:cNvPr id="218" name="Google Shape;218;g3d59729d16c_1_65:notes"/>
+          <p:cNvPr id="219" name="Google Shape;219;g3d59729d16c_1_65:notes"/>
           <p:cNvSpPr/>
           <p:nvPr>
             <p:ph idx="2" type="sldImg"/>
@@ -2061,7 +2061,7 @@
       </p:sp>
       <p:sp>
         <p:nvSpPr>
-          <p:cNvPr id="219" name="Google Shape;219;g3d59729d16c_1_65:notes"/>
+          <p:cNvPr id="220" name="Google Shape;220;g3d59729d16c_1_65:notes"/>
           <p:cNvSpPr txBox="1"/>
           <p:nvPr>
             <p:ph idx="1" type="body"/>
@@ -2111,7 +2111,7 @@
   <p:cSld>
     <p:spTree>
       <p:nvGrpSpPr>
-        <p:cNvPr id="71" name="Shape 71"/>
+        <p:cNvPr id="72" name="Shape 72"/>
         <p:cNvGrpSpPr/>
         <p:nvPr/>
       </p:nvGrpSpPr>
@@ -2125,7 +2125,7 @@
       </p:grpSpPr>
       <p:sp>
         <p:nvSpPr>
-          <p:cNvPr id="72" name="Google Shape;72;g3d573b5558c_0_110:notes"/>
+          <p:cNvPr id="73" name="Google Shape;73;g3d573b5558c_0_110:notes"/>
           <p:cNvSpPr/>
           <p:nvPr>
             <p:ph idx="2" type="sldImg"/>
@@ -2160,7 +2160,7 @@
       </p:sp>
       <p:sp>
         <p:nvSpPr>
-          <p:cNvPr id="73" name="Google Shape;73;g3d573b5558c_0_110:notes"/>
+          <p:cNvPr id="74" name="Google Shape;74;g3d573b5558c_0_110:notes"/>
           <p:cNvSpPr txBox="1"/>
           <p:nvPr>
             <p:ph idx="1" type="body"/>
@@ -2210,7 +2210,7 @@
   <p:cSld>
     <p:spTree>
       <p:nvGrpSpPr>
-        <p:cNvPr id="78" name="Shape 78"/>
+        <p:cNvPr id="79" name="Shape 79"/>
         <p:cNvGrpSpPr/>
         <p:nvPr/>
       </p:nvGrpSpPr>
@@ -2224,7 +2224,7 @@
       </p:grpSpPr>
       <p:sp>
         <p:nvSpPr>
-          <p:cNvPr id="79" name="Google Shape;79;g3d573b5558c_0_122:notes"/>
+          <p:cNvPr id="80" name="Google Shape;80;g3d573b5558c_0_122:notes"/>
           <p:cNvSpPr/>
           <p:nvPr>
             <p:ph idx="2" type="sldImg"/>
@@ -2259,7 +2259,7 @@
       </p:sp>
       <p:sp>
         <p:nvSpPr>
-          <p:cNvPr id="80" name="Google Shape;80;g3d573b5558c_0_122:notes"/>
+          <p:cNvPr id="81" name="Google Shape;81;g3d573b5558c_0_122:notes"/>
           <p:cNvSpPr txBox="1"/>
           <p:nvPr>
             <p:ph idx="1" type="body"/>
@@ -2309,7 +2309,7 @@
   <p:cSld>
     <p:spTree>
       <p:nvGrpSpPr>
-        <p:cNvPr id="87" name="Shape 87"/>
+        <p:cNvPr id="88" name="Shape 88"/>
         <p:cNvGrpSpPr/>
         <p:nvPr/>
       </p:nvGrpSpPr>
@@ -2323,7 +2323,7 @@
       </p:grpSpPr>
       <p:sp>
         <p:nvSpPr>
-          <p:cNvPr id="88" name="Google Shape;88;g3d573b5558c_0_126:notes"/>
+          <p:cNvPr id="89" name="Google Shape;89;g3d573b5558c_0_126:notes"/>
           <p:cNvSpPr/>
           <p:nvPr>
             <p:ph idx="2" type="sldImg"/>
@@ -2358,7 +2358,7 @@
       </p:sp>
       <p:sp>
         <p:nvSpPr>
-          <p:cNvPr id="89" name="Google Shape;89;g3d573b5558c_0_126:notes"/>
+          <p:cNvPr id="90" name="Google Shape;90;g3d573b5558c_0_126:notes"/>
           <p:cNvSpPr txBox="1"/>
           <p:nvPr>
             <p:ph idx="1" type="body"/>
@@ -2408,7 +2408,7 @@
   <p:cSld>
     <p:spTree>
       <p:nvGrpSpPr>
-        <p:cNvPr id="96" name="Shape 96"/>
+        <p:cNvPr id="97" name="Shape 97"/>
         <p:cNvGrpSpPr/>
         <p:nvPr/>
       </p:nvGrpSpPr>
@@ -2422,7 +2422,7 @@
       </p:grpSpPr>
       <p:sp>
         <p:nvSpPr>
-          <p:cNvPr id="97" name="Google Shape;97;g3d573b5558c_0_137:notes"/>
+          <p:cNvPr id="98" name="Google Shape;98;g3d573b5558c_0_137:notes"/>
           <p:cNvSpPr/>
           <p:nvPr>
             <p:ph idx="2" type="sldImg"/>
@@ -2457,7 +2457,7 @@
       </p:sp>
       <p:sp>
         <p:nvSpPr>
-          <p:cNvPr id="98" name="Google Shape;98;g3d573b5558c_0_137:notes"/>
+          <p:cNvPr id="99" name="Google Shape;99;g3d573b5558c_0_137:notes"/>
           <p:cNvSpPr txBox="1"/>
           <p:nvPr>
             <p:ph idx="1" type="body"/>
@@ -2507,7 +2507,7 @@
   <p:cSld>
     <p:spTree>
       <p:nvGrpSpPr>
-        <p:cNvPr id="103" name="Shape 103"/>
+        <p:cNvPr id="104" name="Shape 104"/>
         <p:cNvGrpSpPr/>
         <p:nvPr/>
       </p:nvGrpSpPr>
@@ -2521,7 +2521,7 @@
       </p:grpSpPr>
       <p:sp>
         <p:nvSpPr>
-          <p:cNvPr id="104" name="Google Shape;104;g3d573b5558c_0_144:notes"/>
+          <p:cNvPr id="105" name="Google Shape;105;g3d573b5558c_0_144:notes"/>
           <p:cNvSpPr/>
           <p:nvPr>
             <p:ph idx="2" type="sldImg"/>
@@ -2556,7 +2556,7 @@
       </p:sp>
       <p:sp>
         <p:nvSpPr>
-          <p:cNvPr id="105" name="Google Shape;105;g3d573b5558c_0_144:notes"/>
+          <p:cNvPr id="106" name="Google Shape;106;g3d573b5558c_0_144:notes"/>
           <p:cNvSpPr txBox="1"/>
           <p:nvPr>
             <p:ph idx="1" type="body"/>
@@ -2606,7 +2606,7 @@
   <p:cSld>
     <p:spTree>
       <p:nvGrpSpPr>
-        <p:cNvPr id="111" name="Shape 111"/>
+        <p:cNvPr id="112" name="Shape 112"/>
         <p:cNvGrpSpPr/>
         <p:nvPr/>
       </p:nvGrpSpPr>
@@ -2620,7 +2620,7 @@
       </p:grpSpPr>
       <p:sp>
         <p:nvSpPr>
-          <p:cNvPr id="112" name="Google Shape;112;g3d573b5558c_0_150:notes"/>
+          <p:cNvPr id="113" name="Google Shape;113;g3d573b5558c_0_150:notes"/>
           <p:cNvSpPr/>
           <p:nvPr>
             <p:ph idx="2" type="sldImg"/>
@@ -2655,7 +2655,7 @@
       </p:sp>
       <p:sp>
         <p:nvSpPr>
-          <p:cNvPr id="113" name="Google Shape;113;g3d573b5558c_0_150:notes"/>
+          <p:cNvPr id="114" name="Google Shape;114;g3d573b5558c_0_150:notes"/>
           <p:cNvSpPr txBox="1"/>
           <p:nvPr>
             <p:ph idx="1" type="body"/>
@@ -2705,7 +2705,7 @@
   <p:cSld>
     <p:spTree>
       <p:nvGrpSpPr>
-        <p:cNvPr id="119" name="Shape 119"/>
+        <p:cNvPr id="120" name="Shape 120"/>
         <p:cNvGrpSpPr/>
         <p:nvPr/>
       </p:nvGrpSpPr>
@@ -2719,7 +2719,7 @@
       </p:grpSpPr>
       <p:sp>
         <p:nvSpPr>
-          <p:cNvPr id="120" name="Google Shape;120;g3d573b5558c_0_158:notes"/>
+          <p:cNvPr id="121" name="Google Shape;121;g3d573b5558c_0_158:notes"/>
           <p:cNvSpPr/>
           <p:nvPr>
             <p:ph idx="2" type="sldImg"/>
@@ -2754,7 +2754,7 @@
       </p:sp>
       <p:sp>
         <p:nvSpPr>
-          <p:cNvPr id="121" name="Google Shape;121;g3d573b5558c_0_158:notes"/>
+          <p:cNvPr id="122" name="Google Shape;122;g3d573b5558c_0_158:notes"/>
           <p:cNvSpPr txBox="1"/>
           <p:nvPr>
             <p:ph idx="1" type="body"/>
@@ -8332,7 +8332,7 @@
         <p:spPr>
           <a:xfrm>
             <a:off x="0" y="4213800"/>
-            <a:ext cx="6557700" cy="929700"/>
+            <a:ext cx="2067000" cy="929700"/>
           </a:xfrm>
           <a:prstGeom prst="rect">
             <a:avLst/>
@@ -8358,6 +8358,64 @@
               <a:t>Author: Oleksandr Koval</a:t>
             </a:r>
             <a:endParaRPr sz="1400"/>
+          </a:p>
+        </p:txBody>
+      </p:sp>
+      <p:sp>
+        <p:nvSpPr>
+          <p:cNvPr id="64" name="Google Shape;64;p13"/>
+          <p:cNvSpPr txBox="1"/>
+          <p:nvPr/>
+        </p:nvSpPr>
+        <p:spPr>
+          <a:xfrm>
+            <a:off x="4288025" y="4213800"/>
+            <a:ext cx="4856100" cy="929700"/>
+          </a:xfrm>
+          <a:prstGeom prst="rect">
+            <a:avLst/>
+          </a:prstGeom>
+          <a:noFill/>
+          <a:ln>
+            <a:noFill/>
+          </a:ln>
+        </p:spPr>
+        <p:txBody>
+          <a:bodyPr anchorCtr="0" anchor="ctr" bIns="91425" lIns="91425" spcFirstLastPara="1" rIns="91425" wrap="square" tIns="91425">
+            <a:noAutofit/>
+          </a:bodyPr>
+          <a:lstStyle/>
+          <a:p>
+            <a:pPr indent="0" lvl="0" marL="914400" rtl="0" algn="r">
+              <a:spcBef>
+                <a:spcPts val="0"/>
+              </a:spcBef>
+              <a:spcAft>
+                <a:spcPts val="0"/>
+              </a:spcAft>
+              <a:buNone/>
+            </a:pPr>
+            <a:r>
+              <a:rPr lang="uk">
+                <a:solidFill>
+                  <a:schemeClr val="dk2"/>
+                </a:solidFill>
+                <a:latin typeface="Oswald"/>
+                <a:ea typeface="Oswald"/>
+                <a:cs typeface="Oswald"/>
+                <a:sym typeface="Oswald"/>
+              </a:rPr>
+              <a:t>Last updated:  2026-04-16</a:t>
+            </a:r>
+            <a:endParaRPr>
+              <a:solidFill>
+                <a:schemeClr val="dk2"/>
+              </a:solidFill>
+              <a:latin typeface="Oswald"/>
+              <a:ea typeface="Oswald"/>
+              <a:cs typeface="Oswald"/>
+              <a:sym typeface="Oswald"/>
+            </a:endParaRPr>
           </a:p>
         </p:txBody>
       </p:sp>
@@ -8374,7 +8432,7 @@
   <p:cSld>
     <p:spTree>
       <p:nvGrpSpPr>
-        <p:cNvPr id="130" name="Shape 130"/>
+        <p:cNvPr id="131" name="Shape 131"/>
         <p:cNvGrpSpPr/>
         <p:nvPr/>
       </p:nvGrpSpPr>
@@ -8388,7 +8446,7 @@
       </p:grpSpPr>
       <p:sp>
         <p:nvSpPr>
-          <p:cNvPr id="131" name="Google Shape;131;p22"/>
+          <p:cNvPr id="132" name="Google Shape;132;p22"/>
           <p:cNvSpPr txBox="1"/>
           <p:nvPr>
             <p:ph type="title"/>
@@ -8436,7 +8494,7 @@
       </p:sp>
       <p:sp>
         <p:nvSpPr>
-          <p:cNvPr id="132" name="Google Shape;132;p22"/>
+          <p:cNvPr id="133" name="Google Shape;133;p22"/>
           <p:cNvSpPr txBox="1"/>
           <p:nvPr>
             <p:ph idx="1" type="body"/>
@@ -8586,7 +8644,7 @@
       </p:sp>
       <p:pic>
         <p:nvPicPr>
-          <p:cNvPr id="133" name="Google Shape;133;p22"/>
+          <p:cNvPr id="134" name="Google Shape;134;p22"/>
           <p:cNvPicPr preferRelativeResize="0"/>
           <p:nvPr/>
         </p:nvPicPr>
@@ -8614,7 +8672,7 @@
       </p:pic>
       <p:sp>
         <p:nvSpPr>
-          <p:cNvPr id="134" name="Google Shape;134;p22"/>
+          <p:cNvPr id="135" name="Google Shape;135;p22"/>
           <p:cNvSpPr txBox="1"/>
           <p:nvPr>
             <p:ph idx="12" type="sldNum"/>
@@ -8684,7 +8742,7 @@
   <p:cSld>
     <p:spTree>
       <p:nvGrpSpPr>
-        <p:cNvPr id="138" name="Shape 138"/>
+        <p:cNvPr id="139" name="Shape 139"/>
         <p:cNvGrpSpPr/>
         <p:nvPr/>
       </p:nvGrpSpPr>
@@ -8698,7 +8756,7 @@
       </p:grpSpPr>
       <p:sp>
         <p:nvSpPr>
-          <p:cNvPr id="139" name="Google Shape;139;p23"/>
+          <p:cNvPr id="140" name="Google Shape;140;p23"/>
           <p:cNvSpPr txBox="1"/>
           <p:nvPr>
             <p:ph type="title"/>
@@ -8738,7 +8796,7 @@
       </p:sp>
       <p:sp>
         <p:nvSpPr>
-          <p:cNvPr id="140" name="Google Shape;140;p23"/>
+          <p:cNvPr id="141" name="Google Shape;141;p23"/>
           <p:cNvSpPr txBox="1"/>
           <p:nvPr/>
         </p:nvSpPr>
@@ -9033,7 +9091,7 @@
       </p:sp>
       <p:sp>
         <p:nvSpPr>
-          <p:cNvPr id="141" name="Google Shape;141;p23"/>
+          <p:cNvPr id="142" name="Google Shape;142;p23"/>
           <p:cNvSpPr txBox="1"/>
           <p:nvPr>
             <p:ph idx="12" type="sldNum"/>
@@ -9103,7 +9161,7 @@
   <p:cSld>
     <p:spTree>
       <p:nvGrpSpPr>
-        <p:cNvPr id="145" name="Shape 145"/>
+        <p:cNvPr id="146" name="Shape 146"/>
         <p:cNvGrpSpPr/>
         <p:nvPr/>
       </p:nvGrpSpPr>
@@ -9117,7 +9175,7 @@
       </p:grpSpPr>
       <p:sp>
         <p:nvSpPr>
-          <p:cNvPr id="146" name="Google Shape;146;p24"/>
+          <p:cNvPr id="147" name="Google Shape;147;p24"/>
           <p:cNvSpPr txBox="1"/>
           <p:nvPr>
             <p:ph type="title"/>
@@ -9158,7 +9216,7 @@
       </p:sp>
       <p:sp>
         <p:nvSpPr>
-          <p:cNvPr id="147" name="Google Shape;147;p24"/>
+          <p:cNvPr id="148" name="Google Shape;148;p24"/>
           <p:cNvSpPr txBox="1"/>
           <p:nvPr/>
         </p:nvSpPr>
@@ -9487,7 +9545,7 @@
       </p:sp>
       <p:pic>
         <p:nvPicPr>
-          <p:cNvPr id="148" name="Google Shape;148;p24"/>
+          <p:cNvPr id="149" name="Google Shape;149;p24"/>
           <p:cNvPicPr preferRelativeResize="0"/>
           <p:nvPr/>
         </p:nvPicPr>
@@ -9515,7 +9573,7 @@
       </p:pic>
       <p:pic>
         <p:nvPicPr>
-          <p:cNvPr id="149" name="Google Shape;149;p24"/>
+          <p:cNvPr id="150" name="Google Shape;150;p24"/>
           <p:cNvPicPr preferRelativeResize="0"/>
           <p:nvPr/>
         </p:nvPicPr>
@@ -9543,7 +9601,7 @@
       </p:pic>
       <p:sp>
         <p:nvSpPr>
-          <p:cNvPr id="150" name="Google Shape;150;p24"/>
+          <p:cNvPr id="151" name="Google Shape;151;p24"/>
           <p:cNvSpPr txBox="1"/>
           <p:nvPr>
             <p:ph idx="12" type="sldNum"/>
@@ -9613,7 +9671,7 @@
   <p:cSld>
     <p:spTree>
       <p:nvGrpSpPr>
-        <p:cNvPr id="154" name="Shape 154"/>
+        <p:cNvPr id="155" name="Shape 155"/>
         <p:cNvGrpSpPr/>
         <p:nvPr/>
       </p:nvGrpSpPr>
@@ -9627,7 +9685,7 @@
       </p:grpSpPr>
       <p:sp>
         <p:nvSpPr>
-          <p:cNvPr id="155" name="Google Shape;155;p25"/>
+          <p:cNvPr id="156" name="Google Shape;156;p25"/>
           <p:cNvSpPr txBox="1"/>
           <p:nvPr>
             <p:ph type="title"/>
@@ -9667,7 +9725,7 @@
       </p:sp>
       <p:sp>
         <p:nvSpPr>
-          <p:cNvPr id="156" name="Google Shape;156;p25"/>
+          <p:cNvPr id="157" name="Google Shape;157;p25"/>
           <p:cNvSpPr txBox="1"/>
           <p:nvPr/>
         </p:nvSpPr>
@@ -9806,7 +9864,7 @@
       </p:sp>
       <p:pic>
         <p:nvPicPr>
-          <p:cNvPr id="157" name="Google Shape;157;p25"/>
+          <p:cNvPr id="158" name="Google Shape;158;p25"/>
           <p:cNvPicPr preferRelativeResize="0"/>
           <p:nvPr/>
         </p:nvPicPr>
@@ -9833,7 +9891,7 @@
       </p:pic>
       <p:sp>
         <p:nvSpPr>
-          <p:cNvPr id="158" name="Google Shape;158;p25"/>
+          <p:cNvPr id="159" name="Google Shape;159;p25"/>
           <p:cNvSpPr txBox="1"/>
           <p:nvPr/>
         </p:nvSpPr>
@@ -9914,7 +9972,7 @@
       </p:sp>
       <p:sp>
         <p:nvSpPr>
-          <p:cNvPr id="159" name="Google Shape;159;p25"/>
+          <p:cNvPr id="160" name="Google Shape;160;p25"/>
           <p:cNvSpPr txBox="1"/>
           <p:nvPr>
             <p:ph idx="12" type="sldNum"/>
@@ -9984,7 +10042,7 @@
   <p:cSld>
     <p:spTree>
       <p:nvGrpSpPr>
-        <p:cNvPr id="163" name="Shape 163"/>
+        <p:cNvPr id="164" name="Shape 164"/>
         <p:cNvGrpSpPr/>
         <p:nvPr/>
       </p:nvGrpSpPr>
@@ -9998,7 +10056,7 @@
       </p:grpSpPr>
       <p:sp>
         <p:nvSpPr>
-          <p:cNvPr id="164" name="Google Shape;164;p26"/>
+          <p:cNvPr id="165" name="Google Shape;165;p26"/>
           <p:cNvSpPr txBox="1"/>
           <p:nvPr>
             <p:ph type="title"/>
@@ -10038,7 +10096,7 @@
       </p:sp>
       <p:sp>
         <p:nvSpPr>
-          <p:cNvPr id="165" name="Google Shape;165;p26"/>
+          <p:cNvPr id="166" name="Google Shape;166;p26"/>
           <p:cNvSpPr txBox="1"/>
           <p:nvPr/>
         </p:nvSpPr>
@@ -10470,7 +10528,7 @@
       </p:sp>
       <p:sp>
         <p:nvSpPr>
-          <p:cNvPr id="166" name="Google Shape;166;p26"/>
+          <p:cNvPr id="167" name="Google Shape;167;p26"/>
           <p:cNvSpPr txBox="1"/>
           <p:nvPr>
             <p:ph idx="12" type="sldNum"/>
@@ -10540,7 +10598,7 @@
   <p:cSld>
     <p:spTree>
       <p:nvGrpSpPr>
-        <p:cNvPr id="170" name="Shape 170"/>
+        <p:cNvPr id="171" name="Shape 171"/>
         <p:cNvGrpSpPr/>
         <p:nvPr/>
       </p:nvGrpSpPr>
@@ -10554,7 +10612,7 @@
       </p:grpSpPr>
       <p:pic>
         <p:nvPicPr>
-          <p:cNvPr id="171" name="Google Shape;171;p27"/>
+          <p:cNvPr id="172" name="Google Shape;172;p27"/>
           <p:cNvPicPr preferRelativeResize="0"/>
           <p:nvPr/>
         </p:nvPicPr>
@@ -10582,7 +10640,7 @@
       </p:pic>
       <p:pic>
         <p:nvPicPr>
-          <p:cNvPr id="172" name="Google Shape;172;p27"/>
+          <p:cNvPr id="173" name="Google Shape;173;p27"/>
           <p:cNvPicPr preferRelativeResize="0"/>
           <p:nvPr/>
         </p:nvPicPr>
@@ -10610,7 +10668,7 @@
       </p:pic>
       <p:sp>
         <p:nvSpPr>
-          <p:cNvPr id="173" name="Google Shape;173;p27"/>
+          <p:cNvPr id="174" name="Google Shape;174;p27"/>
           <p:cNvSpPr txBox="1"/>
           <p:nvPr/>
         </p:nvSpPr>
@@ -10659,7 +10717,7 @@
       </p:sp>
       <p:sp>
         <p:nvSpPr>
-          <p:cNvPr id="174" name="Google Shape;174;p27"/>
+          <p:cNvPr id="175" name="Google Shape;175;p27"/>
           <p:cNvSpPr txBox="1"/>
           <p:nvPr/>
         </p:nvSpPr>
@@ -10840,7 +10898,7 @@
       </p:sp>
       <p:sp>
         <p:nvSpPr>
-          <p:cNvPr id="175" name="Google Shape;175;p27"/>
+          <p:cNvPr id="176" name="Google Shape;176;p27"/>
           <p:cNvSpPr txBox="1"/>
           <p:nvPr>
             <p:ph idx="12" type="sldNum"/>
@@ -10910,7 +10968,7 @@
   <p:cSld>
     <p:spTree>
       <p:nvGrpSpPr>
-        <p:cNvPr id="179" name="Shape 179"/>
+        <p:cNvPr id="180" name="Shape 180"/>
         <p:cNvGrpSpPr/>
         <p:nvPr/>
       </p:nvGrpSpPr>
@@ -10924,7 +10982,7 @@
       </p:grpSpPr>
       <p:pic>
         <p:nvPicPr>
-          <p:cNvPr id="180" name="Google Shape;180;p28"/>
+          <p:cNvPr id="181" name="Google Shape;181;p28"/>
           <p:cNvPicPr preferRelativeResize="0"/>
           <p:nvPr/>
         </p:nvPicPr>
@@ -10952,7 +11010,7 @@
       </p:pic>
       <p:sp>
         <p:nvSpPr>
-          <p:cNvPr id="181" name="Google Shape;181;p28"/>
+          <p:cNvPr id="182" name="Google Shape;182;p28"/>
           <p:cNvSpPr txBox="1"/>
           <p:nvPr/>
         </p:nvSpPr>
@@ -11141,7 +11199,7 @@
       </p:sp>
       <p:sp>
         <p:nvSpPr>
-          <p:cNvPr id="182" name="Google Shape;182;p28"/>
+          <p:cNvPr id="183" name="Google Shape;183;p28"/>
           <p:cNvSpPr txBox="1"/>
           <p:nvPr/>
         </p:nvSpPr>
@@ -11353,7 +11411,7 @@
       </p:sp>
       <p:sp>
         <p:nvSpPr>
-          <p:cNvPr id="183" name="Google Shape;183;p28"/>
+          <p:cNvPr id="184" name="Google Shape;184;p28"/>
           <p:cNvSpPr txBox="1"/>
           <p:nvPr>
             <p:ph idx="12" type="sldNum"/>
@@ -11423,7 +11481,7 @@
   <p:cSld>
     <p:spTree>
       <p:nvGrpSpPr>
-        <p:cNvPr id="187" name="Shape 187"/>
+        <p:cNvPr id="188" name="Shape 188"/>
         <p:cNvGrpSpPr/>
         <p:nvPr/>
       </p:nvGrpSpPr>
@@ -11437,7 +11495,7 @@
       </p:grpSpPr>
       <p:pic>
         <p:nvPicPr>
-          <p:cNvPr id="188" name="Google Shape;188;p29"/>
+          <p:cNvPr id="189" name="Google Shape;189;p29"/>
           <p:cNvPicPr preferRelativeResize="0"/>
           <p:nvPr/>
         </p:nvPicPr>
@@ -11465,7 +11523,7 @@
       </p:pic>
       <p:pic>
         <p:nvPicPr>
-          <p:cNvPr id="189" name="Google Shape;189;p29"/>
+          <p:cNvPr id="190" name="Google Shape;190;p29"/>
           <p:cNvPicPr preferRelativeResize="0"/>
           <p:nvPr/>
         </p:nvPicPr>
@@ -11493,7 +11551,7 @@
       </p:pic>
       <p:sp>
         <p:nvSpPr>
-          <p:cNvPr id="190" name="Google Shape;190;p29"/>
+          <p:cNvPr id="191" name="Google Shape;191;p29"/>
           <p:cNvSpPr txBox="1"/>
           <p:nvPr/>
         </p:nvSpPr>
@@ -11609,7 +11667,7 @@
       </p:sp>
       <p:sp>
         <p:nvSpPr>
-          <p:cNvPr id="191" name="Google Shape;191;p29"/>
+          <p:cNvPr id="192" name="Google Shape;192;p29"/>
           <p:cNvSpPr txBox="1"/>
           <p:nvPr/>
         </p:nvSpPr>
@@ -11805,7 +11863,7 @@
       </p:sp>
       <p:sp>
         <p:nvSpPr>
-          <p:cNvPr id="192" name="Google Shape;192;p29"/>
+          <p:cNvPr id="193" name="Google Shape;193;p29"/>
           <p:cNvSpPr txBox="1"/>
           <p:nvPr>
             <p:ph idx="12" type="sldNum"/>
@@ -11875,7 +11933,7 @@
   <p:cSld>
     <p:spTree>
       <p:nvGrpSpPr>
-        <p:cNvPr id="196" name="Shape 196"/>
+        <p:cNvPr id="197" name="Shape 197"/>
         <p:cNvGrpSpPr/>
         <p:nvPr/>
       </p:nvGrpSpPr>
@@ -11889,7 +11947,7 @@
       </p:grpSpPr>
       <p:pic>
         <p:nvPicPr>
-          <p:cNvPr id="197" name="Google Shape;197;p30"/>
+          <p:cNvPr id="198" name="Google Shape;198;p30"/>
           <p:cNvPicPr preferRelativeResize="0"/>
           <p:nvPr/>
         </p:nvPicPr>
@@ -11917,7 +11975,7 @@
       </p:pic>
       <p:sp>
         <p:nvSpPr>
-          <p:cNvPr id="198" name="Google Shape;198;p30"/>
+          <p:cNvPr id="199" name="Google Shape;199;p30"/>
           <p:cNvSpPr txBox="1"/>
           <p:nvPr/>
         </p:nvSpPr>
@@ -12082,7 +12140,7 @@
       </p:sp>
       <p:sp>
         <p:nvSpPr>
-          <p:cNvPr id="199" name="Google Shape;199;p30"/>
+          <p:cNvPr id="200" name="Google Shape;200;p30"/>
           <p:cNvSpPr txBox="1"/>
           <p:nvPr/>
         </p:nvSpPr>
@@ -12309,7 +12367,7 @@
       </p:sp>
       <p:pic>
         <p:nvPicPr>
-          <p:cNvPr id="200" name="Google Shape;200;p30"/>
+          <p:cNvPr id="201" name="Google Shape;201;p30"/>
           <p:cNvPicPr preferRelativeResize="0"/>
           <p:nvPr/>
         </p:nvPicPr>
@@ -12337,7 +12395,7 @@
       </p:pic>
       <p:sp>
         <p:nvSpPr>
-          <p:cNvPr id="201" name="Google Shape;201;p30"/>
+          <p:cNvPr id="202" name="Google Shape;202;p30"/>
           <p:cNvSpPr txBox="1"/>
           <p:nvPr>
             <p:ph idx="12" type="sldNum"/>
@@ -12407,7 +12465,7 @@
   <p:cSld>
     <p:spTree>
       <p:nvGrpSpPr>
-        <p:cNvPr id="205" name="Shape 205"/>
+        <p:cNvPr id="206" name="Shape 206"/>
         <p:cNvGrpSpPr/>
         <p:nvPr/>
       </p:nvGrpSpPr>
@@ -12421,7 +12479,7 @@
       </p:grpSpPr>
       <p:sp>
         <p:nvSpPr>
-          <p:cNvPr id="206" name="Google Shape;206;p31"/>
+          <p:cNvPr id="207" name="Google Shape;207;p31"/>
           <p:cNvSpPr txBox="1"/>
           <p:nvPr/>
         </p:nvSpPr>
@@ -12479,7 +12537,7 @@
       </p:sp>
       <p:sp>
         <p:nvSpPr>
-          <p:cNvPr id="207" name="Google Shape;207;p31"/>
+          <p:cNvPr id="208" name="Google Shape;208;p31"/>
           <p:cNvSpPr txBox="1"/>
           <p:nvPr/>
         </p:nvSpPr>
@@ -12779,7 +12837,7 @@
       </p:sp>
       <p:pic>
         <p:nvPicPr>
-          <p:cNvPr id="208" name="Google Shape;208;p31"/>
+          <p:cNvPr id="209" name="Google Shape;209;p31"/>
           <p:cNvPicPr preferRelativeResize="0"/>
           <p:nvPr/>
         </p:nvPicPr>
@@ -12807,7 +12865,7 @@
       </p:pic>
       <p:sp>
         <p:nvSpPr>
-          <p:cNvPr id="209" name="Google Shape;209;p31"/>
+          <p:cNvPr id="210" name="Google Shape;210;p31"/>
           <p:cNvSpPr txBox="1"/>
           <p:nvPr>
             <p:ph idx="12" type="sldNum"/>
@@ -12877,7 +12935,7 @@
   <p:cSld>
     <p:spTree>
       <p:nvGrpSpPr>
-        <p:cNvPr id="67" name="Shape 67"/>
+        <p:cNvPr id="68" name="Shape 68"/>
         <p:cNvGrpSpPr/>
         <p:nvPr/>
       </p:nvGrpSpPr>
@@ -12891,7 +12949,7 @@
       </p:grpSpPr>
       <p:sp>
         <p:nvSpPr>
-          <p:cNvPr id="68" name="Google Shape;68;p14"/>
+          <p:cNvPr id="69" name="Google Shape;69;p14"/>
           <p:cNvSpPr txBox="1"/>
           <p:nvPr>
             <p:ph type="title"/>
@@ -12931,7 +12989,7 @@
       </p:sp>
       <p:sp>
         <p:nvSpPr>
-          <p:cNvPr id="69" name="Google Shape;69;p14"/>
+          <p:cNvPr id="70" name="Google Shape;70;p14"/>
           <p:cNvSpPr txBox="1"/>
           <p:nvPr>
             <p:ph idx="1" type="body"/>
@@ -13003,7 +13061,7 @@
       </p:sp>
       <p:sp>
         <p:nvSpPr>
-          <p:cNvPr id="70" name="Google Shape;70;p14"/>
+          <p:cNvPr id="71" name="Google Shape;71;p14"/>
           <p:cNvSpPr txBox="1"/>
           <p:nvPr>
             <p:ph idx="12" type="sldNum"/>
@@ -13073,7 +13131,7 @@
   <p:cSld>
     <p:spTree>
       <p:nvGrpSpPr>
-        <p:cNvPr id="213" name="Shape 213"/>
+        <p:cNvPr id="214" name="Shape 214"/>
         <p:cNvGrpSpPr/>
         <p:nvPr/>
       </p:nvGrpSpPr>
@@ -13087,7 +13145,7 @@
       </p:grpSpPr>
       <p:sp>
         <p:nvSpPr>
-          <p:cNvPr id="214" name="Google Shape;214;p32"/>
+          <p:cNvPr id="215" name="Google Shape;215;p32"/>
           <p:cNvSpPr txBox="1"/>
           <p:nvPr>
             <p:ph type="title"/>
@@ -13127,7 +13185,7 @@
       </p:sp>
       <p:sp>
         <p:nvSpPr>
-          <p:cNvPr id="215" name="Google Shape;215;p32"/>
+          <p:cNvPr id="216" name="Google Shape;216;p32"/>
           <p:cNvSpPr txBox="1"/>
           <p:nvPr/>
         </p:nvSpPr>
@@ -13572,7 +13630,7 @@
       </p:sp>
       <p:sp>
         <p:nvSpPr>
-          <p:cNvPr id="216" name="Google Shape;216;p32"/>
+          <p:cNvPr id="217" name="Google Shape;217;p32"/>
           <p:cNvSpPr txBox="1"/>
           <p:nvPr>
             <p:ph idx="12" type="sldNum"/>
@@ -13642,7 +13700,7 @@
   <p:cSld>
     <p:spTree>
       <p:nvGrpSpPr>
-        <p:cNvPr id="220" name="Shape 220"/>
+        <p:cNvPr id="221" name="Shape 221"/>
         <p:cNvGrpSpPr/>
         <p:nvPr/>
       </p:nvGrpSpPr>
@@ -13656,7 +13714,7 @@
       </p:grpSpPr>
       <p:sp>
         <p:nvSpPr>
-          <p:cNvPr id="221" name="Google Shape;221;p33"/>
+          <p:cNvPr id="222" name="Google Shape;222;p33"/>
           <p:cNvSpPr txBox="1"/>
           <p:nvPr/>
         </p:nvSpPr>
@@ -14079,7 +14137,7 @@
       </p:sp>
       <p:sp>
         <p:nvSpPr>
-          <p:cNvPr id="222" name="Google Shape;222;p33"/>
+          <p:cNvPr id="223" name="Google Shape;223;p33"/>
           <p:cNvSpPr txBox="1"/>
           <p:nvPr>
             <p:ph idx="12" type="sldNum"/>
@@ -14145,6 +14203,64 @@
           </a:p>
         </p:txBody>
       </p:sp>
+      <p:sp>
+        <p:nvSpPr>
+          <p:cNvPr id="224" name="Google Shape;224;p33"/>
+          <p:cNvSpPr txBox="1"/>
+          <p:nvPr/>
+        </p:nvSpPr>
+        <p:spPr>
+          <a:xfrm>
+            <a:off x="0" y="4743300"/>
+            <a:ext cx="3000000" cy="400200"/>
+          </a:xfrm>
+          <a:prstGeom prst="rect">
+            <a:avLst/>
+          </a:prstGeom>
+          <a:noFill/>
+          <a:ln>
+            <a:noFill/>
+          </a:ln>
+        </p:spPr>
+        <p:txBody>
+          <a:bodyPr anchorCtr="0" anchor="ctr" bIns="91425" lIns="91425" spcFirstLastPara="1" rIns="91425" wrap="square" tIns="91425">
+            <a:noAutofit/>
+          </a:bodyPr>
+          <a:lstStyle/>
+          <a:p>
+            <a:pPr indent="0" lvl="0" marL="0" rtl="0" algn="l">
+              <a:spcBef>
+                <a:spcPts val="0"/>
+              </a:spcBef>
+              <a:spcAft>
+                <a:spcPts val="0"/>
+              </a:spcAft>
+              <a:buNone/>
+            </a:pPr>
+            <a:r>
+              <a:rPr lang="uk">
+                <a:solidFill>
+                  <a:schemeClr val="dk2"/>
+                </a:solidFill>
+                <a:latin typeface="Oswald"/>
+                <a:ea typeface="Oswald"/>
+                <a:cs typeface="Oswald"/>
+                <a:sym typeface="Oswald"/>
+              </a:rPr>
+              <a:t>Last updated:  2026-04-16</a:t>
+            </a:r>
+            <a:endParaRPr>
+              <a:solidFill>
+                <a:schemeClr val="dk2"/>
+              </a:solidFill>
+              <a:latin typeface="Oswald"/>
+              <a:ea typeface="Oswald"/>
+              <a:cs typeface="Oswald"/>
+              <a:sym typeface="Oswald"/>
+            </a:endParaRPr>
+          </a:p>
+        </p:txBody>
+      </p:sp>
     </p:spTree>
   </p:cSld>
   <p:clrMapOvr>
@@ -14158,7 +14274,7 @@
   <p:cSld>
     <p:spTree>
       <p:nvGrpSpPr>
-        <p:cNvPr id="74" name="Shape 74"/>
+        <p:cNvPr id="75" name="Shape 75"/>
         <p:cNvGrpSpPr/>
         <p:nvPr/>
       </p:nvGrpSpPr>
@@ -14172,7 +14288,7 @@
       </p:grpSpPr>
       <p:sp>
         <p:nvSpPr>
-          <p:cNvPr id="75" name="Google Shape;75;p15"/>
+          <p:cNvPr id="76" name="Google Shape;76;p15"/>
           <p:cNvSpPr txBox="1"/>
           <p:nvPr>
             <p:ph type="title"/>
@@ -14221,7 +14337,7 @@
       </p:sp>
       <p:sp>
         <p:nvSpPr>
-          <p:cNvPr id="76" name="Google Shape;76;p15"/>
+          <p:cNvPr id="77" name="Google Shape;77;p15"/>
           <p:cNvSpPr txBox="1"/>
           <p:nvPr/>
         </p:nvSpPr>
@@ -14382,7 +14498,7 @@
       </p:sp>
       <p:sp>
         <p:nvSpPr>
-          <p:cNvPr id="77" name="Google Shape;77;p15"/>
+          <p:cNvPr id="78" name="Google Shape;78;p15"/>
           <p:cNvSpPr txBox="1"/>
           <p:nvPr>
             <p:ph idx="12" type="sldNum"/>
@@ -14452,7 +14568,7 @@
   <p:cSld>
     <p:spTree>
       <p:nvGrpSpPr>
-        <p:cNvPr id="81" name="Shape 81"/>
+        <p:cNvPr id="82" name="Shape 82"/>
         <p:cNvGrpSpPr/>
         <p:nvPr/>
       </p:nvGrpSpPr>
@@ -14466,7 +14582,7 @@
       </p:grpSpPr>
       <p:sp>
         <p:nvSpPr>
-          <p:cNvPr id="82" name="Google Shape;82;p16"/>
+          <p:cNvPr id="83" name="Google Shape;83;p16"/>
           <p:cNvSpPr txBox="1"/>
           <p:nvPr>
             <p:ph type="title"/>
@@ -14514,7 +14630,7 @@
       </p:sp>
       <p:sp>
         <p:nvSpPr>
-          <p:cNvPr id="83" name="Google Shape;83;p16"/>
+          <p:cNvPr id="84" name="Google Shape;84;p16"/>
           <p:cNvSpPr txBox="1"/>
           <p:nvPr>
             <p:ph idx="1" type="body"/>
@@ -14684,7 +14800,7 @@
       </p:sp>
       <p:pic>
         <p:nvPicPr>
-          <p:cNvPr id="84" name="Google Shape;84;p16"/>
+          <p:cNvPr id="85" name="Google Shape;85;p16"/>
           <p:cNvPicPr preferRelativeResize="0"/>
           <p:nvPr/>
         </p:nvPicPr>
@@ -14712,7 +14828,7 @@
       </p:pic>
       <p:pic>
         <p:nvPicPr>
-          <p:cNvPr id="85" name="Google Shape;85;p16"/>
+          <p:cNvPr id="86" name="Google Shape;86;p16"/>
           <p:cNvPicPr preferRelativeResize="0"/>
           <p:nvPr/>
         </p:nvPicPr>
@@ -14740,7 +14856,7 @@
       </p:pic>
       <p:sp>
         <p:nvSpPr>
-          <p:cNvPr id="86" name="Google Shape;86;p16"/>
+          <p:cNvPr id="87" name="Google Shape;87;p16"/>
           <p:cNvSpPr txBox="1"/>
           <p:nvPr>
             <p:ph idx="12" type="sldNum"/>
@@ -14810,7 +14926,7 @@
   <p:cSld>
     <p:spTree>
       <p:nvGrpSpPr>
-        <p:cNvPr id="90" name="Shape 90"/>
+        <p:cNvPr id="91" name="Shape 91"/>
         <p:cNvGrpSpPr/>
         <p:nvPr/>
       </p:nvGrpSpPr>
@@ -14824,7 +14940,7 @@
       </p:grpSpPr>
       <p:sp>
         <p:nvSpPr>
-          <p:cNvPr id="91" name="Google Shape;91;p17"/>
+          <p:cNvPr id="92" name="Google Shape;92;p17"/>
           <p:cNvSpPr txBox="1"/>
           <p:nvPr>
             <p:ph type="title"/>
@@ -14864,7 +14980,7 @@
       </p:sp>
       <p:pic>
         <p:nvPicPr>
-          <p:cNvPr id="92" name="Google Shape;92;p17"/>
+          <p:cNvPr id="93" name="Google Shape;93;p17"/>
           <p:cNvPicPr preferRelativeResize="0"/>
           <p:nvPr/>
         </p:nvPicPr>
@@ -14892,7 +15008,7 @@
       </p:pic>
       <p:pic>
         <p:nvPicPr>
-          <p:cNvPr id="93" name="Google Shape;93;p17"/>
+          <p:cNvPr id="94" name="Google Shape;94;p17"/>
           <p:cNvPicPr preferRelativeResize="0"/>
           <p:nvPr/>
         </p:nvPicPr>
@@ -14920,7 +15036,7 @@
       </p:pic>
       <p:sp>
         <p:nvSpPr>
-          <p:cNvPr id="94" name="Google Shape;94;p17"/>
+          <p:cNvPr id="95" name="Google Shape;95;p17"/>
           <p:cNvSpPr txBox="1"/>
           <p:nvPr/>
         </p:nvSpPr>
@@ -15070,7 +15186,7 @@
       </p:sp>
       <p:sp>
         <p:nvSpPr>
-          <p:cNvPr id="95" name="Google Shape;95;p17"/>
+          <p:cNvPr id="96" name="Google Shape;96;p17"/>
           <p:cNvSpPr txBox="1"/>
           <p:nvPr>
             <p:ph idx="12" type="sldNum"/>
@@ -15140,7 +15256,7 @@
   <p:cSld>
     <p:spTree>
       <p:nvGrpSpPr>
-        <p:cNvPr id="99" name="Shape 99"/>
+        <p:cNvPr id="100" name="Shape 100"/>
         <p:cNvGrpSpPr/>
         <p:nvPr/>
       </p:nvGrpSpPr>
@@ -15154,7 +15270,7 @@
       </p:grpSpPr>
       <p:sp>
         <p:nvSpPr>
-          <p:cNvPr id="100" name="Google Shape;100;p18"/>
+          <p:cNvPr id="101" name="Google Shape;101;p18"/>
           <p:cNvSpPr txBox="1"/>
           <p:nvPr>
             <p:ph type="title"/>
@@ -15194,7 +15310,7 @@
       </p:sp>
       <p:sp>
         <p:nvSpPr>
-          <p:cNvPr id="101" name="Google Shape;101;p18"/>
+          <p:cNvPr id="102" name="Google Shape;102;p18"/>
           <p:cNvSpPr txBox="1"/>
           <p:nvPr/>
         </p:nvSpPr>
@@ -15861,7 +15977,7 @@
       </p:sp>
       <p:sp>
         <p:nvSpPr>
-          <p:cNvPr id="102" name="Google Shape;102;p18"/>
+          <p:cNvPr id="103" name="Google Shape;103;p18"/>
           <p:cNvSpPr txBox="1"/>
           <p:nvPr>
             <p:ph idx="12" type="sldNum"/>
@@ -15931,7 +16047,7 @@
   <p:cSld>
     <p:spTree>
       <p:nvGrpSpPr>
-        <p:cNvPr id="106" name="Shape 106"/>
+        <p:cNvPr id="107" name="Shape 107"/>
         <p:cNvGrpSpPr/>
         <p:nvPr/>
       </p:nvGrpSpPr>
@@ -15945,7 +16061,7 @@
       </p:grpSpPr>
       <p:sp>
         <p:nvSpPr>
-          <p:cNvPr id="107" name="Google Shape;107;p19"/>
+          <p:cNvPr id="108" name="Google Shape;108;p19"/>
           <p:cNvSpPr txBox="1"/>
           <p:nvPr>
             <p:ph type="title"/>
@@ -15985,7 +16101,7 @@
       </p:sp>
       <p:sp>
         <p:nvSpPr>
-          <p:cNvPr id="108" name="Google Shape;108;p19"/>
+          <p:cNvPr id="109" name="Google Shape;109;p19"/>
           <p:cNvSpPr txBox="1"/>
           <p:nvPr>
             <p:ph idx="1" type="body"/>
@@ -16101,7 +16217,7 @@
       </p:sp>
       <p:pic>
         <p:nvPicPr>
-          <p:cNvPr id="109" name="Google Shape;109;p19"/>
+          <p:cNvPr id="110" name="Google Shape;110;p19"/>
           <p:cNvPicPr preferRelativeResize="0"/>
           <p:nvPr/>
         </p:nvPicPr>
@@ -16129,7 +16245,7 @@
       </p:pic>
       <p:sp>
         <p:nvSpPr>
-          <p:cNvPr id="110" name="Google Shape;110;p19"/>
+          <p:cNvPr id="111" name="Google Shape;111;p19"/>
           <p:cNvSpPr txBox="1"/>
           <p:nvPr>
             <p:ph idx="12" type="sldNum"/>
@@ -16208,7 +16324,7 @@
   <p:cSld>
     <p:spTree>
       <p:nvGrpSpPr>
-        <p:cNvPr id="114" name="Shape 114"/>
+        <p:cNvPr id="115" name="Shape 115"/>
         <p:cNvGrpSpPr/>
         <p:nvPr/>
       </p:nvGrpSpPr>
@@ -16222,7 +16338,7 @@
       </p:grpSpPr>
       <p:sp>
         <p:nvSpPr>
-          <p:cNvPr id="115" name="Google Shape;115;p20"/>
+          <p:cNvPr id="116" name="Google Shape;116;p20"/>
           <p:cNvSpPr txBox="1"/>
           <p:nvPr>
             <p:ph type="title"/>
@@ -16262,7 +16378,7 @@
       </p:sp>
       <p:pic>
         <p:nvPicPr>
-          <p:cNvPr id="116" name="Google Shape;116;p20"/>
+          <p:cNvPr id="117" name="Google Shape;117;p20"/>
           <p:cNvPicPr preferRelativeResize="0"/>
           <p:nvPr/>
         </p:nvPicPr>
@@ -16290,7 +16406,7 @@
       </p:pic>
       <p:sp>
         <p:nvSpPr>
-          <p:cNvPr id="117" name="Google Shape;117;p20"/>
+          <p:cNvPr id="118" name="Google Shape;118;p20"/>
           <p:cNvSpPr txBox="1"/>
           <p:nvPr/>
         </p:nvSpPr>
@@ -16551,7 +16667,7 @@
       </p:sp>
       <p:sp>
         <p:nvSpPr>
-          <p:cNvPr id="118" name="Google Shape;118;p20"/>
+          <p:cNvPr id="119" name="Google Shape;119;p20"/>
           <p:cNvSpPr txBox="1"/>
           <p:nvPr>
             <p:ph idx="12" type="sldNum"/>
@@ -16621,7 +16737,7 @@
   <p:cSld>
     <p:spTree>
       <p:nvGrpSpPr>
-        <p:cNvPr id="122" name="Shape 122"/>
+        <p:cNvPr id="123" name="Shape 123"/>
         <p:cNvGrpSpPr/>
         <p:nvPr/>
       </p:nvGrpSpPr>
@@ -16635,7 +16751,7 @@
       </p:grpSpPr>
       <p:sp>
         <p:nvSpPr>
-          <p:cNvPr id="123" name="Google Shape;123;p21"/>
+          <p:cNvPr id="124" name="Google Shape;124;p21"/>
           <p:cNvSpPr txBox="1"/>
           <p:nvPr>
             <p:ph type="title"/>
@@ -16675,7 +16791,7 @@
       </p:sp>
       <p:sp>
         <p:nvSpPr>
-          <p:cNvPr id="124" name="Google Shape;124;p21"/>
+          <p:cNvPr id="125" name="Google Shape;125;p21"/>
           <p:cNvSpPr txBox="1"/>
           <p:nvPr/>
         </p:nvSpPr>
@@ -16892,7 +17008,7 @@
       </p:sp>
       <p:pic>
         <p:nvPicPr>
-          <p:cNvPr id="125" name="Google Shape;125;p21"/>
+          <p:cNvPr id="126" name="Google Shape;126;p21"/>
           <p:cNvPicPr preferRelativeResize="0"/>
           <p:nvPr/>
         </p:nvPicPr>
@@ -16920,7 +17036,7 @@
       </p:pic>
       <p:sp>
         <p:nvSpPr>
-          <p:cNvPr id="126" name="Google Shape;126;p21"/>
+          <p:cNvPr id="127" name="Google Shape;127;p21"/>
           <p:cNvSpPr txBox="1"/>
           <p:nvPr>
             <p:ph idx="12" type="sldNum"/>

--- a/presentations/.github Presentation/github folder in the project.pptx
+++ b/presentations/.github Presentation/github folder in the project.pptx
@@ -29,21 +29,23 @@
     <p:sldId id="274" r:id="rId24"/>
     <p:sldId id="275" r:id="rId25"/>
     <p:sldId id="276" r:id="rId26"/>
+    <p:sldId id="277" r:id="rId27"/>
+    <p:sldId id="278" r:id="rId28"/>
   </p:sldIdLst>
   <p:sldSz cy="5143500" cx="9144000"/>
   <p:notesSz cx="6858000" cy="9144000"/>
   <p:embeddedFontLst>
     <p:embeddedFont>
       <p:font typeface="Source Code Pro"/>
-      <p:regular r:id="rId27"/>
-      <p:bold r:id="rId28"/>
-      <p:italic r:id="rId29"/>
-      <p:boldItalic r:id="rId30"/>
+      <p:regular r:id="rId29"/>
+      <p:bold r:id="rId30"/>
+      <p:italic r:id="rId31"/>
+      <p:boldItalic r:id="rId32"/>
     </p:embeddedFont>
     <p:embeddedFont>
       <p:font typeface="Oswald"/>
-      <p:regular r:id="rId31"/>
-      <p:bold r:id="rId32"/>
+      <p:regular r:id="rId33"/>
+      <p:bold r:id="rId34"/>
     </p:embeddedFont>
   </p:embeddedFontLst>
   <p:defaultTextStyle>
@@ -1927,7 +1929,7 @@
       </p:grpSpPr>
       <p:sp>
         <p:nvSpPr>
-          <p:cNvPr id="212" name="Google Shape;212;g3d59729d16c_0_35:notes"/>
+          <p:cNvPr id="212" name="Google Shape;212;g397655fce4b_0_0:notes"/>
           <p:cNvSpPr/>
           <p:nvPr>
             <p:ph idx="2" type="sldImg"/>
@@ -1962,7 +1964,7 @@
       </p:sp>
       <p:sp>
         <p:nvSpPr>
-          <p:cNvPr id="213" name="Google Shape;213;g3d59729d16c_0_35:notes"/>
+          <p:cNvPr id="213" name="Google Shape;213;g397655fce4b_0_0:notes"/>
           <p:cNvSpPr txBox="1"/>
           <p:nvPr>
             <p:ph idx="1" type="body"/>
@@ -2012,7 +2014,7 @@
   <p:cSld>
     <p:spTree>
       <p:nvGrpSpPr>
-        <p:cNvPr id="218" name="Shape 218"/>
+        <p:cNvPr id="224" name="Shape 224"/>
         <p:cNvGrpSpPr/>
         <p:nvPr/>
       </p:nvGrpSpPr>
@@ -2026,7 +2028,7 @@
       </p:grpSpPr>
       <p:sp>
         <p:nvSpPr>
-          <p:cNvPr id="219" name="Google Shape;219;g3d59729d16c_1_65:notes"/>
+          <p:cNvPr id="225" name="Google Shape;225;g397655fce4b_0_15:notes"/>
           <p:cNvSpPr/>
           <p:nvPr>
             <p:ph idx="2" type="sldImg"/>
@@ -2061,7 +2063,205 @@
       </p:sp>
       <p:sp>
         <p:nvSpPr>
-          <p:cNvPr id="220" name="Google Shape;220;g3d59729d16c_1_65:notes"/>
+          <p:cNvPr id="226" name="Google Shape;226;g397655fce4b_0_15:notes"/>
+          <p:cNvSpPr txBox="1"/>
+          <p:nvPr>
+            <p:ph idx="1" type="body"/>
+          </p:nvPr>
+        </p:nvSpPr>
+        <p:spPr>
+          <a:xfrm>
+            <a:off x="685800" y="4343400"/>
+            <a:ext cx="5486400" cy="4114800"/>
+          </a:xfrm>
+          <a:prstGeom prst="rect">
+            <a:avLst/>
+          </a:prstGeom>
+        </p:spPr>
+        <p:txBody>
+          <a:bodyPr anchorCtr="0" anchor="t" bIns="91425" lIns="91425" spcFirstLastPara="1" rIns="91425" wrap="square" tIns="91425">
+            <a:noAutofit/>
+          </a:bodyPr>
+          <a:lstStyle/>
+          <a:p>
+            <a:pPr indent="0" lvl="0" marL="0" rtl="0" algn="l">
+              <a:spcBef>
+                <a:spcPts val="0"/>
+              </a:spcBef>
+              <a:spcAft>
+                <a:spcPts val="0"/>
+              </a:spcAft>
+              <a:buNone/>
+            </a:pPr>
+            <a:r>
+              <a:t/>
+            </a:r>
+            <a:endParaRPr/>
+          </a:p>
+        </p:txBody>
+      </p:sp>
+    </p:spTree>
+  </p:cSld>
+  <p:clrMapOvr>
+    <a:masterClrMapping/>
+  </p:clrMapOvr>
+</p:notes>
+</file>
+
+<file path=ppt/notesSlides/notesSlide22.xml><?xml version="1.0" encoding="utf-8"?>
+<p:notes xmlns:a="http://schemas.openxmlformats.org/drawingml/2006/main" xmlns:r="http://schemas.openxmlformats.org/officeDocument/2006/relationships" xmlns:mc="http://schemas.openxmlformats.org/markup-compatibility/2006" xmlns:mv="urn:schemas-microsoft-com:mac:vml" xmlns:p="http://schemas.openxmlformats.org/presentationml/2006/main" xmlns:c="http://schemas.openxmlformats.org/drawingml/2006/chart" xmlns:dgm="http://schemas.openxmlformats.org/drawingml/2006/diagram" xmlns:o="urn:schemas-microsoft-com:office:office" xmlns:v="urn:schemas-microsoft-com:vml" xmlns:pvml="urn:schemas-microsoft-com:office:powerpoint" xmlns:com="http://schemas.openxmlformats.org/drawingml/2006/compatibility" xmlns:p14="http://schemas.microsoft.com/office/powerpoint/2010/main" xmlns:p15="http://schemas.microsoft.com/office/powerpoint/2012/main" xmlns:ahyp="http://schemas.microsoft.com/office/drawing/2018/hyperlinkcolor" showMasterPhAnim="0" showMasterSp="0">
+  <p:cSld>
+    <p:spTree>
+      <p:nvGrpSpPr>
+        <p:cNvPr id="234" name="Shape 234"/>
+        <p:cNvGrpSpPr/>
+        <p:nvPr/>
+      </p:nvGrpSpPr>
+      <p:grpSpPr>
+        <a:xfrm>
+          <a:off x="0" y="0"/>
+          <a:ext cx="0" cy="0"/>
+          <a:chOff x="0" y="0"/>
+          <a:chExt cx="0" cy="0"/>
+        </a:xfrm>
+      </p:grpSpPr>
+      <p:sp>
+        <p:nvSpPr>
+          <p:cNvPr id="235" name="Google Shape;235;g3d59729d16c_0_35:notes"/>
+          <p:cNvSpPr/>
+          <p:nvPr>
+            <p:ph idx="2" type="sldImg"/>
+          </p:nvPr>
+        </p:nvSpPr>
+        <p:spPr>
+          <a:xfrm>
+            <a:off x="381300" y="685800"/>
+            <a:ext cx="6096000" cy="3429000"/>
+          </a:xfrm>
+          <a:custGeom>
+            <a:rect b="b" l="l" r="r" t="t"/>
+            <a:pathLst>
+              <a:path extrusionOk="0" h="120000" w="120000">
+                <a:moveTo>
+                  <a:pt x="0" y="0"/>
+                </a:moveTo>
+                <a:lnTo>
+                  <a:pt x="120000" y="0"/>
+                </a:lnTo>
+                <a:lnTo>
+                  <a:pt x="120000" y="120000"/>
+                </a:lnTo>
+                <a:lnTo>
+                  <a:pt x="0" y="120000"/>
+                </a:lnTo>
+                <a:close/>
+              </a:path>
+            </a:pathLst>
+          </a:custGeom>
+        </p:spPr>
+      </p:sp>
+      <p:sp>
+        <p:nvSpPr>
+          <p:cNvPr id="236" name="Google Shape;236;g3d59729d16c_0_35:notes"/>
+          <p:cNvSpPr txBox="1"/>
+          <p:nvPr>
+            <p:ph idx="1" type="body"/>
+          </p:nvPr>
+        </p:nvSpPr>
+        <p:spPr>
+          <a:xfrm>
+            <a:off x="685800" y="4343400"/>
+            <a:ext cx="5486400" cy="4114800"/>
+          </a:xfrm>
+          <a:prstGeom prst="rect">
+            <a:avLst/>
+          </a:prstGeom>
+        </p:spPr>
+        <p:txBody>
+          <a:bodyPr anchorCtr="0" anchor="t" bIns="91425" lIns="91425" spcFirstLastPara="1" rIns="91425" wrap="square" tIns="91425">
+            <a:noAutofit/>
+          </a:bodyPr>
+          <a:lstStyle/>
+          <a:p>
+            <a:pPr indent="0" lvl="0" marL="0" rtl="0" algn="l">
+              <a:spcBef>
+                <a:spcPts val="0"/>
+              </a:spcBef>
+              <a:spcAft>
+                <a:spcPts val="0"/>
+              </a:spcAft>
+              <a:buNone/>
+            </a:pPr>
+            <a:r>
+              <a:t/>
+            </a:r>
+            <a:endParaRPr/>
+          </a:p>
+        </p:txBody>
+      </p:sp>
+    </p:spTree>
+  </p:cSld>
+  <p:clrMapOvr>
+    <a:masterClrMapping/>
+  </p:clrMapOvr>
+</p:notes>
+</file>
+
+<file path=ppt/notesSlides/notesSlide23.xml><?xml version="1.0" encoding="utf-8"?>
+<p:notes xmlns:a="http://schemas.openxmlformats.org/drawingml/2006/main" xmlns:r="http://schemas.openxmlformats.org/officeDocument/2006/relationships" xmlns:mc="http://schemas.openxmlformats.org/markup-compatibility/2006" xmlns:mv="urn:schemas-microsoft-com:mac:vml" xmlns:p="http://schemas.openxmlformats.org/presentationml/2006/main" xmlns:c="http://schemas.openxmlformats.org/drawingml/2006/chart" xmlns:dgm="http://schemas.openxmlformats.org/drawingml/2006/diagram" xmlns:o="urn:schemas-microsoft-com:office:office" xmlns:v="urn:schemas-microsoft-com:vml" xmlns:pvml="urn:schemas-microsoft-com:office:powerpoint" xmlns:com="http://schemas.openxmlformats.org/drawingml/2006/compatibility" xmlns:p14="http://schemas.microsoft.com/office/powerpoint/2010/main" xmlns:p15="http://schemas.microsoft.com/office/powerpoint/2012/main" xmlns:ahyp="http://schemas.microsoft.com/office/drawing/2018/hyperlinkcolor" showMasterPhAnim="0" showMasterSp="0">
+  <p:cSld>
+    <p:spTree>
+      <p:nvGrpSpPr>
+        <p:cNvPr id="241" name="Shape 241"/>
+        <p:cNvGrpSpPr/>
+        <p:nvPr/>
+      </p:nvGrpSpPr>
+      <p:grpSpPr>
+        <a:xfrm>
+          <a:off x="0" y="0"/>
+          <a:ext cx="0" cy="0"/>
+          <a:chOff x="0" y="0"/>
+          <a:chExt cx="0" cy="0"/>
+        </a:xfrm>
+      </p:grpSpPr>
+      <p:sp>
+        <p:nvSpPr>
+          <p:cNvPr id="242" name="Google Shape;242;g3d59729d16c_1_65:notes"/>
+          <p:cNvSpPr/>
+          <p:nvPr>
+            <p:ph idx="2" type="sldImg"/>
+          </p:nvPr>
+        </p:nvSpPr>
+        <p:spPr>
+          <a:xfrm>
+            <a:off x="381300" y="685800"/>
+            <a:ext cx="6096000" cy="3429000"/>
+          </a:xfrm>
+          <a:custGeom>
+            <a:rect b="b" l="l" r="r" t="t"/>
+            <a:pathLst>
+              <a:path extrusionOk="0" h="120000" w="120000">
+                <a:moveTo>
+                  <a:pt x="0" y="0"/>
+                </a:moveTo>
+                <a:lnTo>
+                  <a:pt x="120000" y="0"/>
+                </a:lnTo>
+                <a:lnTo>
+                  <a:pt x="120000" y="120000"/>
+                </a:lnTo>
+                <a:lnTo>
+                  <a:pt x="0" y="120000"/>
+                </a:lnTo>
+                <a:close/>
+              </a:path>
+            </a:pathLst>
+          </a:custGeom>
+        </p:spPr>
+      </p:sp>
+      <p:sp>
+        <p:nvSpPr>
+          <p:cNvPr id="243" name="Google Shape;243;g3d59729d16c_1_65:notes"/>
           <p:cNvSpPr txBox="1"/>
           <p:nvPr>
             <p:ph idx="1" type="body"/>
@@ -8405,7 +8605,7 @@
                 <a:cs typeface="Oswald"/>
                 <a:sym typeface="Oswald"/>
               </a:rPr>
-              <a:t>Last updated:  2026-04-16</a:t>
+              <a:t>Last updated:  2026-04-18</a:t>
             </a:r>
             <a:endParaRPr>
               <a:solidFill>
@@ -13153,6 +13353,1197 @@
         </p:nvSpPr>
         <p:spPr>
           <a:xfrm>
+            <a:off x="118500" y="39950"/>
+            <a:ext cx="5678100" cy="534300"/>
+          </a:xfrm>
+          <a:prstGeom prst="rect">
+            <a:avLst/>
+          </a:prstGeom>
+        </p:spPr>
+        <p:txBody>
+          <a:bodyPr anchorCtr="0" anchor="ctr" bIns="91425" lIns="91425" spcFirstLastPara="1" rIns="91425" wrap="square" tIns="91425">
+            <a:noAutofit/>
+          </a:bodyPr>
+          <a:lstStyle/>
+          <a:p>
+            <a:pPr indent="0" lvl="0" marL="0" rtl="0" algn="l">
+              <a:spcBef>
+                <a:spcPts val="0"/>
+              </a:spcBef>
+              <a:spcAft>
+                <a:spcPts val="0"/>
+              </a:spcAft>
+              <a:buSzPts val="990"/>
+              <a:buNone/>
+            </a:pPr>
+            <a:r>
+              <a:rPr lang="uk" sz="2700"/>
+              <a:t>TOOLS FOR AGENTS:</a:t>
+            </a:r>
+            <a:endParaRPr sz="2700"/>
+          </a:p>
+        </p:txBody>
+      </p:sp>
+      <p:sp>
+        <p:nvSpPr>
+          <p:cNvPr id="216" name="Google Shape;216;p32"/>
+          <p:cNvSpPr txBox="1"/>
+          <p:nvPr/>
+        </p:nvSpPr>
+        <p:spPr>
+          <a:xfrm>
+            <a:off x="22550" y="2748250"/>
+            <a:ext cx="3764400" cy="2308500"/>
+          </a:xfrm>
+          <a:prstGeom prst="rect">
+            <a:avLst/>
+          </a:prstGeom>
+          <a:noFill/>
+          <a:ln>
+            <a:noFill/>
+          </a:ln>
+        </p:spPr>
+        <p:txBody>
+          <a:bodyPr anchorCtr="0" anchor="t" bIns="91425" lIns="91425" spcFirstLastPara="1" rIns="91425" wrap="square" tIns="91425">
+            <a:noAutofit/>
+          </a:bodyPr>
+          <a:lstStyle/>
+          <a:p>
+            <a:pPr indent="457200" lvl="0" marL="0" rtl="0" algn="l">
+              <a:spcBef>
+                <a:spcPts val="0"/>
+              </a:spcBef>
+              <a:spcAft>
+                <a:spcPts val="0"/>
+              </a:spcAft>
+              <a:buNone/>
+            </a:pPr>
+            <a:r>
+              <a:rPr lang="uk">
+                <a:solidFill>
+                  <a:schemeClr val="dk2"/>
+                </a:solidFill>
+                <a:latin typeface="Source Code Pro"/>
+                <a:ea typeface="Source Code Pro"/>
+                <a:cs typeface="Source Code Pro"/>
+                <a:sym typeface="Source Code Pro"/>
+              </a:rPr>
+              <a:t>Each agent has a list of tools which can be used by the agent. You can see these tools in the </a:t>
+            </a:r>
+            <a:r>
+              <a:rPr b="1" lang="uk">
+                <a:solidFill>
+                  <a:schemeClr val="dk2"/>
+                </a:solidFill>
+                <a:latin typeface="Source Code Pro"/>
+                <a:ea typeface="Source Code Pro"/>
+                <a:cs typeface="Source Code Pro"/>
+                <a:sym typeface="Source Code Pro"/>
+              </a:rPr>
+              <a:t>YAML </a:t>
+            </a:r>
+            <a:r>
+              <a:rPr lang="uk">
+                <a:solidFill>
+                  <a:schemeClr val="dk2"/>
+                </a:solidFill>
+                <a:latin typeface="Source Code Pro"/>
+                <a:ea typeface="Source Code Pro"/>
+                <a:cs typeface="Source Code Pro"/>
+                <a:sym typeface="Source Code Pro"/>
+              </a:rPr>
+              <a:t>header of the </a:t>
+            </a:r>
+            <a:r>
+              <a:rPr b="1" lang="uk">
+                <a:solidFill>
+                  <a:schemeClr val="dk2"/>
+                </a:solidFill>
+                <a:latin typeface="Source Code Pro"/>
+                <a:ea typeface="Source Code Pro"/>
+                <a:cs typeface="Source Code Pro"/>
+                <a:sym typeface="Source Code Pro"/>
+              </a:rPr>
+              <a:t>.agent.md</a:t>
+            </a:r>
+            <a:r>
+              <a:rPr lang="uk">
+                <a:solidFill>
+                  <a:schemeClr val="dk2"/>
+                </a:solidFill>
+                <a:latin typeface="Source Code Pro"/>
+                <a:ea typeface="Source Code Pro"/>
+                <a:cs typeface="Source Code Pro"/>
+                <a:sym typeface="Source Code Pro"/>
+              </a:rPr>
+              <a:t> file. Also, you can check configured tools by clicking on the icon near the model picker. It will show you all allowed tools for the agent you are using now.</a:t>
+            </a:r>
+            <a:endParaRPr>
+              <a:solidFill>
+                <a:schemeClr val="dk2"/>
+              </a:solidFill>
+              <a:latin typeface="Source Code Pro"/>
+              <a:ea typeface="Source Code Pro"/>
+              <a:cs typeface="Source Code Pro"/>
+              <a:sym typeface="Source Code Pro"/>
+            </a:endParaRPr>
+          </a:p>
+          <a:p>
+            <a:pPr indent="0" lvl="0" marL="0" rtl="0" algn="l">
+              <a:spcBef>
+                <a:spcPts val="0"/>
+              </a:spcBef>
+              <a:spcAft>
+                <a:spcPts val="0"/>
+              </a:spcAft>
+              <a:buNone/>
+            </a:pPr>
+            <a:r>
+              <a:rPr lang="uk" sz="1800">
+                <a:solidFill>
+                  <a:schemeClr val="dk2"/>
+                </a:solidFill>
+                <a:latin typeface="Source Code Pro"/>
+                <a:ea typeface="Source Code Pro"/>
+                <a:cs typeface="Source Code Pro"/>
+                <a:sym typeface="Source Code Pro"/>
+              </a:rPr>
+              <a:t>	</a:t>
+            </a:r>
+            <a:endParaRPr sz="1800">
+              <a:solidFill>
+                <a:schemeClr val="dk2"/>
+              </a:solidFill>
+              <a:latin typeface="Source Code Pro"/>
+              <a:ea typeface="Source Code Pro"/>
+              <a:cs typeface="Source Code Pro"/>
+              <a:sym typeface="Source Code Pro"/>
+            </a:endParaRPr>
+          </a:p>
+        </p:txBody>
+      </p:sp>
+      <p:pic>
+        <p:nvPicPr>
+          <p:cNvPr id="217" name="Google Shape;217;p32"/>
+          <p:cNvPicPr preferRelativeResize="0"/>
+          <p:nvPr/>
+        </p:nvPicPr>
+        <p:blipFill>
+          <a:blip r:embed="rId3">
+            <a:alphaModFix/>
+          </a:blip>
+          <a:stretch>
+            <a:fillRect/>
+          </a:stretch>
+        </p:blipFill>
+        <p:spPr>
+          <a:xfrm>
+            <a:off x="118500" y="574250"/>
+            <a:ext cx="3754481" cy="2174000"/>
+          </a:xfrm>
+          <a:prstGeom prst="rect">
+            <a:avLst/>
+          </a:prstGeom>
+          <a:noFill/>
+          <a:ln>
+            <a:noFill/>
+          </a:ln>
+        </p:spPr>
+      </p:pic>
+      <p:pic>
+        <p:nvPicPr>
+          <p:cNvPr id="218" name="Google Shape;218;p32"/>
+          <p:cNvPicPr preferRelativeResize="0"/>
+          <p:nvPr/>
+        </p:nvPicPr>
+        <p:blipFill rotWithShape="1">
+          <a:blip r:embed="rId4">
+            <a:alphaModFix/>
+          </a:blip>
+          <a:srcRect b="0" l="0" r="0" t="0"/>
+          <a:stretch/>
+        </p:blipFill>
+        <p:spPr>
+          <a:xfrm>
+            <a:off x="3872975" y="3058925"/>
+            <a:ext cx="2230949" cy="1905150"/>
+          </a:xfrm>
+          <a:prstGeom prst="rect">
+            <a:avLst/>
+          </a:prstGeom>
+          <a:noFill/>
+          <a:ln>
+            <a:noFill/>
+          </a:ln>
+        </p:spPr>
+      </p:pic>
+      <p:sp>
+        <p:nvSpPr>
+          <p:cNvPr id="219" name="Google Shape;219;p32"/>
+          <p:cNvSpPr txBox="1"/>
+          <p:nvPr>
+            <p:ph idx="12" type="sldNum"/>
+          </p:nvPr>
+        </p:nvSpPr>
+        <p:spPr>
+          <a:xfrm>
+            <a:off x="8223496" y="4663225"/>
+            <a:ext cx="797700" cy="393600"/>
+          </a:xfrm>
+          <a:prstGeom prst="rect">
+            <a:avLst/>
+          </a:prstGeom>
+        </p:spPr>
+        <p:txBody>
+          <a:bodyPr anchorCtr="0" anchor="ctr" bIns="91425" lIns="91425" spcFirstLastPara="1" rIns="91425" wrap="square" tIns="91425">
+            <a:noAutofit/>
+          </a:bodyPr>
+          <a:lstStyle/>
+          <a:p>
+            <a:pPr indent="0" lvl="0" marL="0" rtl="0" algn="r">
+              <a:spcBef>
+                <a:spcPts val="0"/>
+              </a:spcBef>
+              <a:spcAft>
+                <a:spcPts val="0"/>
+              </a:spcAft>
+              <a:buNone/>
+            </a:pPr>
+            <a:r>
+              <a:rPr b="1" i="1" lang="uk" sz="2200">
+                <a:latin typeface="Oswald"/>
+                <a:ea typeface="Oswald"/>
+                <a:cs typeface="Oswald"/>
+                <a:sym typeface="Oswald"/>
+              </a:rPr>
+              <a:t># </a:t>
+            </a:r>
+            <a:fld id="{00000000-1234-1234-1234-123412341234}" type="slidenum">
+              <a:rPr b="1" lang="uk" sz="2200">
+                <a:latin typeface="Oswald"/>
+                <a:ea typeface="Oswald"/>
+                <a:cs typeface="Oswald"/>
+                <a:sym typeface="Oswald"/>
+              </a:rPr>
+              <a:t>‹#›</a:t>
+            </a:fld>
+            <a:endParaRPr b="1" sz="2200">
+              <a:latin typeface="Oswald"/>
+              <a:ea typeface="Oswald"/>
+              <a:cs typeface="Oswald"/>
+              <a:sym typeface="Oswald"/>
+            </a:endParaRPr>
+          </a:p>
+        </p:txBody>
+      </p:sp>
+      <p:pic>
+        <p:nvPicPr>
+          <p:cNvPr id="220" name="Google Shape;220;p32"/>
+          <p:cNvPicPr preferRelativeResize="0"/>
+          <p:nvPr/>
+        </p:nvPicPr>
+        <p:blipFill>
+          <a:blip r:embed="rId5">
+            <a:alphaModFix/>
+          </a:blip>
+          <a:stretch>
+            <a:fillRect/>
+          </a:stretch>
+        </p:blipFill>
+        <p:spPr>
+          <a:xfrm>
+            <a:off x="5841000" y="708687"/>
+            <a:ext cx="3006353" cy="1905150"/>
+          </a:xfrm>
+          <a:prstGeom prst="rect">
+            <a:avLst/>
+          </a:prstGeom>
+          <a:noFill/>
+          <a:ln>
+            <a:noFill/>
+          </a:ln>
+        </p:spPr>
+      </p:pic>
+      <p:cxnSp>
+        <p:nvCxnSpPr>
+          <p:cNvPr id="221" name="Google Shape;221;p32"/>
+          <p:cNvCxnSpPr/>
+          <p:nvPr/>
+        </p:nvCxnSpPr>
+        <p:spPr>
+          <a:xfrm>
+            <a:off x="3215350" y="2804700"/>
+            <a:ext cx="571500" cy="390300"/>
+          </a:xfrm>
+          <a:prstGeom prst="straightConnector1">
+            <a:avLst/>
+          </a:prstGeom>
+          <a:noFill/>
+          <a:ln cap="flat" cmpd="sng" w="9525">
+            <a:solidFill>
+              <a:schemeClr val="dk2"/>
+            </a:solidFill>
+            <a:prstDash val="solid"/>
+            <a:round/>
+            <a:headEnd len="med" w="med" type="none"/>
+            <a:tailEnd len="med" w="med" type="triangle"/>
+          </a:ln>
+        </p:spPr>
+      </p:cxnSp>
+      <p:cxnSp>
+        <p:nvCxnSpPr>
+          <p:cNvPr id="222" name="Google Shape;222;p32"/>
+          <p:cNvCxnSpPr/>
+          <p:nvPr/>
+        </p:nvCxnSpPr>
+        <p:spPr>
+          <a:xfrm flipH="1">
+            <a:off x="6415550" y="2851000"/>
+            <a:ext cx="636600" cy="483300"/>
+          </a:xfrm>
+          <a:prstGeom prst="straightConnector1">
+            <a:avLst/>
+          </a:prstGeom>
+          <a:noFill/>
+          <a:ln cap="flat" cmpd="sng" w="9525">
+            <a:solidFill>
+              <a:schemeClr val="dk2"/>
+            </a:solidFill>
+            <a:prstDash val="solid"/>
+            <a:round/>
+            <a:headEnd len="med" w="med" type="none"/>
+            <a:tailEnd len="med" w="med" type="triangle"/>
+          </a:ln>
+        </p:spPr>
+      </p:cxnSp>
+      <p:sp>
+        <p:nvSpPr>
+          <p:cNvPr id="223" name="Google Shape;223;p32"/>
+          <p:cNvSpPr txBox="1"/>
+          <p:nvPr/>
+        </p:nvSpPr>
+        <p:spPr>
+          <a:xfrm>
+            <a:off x="6459700" y="3334300"/>
+            <a:ext cx="2166900" cy="1668600"/>
+          </a:xfrm>
+          <a:prstGeom prst="rect">
+            <a:avLst/>
+          </a:prstGeom>
+          <a:noFill/>
+          <a:ln>
+            <a:noFill/>
+          </a:ln>
+        </p:spPr>
+        <p:txBody>
+          <a:bodyPr anchorCtr="0" anchor="t" bIns="91425" lIns="91425" spcFirstLastPara="1" rIns="91425" wrap="square" tIns="91425">
+            <a:noAutofit/>
+          </a:bodyPr>
+          <a:lstStyle/>
+          <a:p>
+            <a:pPr indent="0" lvl="0" marL="0" rtl="0" algn="l">
+              <a:spcBef>
+                <a:spcPts val="0"/>
+              </a:spcBef>
+              <a:spcAft>
+                <a:spcPts val="0"/>
+              </a:spcAft>
+              <a:buNone/>
+            </a:pPr>
+            <a:r>
+              <a:rPr lang="uk">
+                <a:solidFill>
+                  <a:schemeClr val="dk2"/>
+                </a:solidFill>
+                <a:latin typeface="Source Code Pro"/>
+                <a:ea typeface="Source Code Pro"/>
+                <a:cs typeface="Source Code Pro"/>
+                <a:sym typeface="Source Code Pro"/>
+              </a:rPr>
+              <a:t>Both of these options will open the “</a:t>
+            </a:r>
+            <a:r>
+              <a:rPr b="1" lang="uk">
+                <a:solidFill>
+                  <a:schemeClr val="dk2"/>
+                </a:solidFill>
+                <a:latin typeface="Source Code Pro"/>
+                <a:ea typeface="Source Code Pro"/>
+                <a:cs typeface="Source Code Pro"/>
+                <a:sym typeface="Source Code Pro"/>
+              </a:rPr>
+              <a:t>Configure Tools</a:t>
+            </a:r>
+            <a:r>
+              <a:rPr lang="uk">
+                <a:solidFill>
+                  <a:schemeClr val="dk2"/>
+                </a:solidFill>
+                <a:latin typeface="Source Code Pro"/>
+                <a:ea typeface="Source Code Pro"/>
+                <a:cs typeface="Source Code Pro"/>
+                <a:sym typeface="Source Code Pro"/>
+              </a:rPr>
+              <a:t>” panel.</a:t>
+            </a:r>
+            <a:endParaRPr>
+              <a:solidFill>
+                <a:schemeClr val="dk2"/>
+              </a:solidFill>
+              <a:latin typeface="Source Code Pro"/>
+              <a:ea typeface="Source Code Pro"/>
+              <a:cs typeface="Source Code Pro"/>
+              <a:sym typeface="Source Code Pro"/>
+            </a:endParaRPr>
+          </a:p>
+          <a:p>
+            <a:pPr indent="0" lvl="0" marL="0" rtl="0" algn="l">
+              <a:spcBef>
+                <a:spcPts val="0"/>
+              </a:spcBef>
+              <a:spcAft>
+                <a:spcPts val="0"/>
+              </a:spcAft>
+              <a:buNone/>
+            </a:pPr>
+            <a:r>
+              <a:rPr lang="uk">
+                <a:solidFill>
+                  <a:schemeClr val="dk2"/>
+                </a:solidFill>
+                <a:latin typeface="Source Code Pro"/>
+                <a:ea typeface="Source Code Pro"/>
+                <a:cs typeface="Source Code Pro"/>
+                <a:sym typeface="Source Code Pro"/>
+              </a:rPr>
+              <a:t>	You can find more info </a:t>
+            </a:r>
+            <a:r>
+              <a:rPr lang="uk" u="sng">
+                <a:solidFill>
+                  <a:schemeClr val="hlink"/>
+                </a:solidFill>
+                <a:latin typeface="Source Code Pro"/>
+                <a:ea typeface="Source Code Pro"/>
+                <a:cs typeface="Source Code Pro"/>
+                <a:sym typeface="Source Code Pro"/>
+                <a:hlinkClick r:id="rId6"/>
+              </a:rPr>
+              <a:t>here</a:t>
+            </a:r>
+            <a:r>
+              <a:rPr lang="uk">
+                <a:solidFill>
+                  <a:schemeClr val="dk2"/>
+                </a:solidFill>
+                <a:latin typeface="Source Code Pro"/>
+                <a:ea typeface="Source Code Pro"/>
+                <a:cs typeface="Source Code Pro"/>
+                <a:sym typeface="Source Code Pro"/>
+              </a:rPr>
+              <a:t>.</a:t>
+            </a:r>
+            <a:endParaRPr>
+              <a:solidFill>
+                <a:schemeClr val="dk2"/>
+              </a:solidFill>
+              <a:latin typeface="Source Code Pro"/>
+              <a:ea typeface="Source Code Pro"/>
+              <a:cs typeface="Source Code Pro"/>
+              <a:sym typeface="Source Code Pro"/>
+            </a:endParaRPr>
+          </a:p>
+        </p:txBody>
+      </p:sp>
+    </p:spTree>
+  </p:cSld>
+  <p:clrMapOvr>
+    <a:masterClrMapping/>
+  </p:clrMapOvr>
+</p:sld>
+</file>
+
+<file path=ppt/slides/slide21.xml><?xml version="1.0" encoding="utf-8"?>
+<p:sld xmlns:a="http://schemas.openxmlformats.org/drawingml/2006/main" xmlns:r="http://schemas.openxmlformats.org/officeDocument/2006/relationships" xmlns:mc="http://schemas.openxmlformats.org/markup-compatibility/2006" xmlns:mv="urn:schemas-microsoft-com:mac:vml" xmlns:p="http://schemas.openxmlformats.org/presentationml/2006/main" xmlns:c="http://schemas.openxmlformats.org/drawingml/2006/chart" xmlns:dgm="http://schemas.openxmlformats.org/drawingml/2006/diagram" xmlns:o="urn:schemas-microsoft-com:office:office" xmlns:v="urn:schemas-microsoft-com:vml" xmlns:pvml="urn:schemas-microsoft-com:office:powerpoint" xmlns:com="http://schemas.openxmlformats.org/drawingml/2006/compatibility" xmlns:p14="http://schemas.microsoft.com/office/powerpoint/2010/main" xmlns:p15="http://schemas.microsoft.com/office/powerpoint/2012/main" xmlns:ahyp="http://schemas.microsoft.com/office/drawing/2018/hyperlinkcolor">
+  <p:cSld>
+    <p:spTree>
+      <p:nvGrpSpPr>
+        <p:cNvPr id="227" name="Shape 227"/>
+        <p:cNvGrpSpPr/>
+        <p:nvPr/>
+      </p:nvGrpSpPr>
+      <p:grpSpPr>
+        <a:xfrm>
+          <a:off x="0" y="0"/>
+          <a:ext cx="0" cy="0"/>
+          <a:chOff x="0" y="0"/>
+          <a:chExt cx="0" cy="0"/>
+        </a:xfrm>
+      </p:grpSpPr>
+      <p:sp>
+        <p:nvSpPr>
+          <p:cNvPr id="228" name="Google Shape;228;p33"/>
+          <p:cNvSpPr txBox="1"/>
+          <p:nvPr>
+            <p:ph type="title"/>
+          </p:nvPr>
+        </p:nvSpPr>
+        <p:spPr>
+          <a:xfrm>
+            <a:off x="297000" y="67200"/>
+            <a:ext cx="5678100" cy="437100"/>
+          </a:xfrm>
+          <a:prstGeom prst="rect">
+            <a:avLst/>
+          </a:prstGeom>
+        </p:spPr>
+        <p:txBody>
+          <a:bodyPr anchorCtr="0" anchor="ctr" bIns="91425" lIns="91425" spcFirstLastPara="1" rIns="91425" wrap="square" tIns="91425">
+            <a:noAutofit/>
+          </a:bodyPr>
+          <a:lstStyle/>
+          <a:p>
+            <a:pPr indent="0" lvl="0" marL="0" rtl="0" algn="l">
+              <a:spcBef>
+                <a:spcPts val="0"/>
+              </a:spcBef>
+              <a:spcAft>
+                <a:spcPts val="0"/>
+              </a:spcAft>
+              <a:buNone/>
+            </a:pPr>
+            <a:r>
+              <a:rPr lang="uk" sz="2700"/>
+              <a:t>HANDOFFS:</a:t>
+            </a:r>
+            <a:endParaRPr sz="2700"/>
+          </a:p>
+        </p:txBody>
+      </p:sp>
+      <p:sp>
+        <p:nvSpPr>
+          <p:cNvPr id="229" name="Google Shape;229;p33"/>
+          <p:cNvSpPr txBox="1"/>
+          <p:nvPr>
+            <p:ph idx="12" type="sldNum"/>
+          </p:nvPr>
+        </p:nvSpPr>
+        <p:spPr>
+          <a:xfrm>
+            <a:off x="8218196" y="4663225"/>
+            <a:ext cx="802800" cy="393600"/>
+          </a:xfrm>
+          <a:prstGeom prst="rect">
+            <a:avLst/>
+          </a:prstGeom>
+        </p:spPr>
+        <p:txBody>
+          <a:bodyPr anchorCtr="0" anchor="ctr" bIns="91425" lIns="91425" spcFirstLastPara="1" rIns="91425" wrap="square" tIns="91425">
+            <a:noAutofit/>
+          </a:bodyPr>
+          <a:lstStyle/>
+          <a:p>
+            <a:pPr indent="0" lvl="0" marL="0" rtl="0" algn="r">
+              <a:spcBef>
+                <a:spcPts val="0"/>
+              </a:spcBef>
+              <a:spcAft>
+                <a:spcPts val="0"/>
+              </a:spcAft>
+              <a:buNone/>
+            </a:pPr>
+            <a:r>
+              <a:rPr b="1" i="1" lang="uk" sz="2200">
+                <a:latin typeface="Oswald"/>
+                <a:ea typeface="Oswald"/>
+                <a:cs typeface="Oswald"/>
+                <a:sym typeface="Oswald"/>
+              </a:rPr>
+              <a:t># </a:t>
+            </a:r>
+            <a:r>
+              <a:rPr b="1" lang="uk" sz="2200">
+                <a:latin typeface="Oswald"/>
+                <a:ea typeface="Oswald"/>
+                <a:cs typeface="Oswald"/>
+                <a:sym typeface="Oswald"/>
+              </a:rPr>
+              <a:t>21</a:t>
+            </a:r>
+            <a:endParaRPr b="1" sz="2200">
+              <a:latin typeface="Oswald"/>
+              <a:ea typeface="Oswald"/>
+              <a:cs typeface="Oswald"/>
+              <a:sym typeface="Oswald"/>
+            </a:endParaRPr>
+          </a:p>
+        </p:txBody>
+      </p:sp>
+      <p:sp>
+        <p:nvSpPr>
+          <p:cNvPr id="230" name="Google Shape;230;p33"/>
+          <p:cNvSpPr txBox="1"/>
+          <p:nvPr/>
+        </p:nvSpPr>
+        <p:spPr>
+          <a:xfrm>
+            <a:off x="1987375" y="2716600"/>
+            <a:ext cx="6920700" cy="2340300"/>
+          </a:xfrm>
+          <a:prstGeom prst="rect">
+            <a:avLst/>
+          </a:prstGeom>
+          <a:noFill/>
+          <a:ln>
+            <a:noFill/>
+          </a:ln>
+        </p:spPr>
+        <p:txBody>
+          <a:bodyPr anchorCtr="0" anchor="t" bIns="91425" lIns="91425" spcFirstLastPara="1" rIns="91425" wrap="square" tIns="91425">
+            <a:noAutofit/>
+          </a:bodyPr>
+          <a:lstStyle/>
+          <a:p>
+            <a:pPr indent="457200" lvl="0" marL="0" rtl="0" algn="l">
+              <a:spcBef>
+                <a:spcPts val="0"/>
+              </a:spcBef>
+              <a:spcAft>
+                <a:spcPts val="0"/>
+              </a:spcAft>
+              <a:buNone/>
+            </a:pPr>
+            <a:r>
+              <a:rPr b="1" lang="uk" sz="1800">
+                <a:solidFill>
+                  <a:schemeClr val="dk2"/>
+                </a:solidFill>
+                <a:latin typeface="Source Code Pro"/>
+                <a:ea typeface="Source Code Pro"/>
+                <a:cs typeface="Source Code Pro"/>
+                <a:sym typeface="Source Code Pro"/>
+              </a:rPr>
+              <a:t>handoffs </a:t>
+            </a:r>
+            <a:r>
+              <a:rPr lang="uk" sz="1800">
+                <a:solidFill>
+                  <a:schemeClr val="dk2"/>
+                </a:solidFill>
+                <a:latin typeface="Source Code Pro"/>
+                <a:ea typeface="Source Code Pro"/>
+                <a:cs typeface="Source Code Pro"/>
+                <a:sym typeface="Source Code Pro"/>
+              </a:rPr>
+              <a:t>- a configuration property that creates interactive buttons at the end of an AI's response, allowing you to seamlessly transition a task from one specialized agent to another.</a:t>
+            </a:r>
+            <a:endParaRPr sz="1800">
+              <a:solidFill>
+                <a:schemeClr val="dk2"/>
+              </a:solidFill>
+              <a:latin typeface="Source Code Pro"/>
+              <a:ea typeface="Source Code Pro"/>
+              <a:cs typeface="Source Code Pro"/>
+              <a:sym typeface="Source Code Pro"/>
+            </a:endParaRPr>
+          </a:p>
+          <a:p>
+            <a:pPr indent="457200" lvl="0" marL="0" rtl="0" algn="l">
+              <a:spcBef>
+                <a:spcPts val="0"/>
+              </a:spcBef>
+              <a:spcAft>
+                <a:spcPts val="0"/>
+              </a:spcAft>
+              <a:buNone/>
+            </a:pPr>
+            <a:r>
+              <a:rPr lang="uk" sz="1800">
+                <a:solidFill>
+                  <a:schemeClr val="dk2"/>
+                </a:solidFill>
+                <a:latin typeface="Source Code Pro"/>
+                <a:ea typeface="Source Code Pro"/>
+                <a:cs typeface="Source Code Pro"/>
+                <a:sym typeface="Source Code Pro"/>
+              </a:rPr>
+              <a:t>You can configure handoffs in the </a:t>
+            </a:r>
+            <a:r>
+              <a:rPr b="1" lang="uk" sz="1800">
+                <a:solidFill>
+                  <a:schemeClr val="dk2"/>
+                </a:solidFill>
+                <a:latin typeface="Source Code Pro"/>
+                <a:ea typeface="Source Code Pro"/>
+                <a:cs typeface="Source Code Pro"/>
+                <a:sym typeface="Source Code Pro"/>
+              </a:rPr>
+              <a:t>YAML </a:t>
+            </a:r>
+            <a:r>
+              <a:rPr lang="uk" sz="1800">
+                <a:solidFill>
+                  <a:schemeClr val="dk2"/>
+                </a:solidFill>
+                <a:latin typeface="Source Code Pro"/>
+                <a:ea typeface="Source Code Pro"/>
+                <a:cs typeface="Source Code Pro"/>
+                <a:sym typeface="Source Code Pro"/>
+              </a:rPr>
+              <a:t>header of the </a:t>
+            </a:r>
+            <a:r>
+              <a:rPr b="1" lang="uk" sz="1800">
+                <a:solidFill>
+                  <a:schemeClr val="dk2"/>
+                </a:solidFill>
+                <a:latin typeface="Source Code Pro"/>
+                <a:ea typeface="Source Code Pro"/>
+                <a:cs typeface="Source Code Pro"/>
+                <a:sym typeface="Source Code Pro"/>
+              </a:rPr>
+              <a:t>.agent.md</a:t>
+            </a:r>
+            <a:r>
+              <a:rPr lang="uk" sz="1800">
+                <a:solidFill>
+                  <a:schemeClr val="dk2"/>
+                </a:solidFill>
+                <a:latin typeface="Source Code Pro"/>
+                <a:ea typeface="Source Code Pro"/>
+                <a:cs typeface="Source Code Pro"/>
+                <a:sym typeface="Source Code Pro"/>
+              </a:rPr>
+              <a:t> file, adding as many as you want. </a:t>
+            </a:r>
+            <a:endParaRPr sz="1800">
+              <a:solidFill>
+                <a:schemeClr val="dk2"/>
+              </a:solidFill>
+              <a:latin typeface="Source Code Pro"/>
+              <a:ea typeface="Source Code Pro"/>
+              <a:cs typeface="Source Code Pro"/>
+              <a:sym typeface="Source Code Pro"/>
+            </a:endParaRPr>
+          </a:p>
+          <a:p>
+            <a:pPr indent="457200" lvl="0" marL="0" rtl="0" algn="l">
+              <a:spcBef>
+                <a:spcPts val="0"/>
+              </a:spcBef>
+              <a:spcAft>
+                <a:spcPts val="0"/>
+              </a:spcAft>
+              <a:buNone/>
+            </a:pPr>
+            <a:r>
+              <a:rPr lang="uk" sz="1800">
+                <a:solidFill>
+                  <a:schemeClr val="dk2"/>
+                </a:solidFill>
+                <a:latin typeface="Source Code Pro"/>
+                <a:ea typeface="Source Code Pro"/>
+                <a:cs typeface="Source Code Pro"/>
+                <a:sym typeface="Source Code Pro"/>
+              </a:rPr>
+              <a:t>Find more </a:t>
+            </a:r>
+            <a:r>
+              <a:rPr lang="uk" sz="1800">
+                <a:solidFill>
+                  <a:schemeClr val="dk2"/>
+                </a:solidFill>
+                <a:latin typeface="Source Code Pro"/>
+                <a:ea typeface="Source Code Pro"/>
+                <a:cs typeface="Source Code Pro"/>
+                <a:sym typeface="Source Code Pro"/>
+              </a:rPr>
+              <a:t>information</a:t>
+            </a:r>
+            <a:r>
+              <a:rPr lang="uk" sz="1800">
+                <a:solidFill>
+                  <a:schemeClr val="dk2"/>
+                </a:solidFill>
+                <a:latin typeface="Source Code Pro"/>
+                <a:ea typeface="Source Code Pro"/>
+                <a:cs typeface="Source Code Pro"/>
+                <a:sym typeface="Source Code Pro"/>
+              </a:rPr>
+              <a:t> about handoffs </a:t>
+            </a:r>
+            <a:r>
+              <a:rPr lang="uk" sz="1800" u="sng">
+                <a:solidFill>
+                  <a:schemeClr val="hlink"/>
+                </a:solidFill>
+                <a:latin typeface="Source Code Pro"/>
+                <a:ea typeface="Source Code Pro"/>
+                <a:cs typeface="Source Code Pro"/>
+                <a:sym typeface="Source Code Pro"/>
+                <a:hlinkClick r:id="rId3"/>
+              </a:rPr>
+              <a:t>here</a:t>
+            </a:r>
+            <a:r>
+              <a:rPr lang="uk" sz="1800">
+                <a:solidFill>
+                  <a:schemeClr val="dk2"/>
+                </a:solidFill>
+                <a:latin typeface="Source Code Pro"/>
+                <a:ea typeface="Source Code Pro"/>
+                <a:cs typeface="Source Code Pro"/>
+                <a:sym typeface="Source Code Pro"/>
+              </a:rPr>
+              <a:t>.</a:t>
+            </a:r>
+            <a:endParaRPr sz="1800">
+              <a:solidFill>
+                <a:schemeClr val="dk2"/>
+              </a:solidFill>
+              <a:latin typeface="Source Code Pro"/>
+              <a:ea typeface="Source Code Pro"/>
+              <a:cs typeface="Source Code Pro"/>
+              <a:sym typeface="Source Code Pro"/>
+            </a:endParaRPr>
+          </a:p>
+        </p:txBody>
+      </p:sp>
+      <p:pic>
+        <p:nvPicPr>
+          <p:cNvPr id="231" name="Google Shape;231;p33"/>
+          <p:cNvPicPr preferRelativeResize="0"/>
+          <p:nvPr/>
+        </p:nvPicPr>
+        <p:blipFill>
+          <a:blip r:embed="rId4">
+            <a:alphaModFix/>
+          </a:blip>
+          <a:stretch>
+            <a:fillRect/>
+          </a:stretch>
+        </p:blipFill>
+        <p:spPr>
+          <a:xfrm>
+            <a:off x="2153000" y="504300"/>
+            <a:ext cx="3756699" cy="2174351"/>
+          </a:xfrm>
+          <a:prstGeom prst="rect">
+            <a:avLst/>
+          </a:prstGeom>
+          <a:noFill/>
+          <a:ln>
+            <a:noFill/>
+          </a:ln>
+        </p:spPr>
+      </p:pic>
+      <p:pic>
+        <p:nvPicPr>
+          <p:cNvPr id="232" name="Google Shape;232;p33"/>
+          <p:cNvPicPr preferRelativeResize="0"/>
+          <p:nvPr/>
+        </p:nvPicPr>
+        <p:blipFill>
+          <a:blip r:embed="rId5">
+            <a:alphaModFix/>
+          </a:blip>
+          <a:stretch>
+            <a:fillRect/>
+          </a:stretch>
+        </p:blipFill>
+        <p:spPr>
+          <a:xfrm>
+            <a:off x="198475" y="504300"/>
+            <a:ext cx="1708050" cy="4530526"/>
+          </a:xfrm>
+          <a:prstGeom prst="rect">
+            <a:avLst/>
+          </a:prstGeom>
+          <a:noFill/>
+          <a:ln>
+            <a:noFill/>
+          </a:ln>
+        </p:spPr>
+      </p:pic>
+      <p:sp>
+        <p:nvSpPr>
+          <p:cNvPr id="233" name="Google Shape;233;p33"/>
+          <p:cNvSpPr txBox="1"/>
+          <p:nvPr/>
+        </p:nvSpPr>
+        <p:spPr>
+          <a:xfrm>
+            <a:off x="6096475" y="504500"/>
+            <a:ext cx="2811600" cy="2174400"/>
+          </a:xfrm>
+          <a:prstGeom prst="rect">
+            <a:avLst/>
+          </a:prstGeom>
+          <a:noFill/>
+          <a:ln>
+            <a:noFill/>
+          </a:ln>
+        </p:spPr>
+        <p:txBody>
+          <a:bodyPr anchorCtr="0" anchor="t" bIns="91425" lIns="91425" spcFirstLastPara="1" rIns="91425" wrap="square" tIns="91425">
+            <a:noAutofit/>
+          </a:bodyPr>
+          <a:lstStyle/>
+          <a:p>
+            <a:pPr indent="457200" lvl="0" marL="0" rtl="0" algn="l">
+              <a:spcBef>
+                <a:spcPts val="0"/>
+              </a:spcBef>
+              <a:spcAft>
+                <a:spcPts val="0"/>
+              </a:spcAft>
+              <a:buNone/>
+            </a:pPr>
+            <a:r>
+              <a:rPr lang="uk" sz="1800">
+                <a:solidFill>
+                  <a:schemeClr val="dk2"/>
+                </a:solidFill>
+                <a:latin typeface="Source Code Pro"/>
+                <a:ea typeface="Source Code Pro"/>
+                <a:cs typeface="Source Code Pro"/>
+                <a:sym typeface="Source Code Pro"/>
+              </a:rPr>
+              <a:t>Key arguments of a handoff:</a:t>
+            </a:r>
+            <a:endParaRPr sz="1800">
+              <a:solidFill>
+                <a:schemeClr val="dk2"/>
+              </a:solidFill>
+              <a:latin typeface="Source Code Pro"/>
+              <a:ea typeface="Source Code Pro"/>
+              <a:cs typeface="Source Code Pro"/>
+              <a:sym typeface="Source Code Pro"/>
+            </a:endParaRPr>
+          </a:p>
+          <a:p>
+            <a:pPr indent="-342900" lvl="0" marL="457200" rtl="0" algn="l">
+              <a:spcBef>
+                <a:spcPts val="0"/>
+              </a:spcBef>
+              <a:spcAft>
+                <a:spcPts val="0"/>
+              </a:spcAft>
+              <a:buClr>
+                <a:schemeClr val="dk2"/>
+              </a:buClr>
+              <a:buSzPts val="1800"/>
+              <a:buFont typeface="Source Code Pro"/>
+              <a:buChar char="❏"/>
+            </a:pPr>
+            <a:r>
+              <a:rPr b="1" lang="uk" sz="1800">
+                <a:solidFill>
+                  <a:schemeClr val="dk2"/>
+                </a:solidFill>
+                <a:latin typeface="Source Code Pro"/>
+                <a:ea typeface="Source Code Pro"/>
+                <a:cs typeface="Source Code Pro"/>
+                <a:sym typeface="Source Code Pro"/>
+              </a:rPr>
+              <a:t>label</a:t>
+            </a:r>
+            <a:endParaRPr b="1" sz="1800">
+              <a:solidFill>
+                <a:schemeClr val="dk2"/>
+              </a:solidFill>
+              <a:latin typeface="Source Code Pro"/>
+              <a:ea typeface="Source Code Pro"/>
+              <a:cs typeface="Source Code Pro"/>
+              <a:sym typeface="Source Code Pro"/>
+            </a:endParaRPr>
+          </a:p>
+          <a:p>
+            <a:pPr indent="-342900" lvl="0" marL="457200" rtl="0" algn="l">
+              <a:spcBef>
+                <a:spcPts val="0"/>
+              </a:spcBef>
+              <a:spcAft>
+                <a:spcPts val="0"/>
+              </a:spcAft>
+              <a:buClr>
+                <a:schemeClr val="dk2"/>
+              </a:buClr>
+              <a:buSzPts val="1800"/>
+              <a:buFont typeface="Source Code Pro"/>
+              <a:buChar char="❏"/>
+            </a:pPr>
+            <a:r>
+              <a:rPr b="1" lang="uk" sz="1800">
+                <a:solidFill>
+                  <a:schemeClr val="dk2"/>
+                </a:solidFill>
+                <a:latin typeface="Source Code Pro"/>
+                <a:ea typeface="Source Code Pro"/>
+                <a:cs typeface="Source Code Pro"/>
+                <a:sym typeface="Source Code Pro"/>
+              </a:rPr>
+              <a:t>agent</a:t>
+            </a:r>
+            <a:endParaRPr b="1" sz="1800">
+              <a:solidFill>
+                <a:schemeClr val="dk2"/>
+              </a:solidFill>
+              <a:latin typeface="Source Code Pro"/>
+              <a:ea typeface="Source Code Pro"/>
+              <a:cs typeface="Source Code Pro"/>
+              <a:sym typeface="Source Code Pro"/>
+            </a:endParaRPr>
+          </a:p>
+          <a:p>
+            <a:pPr indent="-342900" lvl="0" marL="457200" rtl="0" algn="l">
+              <a:spcBef>
+                <a:spcPts val="0"/>
+              </a:spcBef>
+              <a:spcAft>
+                <a:spcPts val="0"/>
+              </a:spcAft>
+              <a:buClr>
+                <a:schemeClr val="dk2"/>
+              </a:buClr>
+              <a:buSzPts val="1800"/>
+              <a:buFont typeface="Source Code Pro"/>
+              <a:buChar char="❏"/>
+            </a:pPr>
+            <a:r>
+              <a:rPr b="1" lang="uk" sz="1800">
+                <a:solidFill>
+                  <a:schemeClr val="dk2"/>
+                </a:solidFill>
+                <a:latin typeface="Source Code Pro"/>
+                <a:ea typeface="Source Code Pro"/>
+                <a:cs typeface="Source Code Pro"/>
+                <a:sym typeface="Source Code Pro"/>
+              </a:rPr>
+              <a:t>prompt</a:t>
+            </a:r>
+            <a:endParaRPr b="1" sz="1800">
+              <a:solidFill>
+                <a:schemeClr val="dk2"/>
+              </a:solidFill>
+              <a:latin typeface="Source Code Pro"/>
+              <a:ea typeface="Source Code Pro"/>
+              <a:cs typeface="Source Code Pro"/>
+              <a:sym typeface="Source Code Pro"/>
+            </a:endParaRPr>
+          </a:p>
+          <a:p>
+            <a:pPr indent="-342900" lvl="0" marL="457200" rtl="0" algn="l">
+              <a:spcBef>
+                <a:spcPts val="0"/>
+              </a:spcBef>
+              <a:spcAft>
+                <a:spcPts val="0"/>
+              </a:spcAft>
+              <a:buClr>
+                <a:schemeClr val="dk2"/>
+              </a:buClr>
+              <a:buSzPts val="1800"/>
+              <a:buFont typeface="Source Code Pro"/>
+              <a:buChar char="❏"/>
+            </a:pPr>
+            <a:r>
+              <a:rPr b="1" lang="uk" sz="1800">
+                <a:solidFill>
+                  <a:schemeClr val="dk2"/>
+                </a:solidFill>
+                <a:latin typeface="Source Code Pro"/>
+                <a:ea typeface="Source Code Pro"/>
+                <a:cs typeface="Source Code Pro"/>
+                <a:sym typeface="Source Code Pro"/>
+              </a:rPr>
+              <a:t>send </a:t>
+            </a:r>
+            <a:endParaRPr b="1" sz="1800">
+              <a:solidFill>
+                <a:schemeClr val="dk2"/>
+              </a:solidFill>
+              <a:latin typeface="Source Code Pro"/>
+              <a:ea typeface="Source Code Pro"/>
+              <a:cs typeface="Source Code Pro"/>
+              <a:sym typeface="Source Code Pro"/>
+            </a:endParaRPr>
+          </a:p>
+          <a:p>
+            <a:pPr indent="-342900" lvl="0" marL="457200" rtl="0" algn="l">
+              <a:spcBef>
+                <a:spcPts val="0"/>
+              </a:spcBef>
+              <a:spcAft>
+                <a:spcPts val="0"/>
+              </a:spcAft>
+              <a:buClr>
+                <a:schemeClr val="dk2"/>
+              </a:buClr>
+              <a:buSzPts val="1800"/>
+              <a:buFont typeface="Source Code Pro"/>
+              <a:buChar char="❏"/>
+            </a:pPr>
+            <a:r>
+              <a:rPr b="1" lang="uk" sz="1800">
+                <a:solidFill>
+                  <a:schemeClr val="dk2"/>
+                </a:solidFill>
+                <a:latin typeface="Source Code Pro"/>
+                <a:ea typeface="Source Code Pro"/>
+                <a:cs typeface="Source Code Pro"/>
+                <a:sym typeface="Source Code Pro"/>
+              </a:rPr>
+              <a:t>model</a:t>
+            </a:r>
+            <a:endParaRPr b="1" sz="1800">
+              <a:solidFill>
+                <a:schemeClr val="dk2"/>
+              </a:solidFill>
+              <a:latin typeface="Source Code Pro"/>
+              <a:ea typeface="Source Code Pro"/>
+              <a:cs typeface="Source Code Pro"/>
+              <a:sym typeface="Source Code Pro"/>
+            </a:endParaRPr>
+          </a:p>
+        </p:txBody>
+      </p:sp>
+    </p:spTree>
+  </p:cSld>
+  <p:clrMapOvr>
+    <a:masterClrMapping/>
+  </p:clrMapOvr>
+</p:sld>
+</file>
+
+<file path=ppt/slides/slide22.xml><?xml version="1.0" encoding="utf-8"?>
+<p:sld xmlns:a="http://schemas.openxmlformats.org/drawingml/2006/main" xmlns:r="http://schemas.openxmlformats.org/officeDocument/2006/relationships" xmlns:mc="http://schemas.openxmlformats.org/markup-compatibility/2006" xmlns:mv="urn:schemas-microsoft-com:mac:vml" xmlns:p="http://schemas.openxmlformats.org/presentationml/2006/main" xmlns:c="http://schemas.openxmlformats.org/drawingml/2006/chart" xmlns:dgm="http://schemas.openxmlformats.org/drawingml/2006/diagram" xmlns:o="urn:schemas-microsoft-com:office:office" xmlns:v="urn:schemas-microsoft-com:vml" xmlns:pvml="urn:schemas-microsoft-com:office:powerpoint" xmlns:com="http://schemas.openxmlformats.org/drawingml/2006/compatibility" xmlns:p14="http://schemas.microsoft.com/office/powerpoint/2010/main" xmlns:p15="http://schemas.microsoft.com/office/powerpoint/2012/main" xmlns:ahyp="http://schemas.microsoft.com/office/drawing/2018/hyperlinkcolor">
+  <p:cSld>
+    <p:spTree>
+      <p:nvGrpSpPr>
+        <p:cNvPr id="237" name="Shape 237"/>
+        <p:cNvGrpSpPr/>
+        <p:nvPr/>
+      </p:nvGrpSpPr>
+      <p:grpSpPr>
+        <a:xfrm>
+          <a:off x="0" y="0"/>
+          <a:ext cx="0" cy="0"/>
+          <a:chOff x="0" y="0"/>
+          <a:chExt cx="0" cy="0"/>
+        </a:xfrm>
+      </p:grpSpPr>
+      <p:sp>
+        <p:nvSpPr>
+          <p:cNvPr id="238" name="Google Shape;238;p34"/>
+          <p:cNvSpPr txBox="1"/>
+          <p:nvPr>
+            <p:ph type="title"/>
+          </p:nvPr>
+        </p:nvSpPr>
+        <p:spPr>
+          <a:xfrm>
             <a:off x="311700" y="372500"/>
             <a:ext cx="8520600" cy="733500"/>
           </a:xfrm>
@@ -13185,7 +14576,7 @@
       </p:sp>
       <p:sp>
         <p:nvSpPr>
-          <p:cNvPr id="216" name="Google Shape;216;p32"/>
+          <p:cNvPr id="239" name="Google Shape;239;p34"/>
           <p:cNvSpPr txBox="1"/>
           <p:nvPr/>
         </p:nvSpPr>
@@ -13630,7 +15021,7 @@
       </p:sp>
       <p:sp>
         <p:nvSpPr>
-          <p:cNvPr id="217" name="Google Shape;217;p32"/>
+          <p:cNvPr id="240" name="Google Shape;240;p34"/>
           <p:cNvSpPr txBox="1"/>
           <p:nvPr>
             <p:ph idx="12" type="sldNum"/>
@@ -13695,12 +15086,12 @@
 </p:sld>
 </file>
 
-<file path=ppt/slides/slide21.xml><?xml version="1.0" encoding="utf-8"?>
+<file path=ppt/slides/slide23.xml><?xml version="1.0" encoding="utf-8"?>
 <p:sld xmlns:a="http://schemas.openxmlformats.org/drawingml/2006/main" xmlns:r="http://schemas.openxmlformats.org/officeDocument/2006/relationships" xmlns:mc="http://schemas.openxmlformats.org/markup-compatibility/2006" xmlns:mv="urn:schemas-microsoft-com:mac:vml" xmlns:p="http://schemas.openxmlformats.org/presentationml/2006/main" xmlns:c="http://schemas.openxmlformats.org/drawingml/2006/chart" xmlns:dgm="http://schemas.openxmlformats.org/drawingml/2006/diagram" xmlns:o="urn:schemas-microsoft-com:office:office" xmlns:v="urn:schemas-microsoft-com:vml" xmlns:pvml="urn:schemas-microsoft-com:office:powerpoint" xmlns:com="http://schemas.openxmlformats.org/drawingml/2006/compatibility" xmlns:p14="http://schemas.microsoft.com/office/powerpoint/2010/main" xmlns:p15="http://schemas.microsoft.com/office/powerpoint/2012/main" xmlns:ahyp="http://schemas.microsoft.com/office/drawing/2018/hyperlinkcolor">
   <p:cSld>
     <p:spTree>
       <p:nvGrpSpPr>
-        <p:cNvPr id="221" name="Shape 221"/>
+        <p:cNvPr id="244" name="Shape 244"/>
         <p:cNvGrpSpPr/>
         <p:nvPr/>
       </p:nvGrpSpPr>
@@ -13714,7 +15105,7 @@
       </p:grpSpPr>
       <p:sp>
         <p:nvSpPr>
-          <p:cNvPr id="222" name="Google Shape;222;p33"/>
+          <p:cNvPr id="245" name="Google Shape;245;p35"/>
           <p:cNvSpPr txBox="1"/>
           <p:nvPr/>
         </p:nvSpPr>
@@ -14111,17 +15502,32 @@
             </a:endParaRPr>
           </a:p>
           <a:p>
-            <a:pPr indent="0" lvl="0" marL="457200" rtl="0" algn="l">
-              <a:spcBef>
-                <a:spcPts val="0"/>
-              </a:spcBef>
-              <a:spcAft>
-                <a:spcPts val="0"/>
-              </a:spcAft>
-              <a:buNone/>
-            </a:pPr>
-            <a:r>
-              <a:t/>
+            <a:pPr indent="-342900" lvl="0" marL="457200" rtl="0" algn="l">
+              <a:spcBef>
+                <a:spcPts val="0"/>
+              </a:spcBef>
+              <a:spcAft>
+                <a:spcPts val="0"/>
+              </a:spcAft>
+              <a:buClr>
+                <a:schemeClr val="dk2"/>
+              </a:buClr>
+              <a:buSzPts val="1800"/>
+              <a:buFont typeface="Source Code Pro"/>
+              <a:buChar char="❏"/>
+            </a:pPr>
+            <a:r>
+              <a:rPr lang="uk" sz="1800" u="sng">
+                <a:solidFill>
+                  <a:schemeClr val="hlink"/>
+                </a:solidFill>
+                <a:latin typeface="Source Code Pro"/>
+                <a:ea typeface="Source Code Pro"/>
+                <a:cs typeface="Source Code Pro"/>
+                <a:sym typeface="Source Code Pro"/>
+                <a:hlinkClick r:id="rId12"/>
+              </a:rPr>
+              <a:t>Tools for agents</a:t>
             </a:r>
             <a:endParaRPr sz="1800">
               <a:solidFill>
@@ -14133,11 +15539,72 @@
               <a:sym typeface="Source Code Pro"/>
             </a:endParaRPr>
           </a:p>
+          <a:p>
+            <a:pPr indent="-342900" lvl="0" marL="457200" rtl="0" algn="l">
+              <a:spcBef>
+                <a:spcPts val="0"/>
+              </a:spcBef>
+              <a:spcAft>
+                <a:spcPts val="0"/>
+              </a:spcAft>
+              <a:buClr>
+                <a:schemeClr val="dk2"/>
+              </a:buClr>
+              <a:buSzPts val="1800"/>
+              <a:buFont typeface="Source Code Pro"/>
+              <a:buChar char="❏"/>
+            </a:pPr>
+            <a:r>
+              <a:rPr lang="uk" sz="1800" u="sng">
+                <a:solidFill>
+                  <a:schemeClr val="hlink"/>
+                </a:solidFill>
+                <a:latin typeface="Source Code Pro"/>
+                <a:ea typeface="Source Code Pro"/>
+                <a:cs typeface="Source Code Pro"/>
+                <a:sym typeface="Source Code Pro"/>
+                <a:hlinkClick r:id="rId13"/>
+              </a:rPr>
+              <a:t>Handoffs</a:t>
+            </a:r>
+            <a:endParaRPr sz="1800">
+              <a:solidFill>
+                <a:schemeClr val="dk2"/>
+              </a:solidFill>
+              <a:latin typeface="Source Code Pro"/>
+              <a:ea typeface="Source Code Pro"/>
+              <a:cs typeface="Source Code Pro"/>
+              <a:sym typeface="Source Code Pro"/>
+            </a:endParaRPr>
+          </a:p>
+          <a:p>
+            <a:pPr indent="0" lvl="0" marL="457200" rtl="0" algn="l">
+              <a:spcBef>
+                <a:spcPts val="0"/>
+              </a:spcBef>
+              <a:spcAft>
+                <a:spcPts val="0"/>
+              </a:spcAft>
+              <a:buNone/>
+            </a:pPr>
+            <a:r>
+              <a:t/>
+            </a:r>
+            <a:endParaRPr sz="1800">
+              <a:solidFill>
+                <a:schemeClr val="dk2"/>
+              </a:solidFill>
+              <a:latin typeface="Source Code Pro"/>
+              <a:ea typeface="Source Code Pro"/>
+              <a:cs typeface="Source Code Pro"/>
+              <a:sym typeface="Source Code Pro"/>
+            </a:endParaRPr>
+          </a:p>
         </p:txBody>
       </p:sp>
       <p:sp>
         <p:nvSpPr>
-          <p:cNvPr id="223" name="Google Shape;223;p33"/>
+          <p:cNvPr id="246" name="Google Shape;246;p35"/>
           <p:cNvSpPr txBox="1"/>
           <p:nvPr>
             <p:ph idx="12" type="sldNum"/>
@@ -14205,7 +15672,7 @@
       </p:sp>
       <p:sp>
         <p:nvSpPr>
-          <p:cNvPr id="224" name="Google Shape;224;p33"/>
+          <p:cNvPr id="247" name="Google Shape;247;p35"/>
           <p:cNvSpPr txBox="1"/>
           <p:nvPr/>
         </p:nvSpPr>
@@ -14247,7 +15714,7 @@
                 <a:cs typeface="Oswald"/>
                 <a:sym typeface="Oswald"/>
               </a:rPr>
-              <a:t>Last updated:  2026-04-16</a:t>
+              <a:t>Last updated:  2026-04-18</a:t>
             </a:r>
             <a:endParaRPr>
               <a:solidFill>
